--- a/Nao and Pepper.pptx
+++ b/Nao and Pepper.pptx
@@ -252,7 +252,7 @@
           <a:p>
             <a:fld id="{243AB38A-B1B6-4CF4-9737-E1E5C73DA86F}" type="datetimeFigureOut">
               <a:rPr lang="nl-NL" smtClean="0"/>
-              <a:t>13-02-2025</a:t>
+              <a:t>06-02-2026</a:t>
             </a:fld>
             <a:endParaRPr lang="nl-NL"/>
           </a:p>
@@ -417,7 +417,7 @@
           <a:p>
             <a:fld id="{87012C6B-C807-4014-B6D4-CCA33426A2F8}" type="datetimeFigureOut">
               <a:rPr lang="nl-NL" smtClean="0"/>
-              <a:t>13-02-2025</a:t>
+              <a:t>06-02-2026</a:t>
             </a:fld>
             <a:endParaRPr lang="nl-NL"/>
           </a:p>
@@ -7974,13 +7974,13 @@
   <p:clrMapOvr>
     <a:masterClrMapping/>
   </p:clrMapOvr>
-  <mc:AlternateContent xmlns:mc="http://schemas.openxmlformats.org/markup-compatibility/2006">
-    <mc:Choice xmlns:p14="http://schemas.microsoft.com/office/powerpoint/2010/main" Requires="p14">
+  <mc:AlternateContent xmlns:mc="http://schemas.openxmlformats.org/markup-compatibility/2006" xmlns:p14="http://schemas.microsoft.com/office/powerpoint/2010/main">
+    <mc:Choice Requires="p14">
       <p:transition spd="med" p14:dur="700">
         <p:fade/>
       </p:transition>
     </mc:Choice>
-    <mc:Fallback>
+    <mc:Fallback xmlns="">
       <p:transition spd="med">
         <p:fade/>
       </p:transition>
@@ -19679,7 +19679,14 @@
             <a:pPr marL="0" lvl="2" indent="0">
               <a:buNone/>
             </a:pPr>
-            <a:endParaRPr lang="en-US" dirty="0"/>
+            <a:r>
+              <a:rPr lang="en-US" dirty="0" err="1"/>
+              <a:t>Naoqi</a:t>
+            </a:r>
+            <a:r>
+              <a:rPr lang="en-US" dirty="0"/>
+              <a:t> v2.5 for Bender, Eve</a:t>
+            </a:r>
           </a:p>
           <a:p>
             <a:pPr marL="0" lvl="2" indent="0">
@@ -19689,9 +19696,12 @@
               <a:rPr lang="en-US" dirty="0">
                 <a:hlinkClick r:id="rId3"/>
               </a:rPr>
-              <a:t>http://doc.aldebaran.com/2-4/index.html</a:t>
-            </a:r>
-            <a:endParaRPr lang="en-US" dirty="0"/>
+              <a:t>http://doc.aldebaran.com/2-5/index.html</a:t>
+            </a:r>
+            <a:r>
+              <a:rPr lang="en-US" dirty="0"/>
+              <a:t> </a:t>
+            </a:r>
           </a:p>
           <a:p>
             <a:pPr marL="0" lvl="2" indent="0">
@@ -19703,13 +19713,29 @@
             <a:pPr marL="0" lvl="2" indent="0">
               <a:buNone/>
             </a:pPr>
-            <a:endParaRPr lang="en-US" dirty="0"/>
+            <a:r>
+              <a:rPr lang="en-US" dirty="0" err="1"/>
+              <a:t>Naoqi</a:t>
+            </a:r>
+            <a:r>
+              <a:rPr lang="en-US" dirty="0"/>
+              <a:t> v2.8 for Robbie</a:t>
+            </a:r>
           </a:p>
           <a:p>
             <a:pPr marL="0" lvl="2" indent="0">
               <a:buNone/>
             </a:pPr>
-            <a:endParaRPr lang="en-US" dirty="0"/>
+            <a:r>
+              <a:rPr lang="en-US" dirty="0">
+                <a:hlinkClick r:id="rId4"/>
+              </a:rPr>
+              <a:t>http://doc.aldebaran.com/2-8/index.html</a:t>
+            </a:r>
+            <a:r>
+              <a:rPr lang="en-US" dirty="0"/>
+              <a:t> </a:t>
+            </a:r>
           </a:p>
           <a:p>
             <a:pPr lvl="2"/>

--- a/Nao and Pepper.pptx
+++ b/Nao and Pepper.pptx
@@ -5,10 +5,10 @@
     <p:sldMasterId id="2147483648" r:id="rId1"/>
   </p:sldMasterIdLst>
   <p:notesMasterIdLst>
-    <p:notesMasterId r:id="rId41"/>
+    <p:notesMasterId r:id="rId42"/>
   </p:notesMasterIdLst>
   <p:handoutMasterIdLst>
-    <p:handoutMasterId r:id="rId42"/>
+    <p:handoutMasterId r:id="rId43"/>
   </p:handoutMasterIdLst>
   <p:sldIdLst>
     <p:sldId id="271" r:id="rId2"/>
@@ -37,19 +37,20 @@
     <p:sldId id="370" r:id="rId25"/>
     <p:sldId id="373" r:id="rId26"/>
     <p:sldId id="361" r:id="rId27"/>
-    <p:sldId id="359" r:id="rId28"/>
-    <p:sldId id="374" r:id="rId29"/>
-    <p:sldId id="362" r:id="rId30"/>
-    <p:sldId id="363" r:id="rId31"/>
-    <p:sldId id="364" r:id="rId32"/>
-    <p:sldId id="365" r:id="rId33"/>
-    <p:sldId id="367" r:id="rId34"/>
-    <p:sldId id="368" r:id="rId35"/>
+    <p:sldId id="383" r:id="rId28"/>
+    <p:sldId id="359" r:id="rId29"/>
+    <p:sldId id="374" r:id="rId30"/>
+    <p:sldId id="362" r:id="rId31"/>
+    <p:sldId id="363" r:id="rId32"/>
+    <p:sldId id="364" r:id="rId33"/>
+    <p:sldId id="365" r:id="rId34"/>
+    <p:sldId id="367" r:id="rId35"/>
     <p:sldId id="375" r:id="rId36"/>
-    <p:sldId id="378" r:id="rId37"/>
-    <p:sldId id="379" r:id="rId38"/>
-    <p:sldId id="380" r:id="rId39"/>
-    <p:sldId id="369" r:id="rId40"/>
+    <p:sldId id="368" r:id="rId37"/>
+    <p:sldId id="378" r:id="rId38"/>
+    <p:sldId id="379" r:id="rId39"/>
+    <p:sldId id="380" r:id="rId40"/>
+    <p:sldId id="369" r:id="rId41"/>
   </p:sldIdLst>
   <p:sldSz cx="9144000" cy="5143500" type="screen16x9"/>
   <p:notesSz cx="6858000" cy="9144000"/>
@@ -252,7 +253,7 @@
           <a:p>
             <a:fld id="{243AB38A-B1B6-4CF4-9737-E1E5C73DA86F}" type="datetimeFigureOut">
               <a:rPr lang="nl-NL" smtClean="0"/>
-              <a:t>06-02-2026</a:t>
+              <a:t>20-04-2026</a:t>
             </a:fld>
             <a:endParaRPr lang="nl-NL"/>
           </a:p>
@@ -417,7 +418,7 @@
           <a:p>
             <a:fld id="{87012C6B-C807-4014-B6D4-CCA33426A2F8}" type="datetimeFigureOut">
               <a:rPr lang="nl-NL" smtClean="0"/>
-              <a:t>06-02-2026</a:t>
+              <a:t>20-04-2026</a:t>
             </a:fld>
             <a:endParaRPr lang="nl-NL"/>
           </a:p>
@@ -2075,7 +2076,7 @@
     </p:spTree>
     <p:extLst>
       <p:ext uri="{BB962C8B-B14F-4D97-AF65-F5344CB8AC3E}">
-        <p14:creationId xmlns:p14="http://schemas.microsoft.com/office/powerpoint/2010/main" val="3889613162"/>
+        <p14:creationId xmlns:p14="http://schemas.microsoft.com/office/powerpoint/2010/main" val="1689685314"/>
       </p:ext>
     </p:extLst>
   </p:cSld>
@@ -2158,7 +2159,7 @@
           <a:p>
             <a:fld id="{E05A9740-BD37-4DCA-BDC4-7DBBAE15FA30}" type="slidenum">
               <a:rPr lang="en-US" smtClean="0"/>
-              <a:t>29</a:t>
+              <a:t>28</a:t>
             </a:fld>
             <a:endParaRPr lang="en-US" dirty="0"/>
           </a:p>
@@ -2167,7 +2168,7 @@
     </p:spTree>
     <p:extLst>
       <p:ext uri="{BB962C8B-B14F-4D97-AF65-F5344CB8AC3E}">
-        <p14:creationId xmlns:p14="http://schemas.microsoft.com/office/powerpoint/2010/main" val="2795259812"/>
+        <p14:creationId xmlns:p14="http://schemas.microsoft.com/office/powerpoint/2010/main" val="3889613162"/>
       </p:ext>
     </p:extLst>
   </p:cSld>
@@ -2259,7 +2260,7 @@
     </p:spTree>
     <p:extLst>
       <p:ext uri="{BB962C8B-B14F-4D97-AF65-F5344CB8AC3E}">
-        <p14:creationId xmlns:p14="http://schemas.microsoft.com/office/powerpoint/2010/main" val="1194349380"/>
+        <p14:creationId xmlns:p14="http://schemas.microsoft.com/office/powerpoint/2010/main" val="2795259812"/>
       </p:ext>
     </p:extLst>
   </p:cSld>
@@ -2351,7 +2352,7 @@
     </p:spTree>
     <p:extLst>
       <p:ext uri="{BB962C8B-B14F-4D97-AF65-F5344CB8AC3E}">
-        <p14:creationId xmlns:p14="http://schemas.microsoft.com/office/powerpoint/2010/main" val="4122991365"/>
+        <p14:creationId xmlns:p14="http://schemas.microsoft.com/office/powerpoint/2010/main" val="1194349380"/>
       </p:ext>
     </p:extLst>
   </p:cSld>
@@ -2443,7 +2444,7 @@
     </p:spTree>
     <p:extLst>
       <p:ext uri="{BB962C8B-B14F-4D97-AF65-F5344CB8AC3E}">
-        <p14:creationId xmlns:p14="http://schemas.microsoft.com/office/powerpoint/2010/main" val="2772319575"/>
+        <p14:creationId xmlns:p14="http://schemas.microsoft.com/office/powerpoint/2010/main" val="4122991365"/>
       </p:ext>
     </p:extLst>
   </p:cSld>
@@ -2535,7 +2536,7 @@
     </p:spTree>
     <p:extLst>
       <p:ext uri="{BB962C8B-B14F-4D97-AF65-F5344CB8AC3E}">
-        <p14:creationId xmlns:p14="http://schemas.microsoft.com/office/powerpoint/2010/main" val="963013518"/>
+        <p14:creationId xmlns:p14="http://schemas.microsoft.com/office/powerpoint/2010/main" val="2772319575"/>
       </p:ext>
     </p:extLst>
   </p:cSld>
@@ -2627,7 +2628,7 @@
     </p:spTree>
     <p:extLst>
       <p:ext uri="{BB962C8B-B14F-4D97-AF65-F5344CB8AC3E}">
-        <p14:creationId xmlns:p14="http://schemas.microsoft.com/office/powerpoint/2010/main" val="4199799485"/>
+        <p14:creationId xmlns:p14="http://schemas.microsoft.com/office/powerpoint/2010/main" val="963013518"/>
       </p:ext>
     </p:extLst>
   </p:cSld>
@@ -2710,7 +2711,7 @@
           <a:p>
             <a:fld id="{E05A9740-BD37-4DCA-BDC4-7DBBAE15FA30}" type="slidenum">
               <a:rPr lang="en-US" smtClean="0"/>
-              <a:t>39</a:t>
+              <a:t>36</a:t>
             </a:fld>
             <a:endParaRPr lang="en-US" dirty="0"/>
           </a:p>
@@ -2719,7 +2720,7 @@
     </p:spTree>
     <p:extLst>
       <p:ext uri="{BB962C8B-B14F-4D97-AF65-F5344CB8AC3E}">
-        <p14:creationId xmlns:p14="http://schemas.microsoft.com/office/powerpoint/2010/main" val="1048530795"/>
+        <p14:creationId xmlns:p14="http://schemas.microsoft.com/office/powerpoint/2010/main" val="4199799485"/>
       </p:ext>
     </p:extLst>
   </p:cSld>
@@ -2812,6 +2813,98 @@
     <p:extLst>
       <p:ext uri="{BB962C8B-B14F-4D97-AF65-F5344CB8AC3E}">
         <p14:creationId xmlns:p14="http://schemas.microsoft.com/office/powerpoint/2010/main" val="3464691665"/>
+      </p:ext>
+    </p:extLst>
+  </p:cSld>
+  <p:clrMapOvr>
+    <a:masterClrMapping/>
+  </p:clrMapOvr>
+</p:notes>
+</file>
+
+<file path=ppt/notesSlides/notesSlide30.xml><?xml version="1.0" encoding="utf-8"?>
+<p:notes xmlns:a="http://schemas.openxmlformats.org/drawingml/2006/main" xmlns:r="http://schemas.openxmlformats.org/officeDocument/2006/relationships" xmlns:p="http://schemas.openxmlformats.org/presentationml/2006/main">
+  <p:cSld>
+    <p:spTree>
+      <p:nvGrpSpPr>
+        <p:cNvPr id="1" name=""/>
+        <p:cNvGrpSpPr/>
+        <p:nvPr/>
+      </p:nvGrpSpPr>
+      <p:grpSpPr>
+        <a:xfrm>
+          <a:off x="0" y="0"/>
+          <a:ext cx="0" cy="0"/>
+          <a:chOff x="0" y="0"/>
+          <a:chExt cx="0" cy="0"/>
+        </a:xfrm>
+      </p:grpSpPr>
+      <p:sp>
+        <p:nvSpPr>
+          <p:cNvPr id="2" name="Tijdelijke aanduiding voor dia-afbeelding 1"/>
+          <p:cNvSpPr>
+            <a:spLocks noGrp="1" noRot="1" noChangeAspect="1"/>
+          </p:cNvSpPr>
+          <p:nvPr>
+            <p:ph type="sldImg"/>
+          </p:nvPr>
+        </p:nvSpPr>
+        <p:spPr>
+          <a:xfrm>
+            <a:off x="685800" y="1143000"/>
+            <a:ext cx="5486400" cy="3086100"/>
+          </a:xfrm>
+        </p:spPr>
+      </p:sp>
+      <p:sp>
+        <p:nvSpPr>
+          <p:cNvPr id="3" name="Tijdelijke aanduiding voor notities 2"/>
+          <p:cNvSpPr>
+            <a:spLocks noGrp="1"/>
+          </p:cNvSpPr>
+          <p:nvPr>
+            <p:ph type="body" idx="1"/>
+          </p:nvPr>
+        </p:nvSpPr>
+        <p:spPr/>
+        <p:txBody>
+          <a:bodyPr/>
+          <a:lstStyle/>
+          <a:p>
+            <a:endParaRPr lang="en-US" baseline="0" dirty="0"/>
+          </a:p>
+          <a:p>
+            <a:endParaRPr lang="en-US" dirty="0"/>
+          </a:p>
+        </p:txBody>
+      </p:sp>
+      <p:sp>
+        <p:nvSpPr>
+          <p:cNvPr id="4" name="Tijdelijke aanduiding voor dianummer 3"/>
+          <p:cNvSpPr>
+            <a:spLocks noGrp="1"/>
+          </p:cNvSpPr>
+          <p:nvPr>
+            <p:ph type="sldNum" sz="quarter" idx="10"/>
+          </p:nvPr>
+        </p:nvSpPr>
+        <p:spPr/>
+        <p:txBody>
+          <a:bodyPr/>
+          <a:lstStyle/>
+          <a:p>
+            <a:fld id="{E05A9740-BD37-4DCA-BDC4-7DBBAE15FA30}" type="slidenum">
+              <a:rPr lang="en-US" smtClean="0"/>
+              <a:t>40</a:t>
+            </a:fld>
+            <a:endParaRPr lang="en-US" dirty="0"/>
+          </a:p>
+        </p:txBody>
+      </p:sp>
+    </p:spTree>
+    <p:extLst>
+      <p:ext uri="{BB962C8B-B14F-4D97-AF65-F5344CB8AC3E}">
+        <p14:creationId xmlns:p14="http://schemas.microsoft.com/office/powerpoint/2010/main" val="1048530795"/>
       </p:ext>
     </p:extLst>
   </p:cSld>
@@ -7482,7 +7575,7 @@
 </file>
 
 <file path=ppt/slides/slide10.xml><?xml version="1.0" encoding="utf-8"?>
-<p:sld xmlns:a="http://schemas.openxmlformats.org/drawingml/2006/main" xmlns:r="http://schemas.openxmlformats.org/officeDocument/2006/relationships" xmlns:p="http://schemas.openxmlformats.org/presentationml/2006/main">
+<p:sld xmlns:a="http://schemas.openxmlformats.org/drawingml/2006/main" xmlns:r="http://schemas.openxmlformats.org/officeDocument/2006/relationships" xmlns:p="http://schemas.openxmlformats.org/presentationml/2006/main" show="0">
   <p:cSld>
     <p:spTree>
       <p:nvGrpSpPr>
@@ -7693,13 +7786,13 @@
   <p:clrMapOvr>
     <a:masterClrMapping/>
   </p:clrMapOvr>
-  <mc:AlternateContent xmlns:mc="http://schemas.openxmlformats.org/markup-compatibility/2006" xmlns:p14="http://schemas.microsoft.com/office/powerpoint/2010/main">
-    <mc:Choice Requires="p14">
+  <mc:AlternateContent xmlns:mc="http://schemas.openxmlformats.org/markup-compatibility/2006">
+    <mc:Choice xmlns:p14="http://schemas.microsoft.com/office/powerpoint/2010/main" Requires="p14">
       <p:transition spd="med" p14:dur="700">
         <p:fade/>
       </p:transition>
     </mc:Choice>
-    <mc:Fallback xmlns="">
+    <mc:Fallback>
       <p:transition spd="med">
         <p:fade/>
       </p:transition>
@@ -7709,7 +7802,7 @@
 </file>
 
 <file path=ppt/slides/slide11.xml><?xml version="1.0" encoding="utf-8"?>
-<p:sld xmlns:a="http://schemas.openxmlformats.org/drawingml/2006/main" xmlns:r="http://schemas.openxmlformats.org/officeDocument/2006/relationships" xmlns:p="http://schemas.openxmlformats.org/presentationml/2006/main">
+<p:sld xmlns:a="http://schemas.openxmlformats.org/drawingml/2006/main" xmlns:r="http://schemas.openxmlformats.org/officeDocument/2006/relationships" xmlns:p="http://schemas.openxmlformats.org/presentationml/2006/main" show="0">
   <p:cSld>
     <p:spTree>
       <p:nvGrpSpPr>
@@ -7974,13 +8067,13 @@
   <p:clrMapOvr>
     <a:masterClrMapping/>
   </p:clrMapOvr>
-  <mc:AlternateContent xmlns:mc="http://schemas.openxmlformats.org/markup-compatibility/2006" xmlns:p14="http://schemas.microsoft.com/office/powerpoint/2010/main">
-    <mc:Choice Requires="p14">
+  <mc:AlternateContent xmlns:mc="http://schemas.openxmlformats.org/markup-compatibility/2006">
+    <mc:Choice xmlns:p14="http://schemas.microsoft.com/office/powerpoint/2010/main" Requires="p14">
       <p:transition spd="med" p14:dur="700">
         <p:fade/>
       </p:transition>
     </mc:Choice>
-    <mc:Fallback xmlns="">
+    <mc:Fallback>
       <p:transition spd="med">
         <p:fade/>
       </p:transition>
@@ -13790,13 +13883,8 @@
           <a:p>
             <a:r>
               <a:rPr lang="en-US" dirty="0"/>
-              <a:t>Using Python and </a:t>
-            </a:r>
-            <a:r>
-              <a:rPr lang="en-US" dirty="0" err="1"/>
-              <a:t>Naoqi</a:t>
-            </a:r>
-            <a:endParaRPr lang="en-US" dirty="0"/>
+              <a:t>Using Python and (Nao)qi</a:t>
+            </a:r>
           </a:p>
         </p:txBody>
       </p:sp>
@@ -13905,7 +13993,7 @@
           <a:p>
             <a:r>
               <a:rPr lang="en-US" dirty="0"/>
-              <a:t>Manual Python Installation</a:t>
+              <a:t>Python Installation</a:t>
             </a:r>
           </a:p>
         </p:txBody>
@@ -13930,71 +14018,140 @@
           <a:bodyPr/>
           <a:lstStyle/>
           <a:p>
-            <a:pPr lvl="2"/>
-            <a:r>
-              <a:rPr lang="en-US" dirty="0"/>
-              <a:t>Install the 32-bit version of Python 2.7</a:t>
-            </a:r>
-          </a:p>
-          <a:p>
-            <a:pPr lvl="2"/>
-            <a:r>
-              <a:rPr lang="en-US" dirty="0"/>
-              <a:t>Install the </a:t>
-            </a:r>
-            <a:r>
-              <a:rPr lang="en-US" dirty="0" err="1"/>
-              <a:t>Naoqi</a:t>
-            </a:r>
-            <a:r>
-              <a:rPr lang="en-US" dirty="0"/>
-              <a:t> SDK for Python (2.1.4 for NAO and 2.5.5 for Pepper)</a:t>
-            </a:r>
-          </a:p>
-          <a:p>
-            <a:pPr lvl="2"/>
-            <a:r>
-              <a:rPr lang="en-US" dirty="0"/>
-              <a:t>Open the Python editor “Idle” and open a Python shell</a:t>
-            </a:r>
-          </a:p>
-          <a:p>
-            <a:pPr lvl="2"/>
-            <a:endParaRPr lang="en-US" dirty="0"/>
-          </a:p>
-          <a:p>
-            <a:pPr lvl="2"/>
-            <a:endParaRPr lang="en-US" dirty="0"/>
-          </a:p>
-          <a:p>
-            <a:pPr lvl="2"/>
-            <a:r>
-              <a:rPr lang="en-US" dirty="0"/>
-              <a:t>Type</a:t>
-            </a:r>
-          </a:p>
-          <a:p>
-            <a:pPr marL="405000" lvl="4" indent="0">
-              <a:buNone/>
+            <a:pPr lvl="0"/>
+            <a:r>
+              <a:rPr lang="en-US" sz="1800" b="1" dirty="0"/>
+              <a:t>Python 3.11</a:t>
+            </a:r>
+            <a:r>
+              <a:rPr lang="en-US" sz="1800" dirty="0"/>
+              <a:t>. Python 3.x is much better than 2.7, but is still under development. -&gt; “Installation guide Python 3.docx”</a:t>
+            </a:r>
+            <a:endParaRPr lang="en-NL" sz="1800" dirty="0"/>
+          </a:p>
+          <a:p>
+            <a:pPr lvl="0"/>
+            <a:r>
+              <a:rPr lang="en-US" sz="1800" b="1" dirty="0" err="1">
+                <a:solidFill>
+                  <a:schemeClr val="bg1">
+                    <a:lumMod val="50000"/>
+                  </a:schemeClr>
+                </a:solidFill>
+              </a:rPr>
+              <a:t>WinPython</a:t>
+            </a:r>
+            <a:r>
+              <a:rPr lang="en-US" sz="1800" dirty="0">
+                <a:solidFill>
+                  <a:schemeClr val="bg1">
+                    <a:lumMod val="50000"/>
+                  </a:schemeClr>
+                </a:solidFill>
+              </a:rPr>
+              <a:t>. Pre-installed with everything. It comes with the older Python 2.7 and works well with the robot, but is hopefully no longer needed. -&gt; ”</a:t>
+            </a:r>
+            <a:r>
+              <a:rPr lang="en-US" sz="1800" b="1" dirty="0">
+                <a:solidFill>
+                  <a:schemeClr val="bg1">
+                    <a:lumMod val="50000"/>
+                  </a:schemeClr>
+                </a:solidFill>
+              </a:rPr>
+              <a:t>Installation guide Python 2.7.docx</a:t>
+            </a:r>
+            <a:r>
+              <a:rPr lang="en-US" sz="1800" dirty="0">
+                <a:solidFill>
+                  <a:schemeClr val="bg1">
+                    <a:lumMod val="50000"/>
+                  </a:schemeClr>
+                </a:solidFill>
+              </a:rPr>
+              <a:t>”</a:t>
+            </a:r>
+            <a:endParaRPr lang="en-NL" sz="1800" dirty="0">
+              <a:solidFill>
+                <a:schemeClr val="bg1">
+                  <a:lumMod val="50000"/>
+                </a:schemeClr>
+              </a:solidFill>
+            </a:endParaRPr>
+          </a:p>
+          <a:p>
+            <a:pPr lvl="0"/>
+            <a:r>
+              <a:rPr lang="en-US" sz="1800" b="1" dirty="0" err="1"/>
+              <a:t>Choregraphe</a:t>
+            </a:r>
+            <a:r>
+              <a:rPr lang="en-US" sz="1800" dirty="0"/>
+              <a:t>. </a:t>
+            </a:r>
+            <a:r>
+              <a:rPr lang="en-US" sz="1800" dirty="0" err="1"/>
+              <a:t>Choregraphe</a:t>
+            </a:r>
+            <a:r>
+              <a:rPr lang="en-US" sz="1800" dirty="0"/>
+              <a:t> is a graphical programming tool based on Python 2.7.</a:t>
+            </a:r>
+          </a:p>
+          <a:p>
+            <a:pPr marL="285750" lvl="0" indent="-285750">
+              <a:buFont typeface="Arial" panose="020B0604020202020204" pitchFamily="34" charset="0"/>
+              <a:buChar char="•"/>
             </a:pPr>
             <a:r>
-              <a:rPr lang="en-US" dirty="0">
-                <a:latin typeface="Courier New" panose="02070309020205020404" pitchFamily="49" charset="0"/>
-                <a:cs typeface="Courier New" panose="02070309020205020404" pitchFamily="49" charset="0"/>
-              </a:rPr>
-              <a:t>import </a:t>
-            </a:r>
-            <a:r>
-              <a:rPr lang="en-US" dirty="0" err="1">
-                <a:latin typeface="Courier New" panose="02070309020205020404" pitchFamily="49" charset="0"/>
-                <a:cs typeface="Courier New" panose="02070309020205020404" pitchFamily="49" charset="0"/>
-              </a:rPr>
-              <a:t>naoqi</a:t>
-            </a:r>
-            <a:endParaRPr lang="en-US" dirty="0">
-              <a:latin typeface="Courier New" panose="02070309020205020404" pitchFamily="49" charset="0"/>
-              <a:cs typeface="Courier New" panose="02070309020205020404" pitchFamily="49" charset="0"/>
-            </a:endParaRPr>
+              <a:rPr lang="en-US" sz="1800" dirty="0"/>
+              <a:t>Inspecting the state of the robot</a:t>
+            </a:r>
+            <a:endParaRPr lang="en-NL" sz="1800" dirty="0"/>
+          </a:p>
+          <a:p>
+            <a:pPr marL="285750" lvl="0" indent="-285750">
+              <a:buFont typeface="Arial" panose="020B0604020202020204" pitchFamily="34" charset="0"/>
+              <a:buChar char="•"/>
+            </a:pPr>
+            <a:r>
+              <a:rPr lang="en-US" sz="1800" dirty="0"/>
+              <a:t>Manually controlling the robot</a:t>
+            </a:r>
+            <a:endParaRPr lang="en-NL" sz="1800" dirty="0"/>
+          </a:p>
+          <a:p>
+            <a:pPr marL="285750" lvl="0" indent="-285750">
+              <a:buFont typeface="Arial" panose="020B0604020202020204" pitchFamily="34" charset="0"/>
+              <a:buChar char="•"/>
+            </a:pPr>
+            <a:r>
+              <a:rPr lang="en-US" sz="1800" dirty="0"/>
+              <a:t>Develop gestures</a:t>
+            </a:r>
+            <a:endParaRPr lang="en-NL" sz="1800" dirty="0"/>
+          </a:p>
+          <a:p>
+            <a:pPr marL="285750" lvl="0" indent="-285750">
+              <a:buFont typeface="Arial" panose="020B0604020202020204" pitchFamily="34" charset="0"/>
+              <a:buChar char="•"/>
+            </a:pPr>
+            <a:r>
+              <a:rPr lang="en-US" sz="1800" dirty="0"/>
+              <a:t>Develop dialogs</a:t>
+            </a:r>
+            <a:endParaRPr lang="en-NL" sz="1800" dirty="0"/>
+          </a:p>
+          <a:p>
+            <a:pPr marL="285750" lvl="0" indent="-285750">
+              <a:buFont typeface="Arial" panose="020B0604020202020204" pitchFamily="34" charset="0"/>
+              <a:buChar char="•"/>
+            </a:pPr>
+            <a:r>
+              <a:rPr lang="en-US" sz="1800" dirty="0"/>
+              <a:t>Use is as a robot simulator</a:t>
+            </a:r>
+            <a:endParaRPr lang="en-NL" sz="1800" dirty="0"/>
           </a:p>
           <a:p>
             <a:pPr marL="405000" lvl="4" indent="0">
@@ -14005,73 +14162,6 @@
               <a:cs typeface="Courier New" panose="02070309020205020404" pitchFamily="49" charset="0"/>
             </a:endParaRPr>
           </a:p>
-          <a:p>
-            <a:pPr lvl="2"/>
-            <a:r>
-              <a:rPr lang="en-US" dirty="0"/>
-              <a:t>If you get no error messages Python and </a:t>
-            </a:r>
-            <a:r>
-              <a:rPr lang="en-US" dirty="0" err="1"/>
-              <a:t>Naoqi</a:t>
-            </a:r>
-            <a:r>
-              <a:rPr lang="en-US" dirty="0"/>
-              <a:t> are installed correctly</a:t>
-            </a:r>
-          </a:p>
-          <a:p>
-            <a:pPr lvl="2"/>
-            <a:endParaRPr lang="en-US" dirty="0">
-              <a:latin typeface="Courier New" panose="02070309020205020404" pitchFamily="49" charset="0"/>
-              <a:cs typeface="Courier New" panose="02070309020205020404" pitchFamily="49" charset="0"/>
-            </a:endParaRPr>
-          </a:p>
-          <a:p>
-            <a:pPr lvl="2"/>
-            <a:r>
-              <a:rPr lang="en-US" dirty="0">
-                <a:cs typeface="Courier New" panose="02070309020205020404" pitchFamily="49" charset="0"/>
-              </a:rPr>
-              <a:t>You can use pip (Python Package Installer) to install packages</a:t>
-            </a:r>
-          </a:p>
-          <a:p>
-            <a:pPr lvl="3"/>
-            <a:r>
-              <a:rPr lang="en-US" dirty="0">
-                <a:cs typeface="Courier New" panose="02070309020205020404" pitchFamily="49" charset="0"/>
-              </a:rPr>
-              <a:t>In Windows: run </a:t>
-            </a:r>
-            <a:r>
-              <a:rPr lang="en-US" dirty="0" err="1">
-                <a:cs typeface="Courier New" panose="02070309020205020404" pitchFamily="49" charset="0"/>
-              </a:rPr>
-              <a:t>cmd</a:t>
-            </a:r>
-            <a:endParaRPr lang="en-US" dirty="0">
-              <a:cs typeface="Courier New" panose="02070309020205020404" pitchFamily="49" charset="0"/>
-            </a:endParaRPr>
-          </a:p>
-          <a:p>
-            <a:pPr lvl="3"/>
-            <a:r>
-              <a:rPr lang="en-US" dirty="0">
-                <a:cs typeface="Courier New" panose="02070309020205020404" pitchFamily="49" charset="0"/>
-              </a:rPr>
-              <a:t>Type python –m pip install</a:t>
-            </a:r>
-          </a:p>
-          <a:p>
-            <a:pPr marL="405000" lvl="4" indent="0">
-              <a:buNone/>
-            </a:pPr>
-            <a:endParaRPr lang="en-US" dirty="0">
-              <a:latin typeface="Courier New" panose="02070309020205020404" pitchFamily="49" charset="0"/>
-              <a:cs typeface="Courier New" panose="02070309020205020404" pitchFamily="49" charset="0"/>
-            </a:endParaRPr>
-          </a:p>
         </p:txBody>
       </p:sp>
       <p:sp>
@@ -14123,20 +14213,20 @@
     </p:spTree>
     <p:extLst>
       <p:ext uri="{BB962C8B-B14F-4D97-AF65-F5344CB8AC3E}">
-        <p14:creationId xmlns:p14="http://schemas.microsoft.com/office/powerpoint/2010/main" val="418312456"/>
+        <p14:creationId xmlns:p14="http://schemas.microsoft.com/office/powerpoint/2010/main" val="1479213865"/>
       </p:ext>
     </p:extLst>
   </p:cSld>
   <p:clrMapOvr>
     <a:masterClrMapping/>
   </p:clrMapOvr>
-  <mc:AlternateContent xmlns:mc="http://schemas.openxmlformats.org/markup-compatibility/2006" xmlns:p14="http://schemas.microsoft.com/office/powerpoint/2010/main">
-    <mc:Choice Requires="p14">
+  <mc:AlternateContent xmlns:mc="http://schemas.openxmlformats.org/markup-compatibility/2006">
+    <mc:Choice xmlns:p14="http://schemas.microsoft.com/office/powerpoint/2010/main" Requires="p14">
       <p:transition spd="med" p14:dur="700">
         <p:fade/>
       </p:transition>
     </mc:Choice>
-    <mc:Fallback xmlns="">
+    <mc:Fallback>
       <p:transition spd="med">
         <p:fade/>
       </p:transition>
@@ -14146,7 +14236,7 @@
 </file>
 
 <file path=ppt/slides/slide28.xml><?xml version="1.0" encoding="utf-8"?>
-<p:sld xmlns:a="http://schemas.openxmlformats.org/drawingml/2006/main" xmlns:r="http://schemas.openxmlformats.org/officeDocument/2006/relationships" xmlns:p="http://schemas.openxmlformats.org/presentationml/2006/main">
+<p:sld xmlns:a="http://schemas.openxmlformats.org/drawingml/2006/main" xmlns:r="http://schemas.openxmlformats.org/officeDocument/2006/relationships" xmlns:p="http://schemas.openxmlformats.org/presentationml/2006/main" show="0">
   <p:cSld>
     <p:spTree>
       <p:nvGrpSpPr>
@@ -14164,7 +14254,7 @@
       </p:grpSpPr>
       <p:sp>
         <p:nvSpPr>
-          <p:cNvPr id="2" name="Title 1"/>
+          <p:cNvPr id="2" name="Titel 1"/>
           <p:cNvSpPr>
             <a:spLocks noGrp="1"/>
           </p:cNvSpPr>
@@ -14178,28 +14268,15 @@
           <a:lstStyle/>
           <a:p>
             <a:r>
-              <a:rPr lang="nl-NL" dirty="0" err="1"/>
-              <a:t>WinPython</a:t>
-            </a:r>
-            <a:r>
-              <a:rPr lang="nl-NL" dirty="0"/>
-              <a:t> Installation (</a:t>
-            </a:r>
-            <a:r>
-              <a:rPr lang="nl-NL" dirty="0" err="1"/>
-              <a:t>Easier</a:t>
-            </a:r>
-            <a:r>
-              <a:rPr lang="nl-NL" dirty="0"/>
-              <a:t>!)</a:t>
-            </a:r>
-            <a:endParaRPr lang="en-US" dirty="0"/>
-          </a:p>
-        </p:txBody>
-      </p:sp>
-      <p:sp>
-        <p:nvSpPr>
-          <p:cNvPr id="3" name="Content Placeholder 2"/>
+              <a:rPr lang="en-US" dirty="0"/>
+              <a:t>Manual Python Installation</a:t>
+            </a:r>
+          </a:p>
+        </p:txBody>
+      </p:sp>
+      <p:sp>
+        <p:nvSpPr>
+          <p:cNvPr id="3" name="Tijdelijke aanduiding voor inhoud 2"/>
           <p:cNvSpPr>
             <a:spLocks noGrp="1"/>
           </p:cNvSpPr>
@@ -14207,250 +14284,202 @@
             <p:ph idx="1"/>
           </p:nvPr>
         </p:nvSpPr>
-        <p:spPr/>
-        <p:txBody>
-          <a:bodyPr/>
-          <a:lstStyle/>
-          <a:p>
-            <a:r>
-              <a:rPr lang="nl-NL" dirty="0" err="1"/>
-              <a:t>Install</a:t>
-            </a:r>
-            <a:r>
-              <a:rPr lang="nl-NL" dirty="0"/>
-              <a:t> </a:t>
-            </a:r>
-            <a:r>
-              <a:rPr lang="nl-NL" dirty="0" err="1"/>
-              <a:t>WinPython</a:t>
-            </a:r>
-            <a:r>
-              <a:rPr lang="nl-NL" dirty="0"/>
-              <a:t> (</a:t>
-            </a:r>
-            <a:r>
-              <a:rPr lang="nl-NL" dirty="0" err="1"/>
-              <a:t>see</a:t>
-            </a:r>
-            <a:r>
-              <a:rPr lang="nl-NL" dirty="0"/>
-              <a:t> </a:t>
-            </a:r>
-            <a:r>
-              <a:rPr lang="nl-NL" dirty="0" err="1"/>
-              <a:t>handouts</a:t>
-            </a:r>
-            <a:r>
-              <a:rPr lang="nl-NL" dirty="0"/>
-              <a:t>)</a:t>
-            </a:r>
-          </a:p>
-          <a:p>
-            <a:pPr lvl="1"/>
-            <a:r>
-              <a:rPr lang="nl-NL" dirty="0" err="1"/>
-              <a:t>Includes</a:t>
-            </a:r>
-            <a:r>
-              <a:rPr lang="nl-NL" dirty="0"/>
-              <a:t> most important </a:t>
-            </a:r>
-            <a:r>
-              <a:rPr lang="nl-NL" dirty="0" err="1"/>
-              <a:t>extensions</a:t>
-            </a:r>
-            <a:r>
-              <a:rPr lang="nl-NL" dirty="0"/>
-              <a:t>/</a:t>
-            </a:r>
-            <a:r>
-              <a:rPr lang="nl-NL" dirty="0" err="1"/>
-              <a:t>libraries</a:t>
-            </a:r>
-            <a:endParaRPr lang="nl-NL" dirty="0"/>
-          </a:p>
-          <a:p>
-            <a:r>
-              <a:rPr lang="nl-NL" dirty="0"/>
-              <a:t>Register </a:t>
-            </a:r>
-            <a:r>
-              <a:rPr lang="nl-NL" dirty="0" err="1"/>
-              <a:t>WinPython</a:t>
-            </a:r>
-            <a:r>
-              <a:rPr lang="nl-NL" dirty="0"/>
-              <a:t> </a:t>
-            </a:r>
-            <a:r>
-              <a:rPr lang="nl-NL" dirty="0" err="1"/>
-              <a:t>using</a:t>
-            </a:r>
-            <a:r>
-              <a:rPr lang="nl-NL" dirty="0"/>
-              <a:t> </a:t>
-            </a:r>
-            <a:r>
-              <a:rPr lang="nl-NL" dirty="0" err="1"/>
-              <a:t>the</a:t>
-            </a:r>
-            <a:r>
-              <a:rPr lang="nl-NL" dirty="0"/>
-              <a:t> </a:t>
-            </a:r>
-            <a:r>
-              <a:rPr lang="nl-NL" dirty="0" err="1"/>
-              <a:t>WinPython</a:t>
-            </a:r>
-            <a:r>
-              <a:rPr lang="nl-NL" dirty="0"/>
-              <a:t> Control panel</a:t>
-            </a:r>
-          </a:p>
-          <a:p>
-            <a:endParaRPr lang="nl-NL" dirty="0"/>
-          </a:p>
-          <a:p>
-            <a:r>
-              <a:rPr lang="nl-NL" dirty="0" err="1"/>
-              <a:t>Install</a:t>
-            </a:r>
-            <a:r>
-              <a:rPr lang="nl-NL" dirty="0"/>
-              <a:t> the </a:t>
-            </a:r>
-            <a:r>
-              <a:rPr lang="nl-NL" dirty="0" err="1"/>
+        <p:spPr>
+          <a:xfrm>
+            <a:off x="440504" y="1019361"/>
+            <a:ext cx="7825978" cy="3496469"/>
+          </a:xfrm>
+        </p:spPr>
+        <p:txBody>
+          <a:bodyPr/>
+          <a:lstStyle/>
+          <a:p>
+            <a:pPr lvl="2"/>
+            <a:r>
+              <a:rPr lang="en-US" dirty="0"/>
+              <a:t>Install the 32-bit version of Python 2.7</a:t>
+            </a:r>
+          </a:p>
+          <a:p>
+            <a:pPr lvl="2"/>
+            <a:r>
+              <a:rPr lang="en-US" dirty="0"/>
+              <a:t>Install the </a:t>
+            </a:r>
+            <a:r>
+              <a:rPr lang="en-US" dirty="0" err="1"/>
               <a:t>Naoqi</a:t>
             </a:r>
             <a:r>
-              <a:rPr lang="nl-NL" dirty="0"/>
-              <a:t> SDK </a:t>
-            </a:r>
-            <a:r>
-              <a:rPr lang="nl-NL" dirty="0" err="1"/>
-              <a:t>for</a:t>
-            </a:r>
-            <a:r>
-              <a:rPr lang="nl-NL" dirty="0"/>
-              <a:t> Python</a:t>
-            </a:r>
-          </a:p>
-          <a:p>
-            <a:r>
-              <a:rPr lang="nl-NL" dirty="0"/>
-              <a:t>Open the Python editor “</a:t>
-            </a:r>
-            <a:r>
-              <a:rPr lang="nl-NL" dirty="0" err="1"/>
-              <a:t>Idle</a:t>
-            </a:r>
-            <a:r>
-              <a:rPr lang="nl-NL" dirty="0"/>
-              <a:t>”</a:t>
-            </a:r>
-          </a:p>
-          <a:p>
-            <a:r>
-              <a:rPr lang="nl-NL" dirty="0"/>
-              <a:t>open a Python shell </a:t>
-            </a:r>
-            <a:r>
-              <a:rPr lang="nl-NL" dirty="0" err="1"/>
-              <a:t>and</a:t>
-            </a:r>
-            <a:r>
-              <a:rPr lang="nl-NL" dirty="0"/>
-              <a:t> type</a:t>
-            </a:r>
-            <a:br>
-              <a:rPr lang="nl-NL" dirty="0"/>
-            </a:br>
-            <a:br>
-              <a:rPr lang="nl-NL" dirty="0"/>
-            </a:br>
-            <a:r>
-              <a:rPr lang="nl-NL" dirty="0">
-                <a:latin typeface="Courier" pitchFamily="49" charset="0"/>
+              <a:rPr lang="en-US" dirty="0"/>
+              <a:t> SDK for Python (2.1.4 for NAO and 2.5.5 for Pepper)</a:t>
+            </a:r>
+          </a:p>
+          <a:p>
+            <a:pPr lvl="2"/>
+            <a:r>
+              <a:rPr lang="en-US" dirty="0"/>
+              <a:t>Open the Python editor “Idle” and open a Python shell</a:t>
+            </a:r>
+          </a:p>
+          <a:p>
+            <a:pPr lvl="2"/>
+            <a:endParaRPr lang="en-US" dirty="0"/>
+          </a:p>
+          <a:p>
+            <a:pPr lvl="2"/>
+            <a:endParaRPr lang="en-US" dirty="0"/>
+          </a:p>
+          <a:p>
+            <a:pPr lvl="2"/>
+            <a:r>
+              <a:rPr lang="en-US" dirty="0"/>
+              <a:t>Type</a:t>
+            </a:r>
+          </a:p>
+          <a:p>
+            <a:pPr marL="405000" lvl="4" indent="0">
+              <a:buNone/>
+            </a:pPr>
+            <a:r>
+              <a:rPr lang="en-US" dirty="0">
+                <a:latin typeface="Courier New" panose="02070309020205020404" pitchFamily="49" charset="0"/>
+                <a:cs typeface="Courier New" panose="02070309020205020404" pitchFamily="49" charset="0"/>
               </a:rPr>
               <a:t>import </a:t>
             </a:r>
             <a:r>
-              <a:rPr lang="nl-NL" dirty="0" err="1">
-                <a:latin typeface="Courier" pitchFamily="49" charset="0"/>
+              <a:rPr lang="en-US" dirty="0" err="1">
+                <a:latin typeface="Courier New" panose="02070309020205020404" pitchFamily="49" charset="0"/>
+                <a:cs typeface="Courier New" panose="02070309020205020404" pitchFamily="49" charset="0"/>
               </a:rPr>
               <a:t>naoqi</a:t>
             </a:r>
-            <a:endParaRPr lang="nl-NL" dirty="0">
-              <a:latin typeface="Courier" pitchFamily="49" charset="0"/>
+            <a:endParaRPr lang="en-US" dirty="0">
+              <a:latin typeface="Courier New" panose="02070309020205020404" pitchFamily="49" charset="0"/>
+              <a:cs typeface="Courier New" panose="02070309020205020404" pitchFamily="49" charset="0"/>
             </a:endParaRPr>
           </a:p>
           <a:p>
-            <a:endParaRPr lang="nl-NL" dirty="0">
-              <a:latin typeface="Courier" pitchFamily="49" charset="0"/>
+            <a:pPr marL="405000" lvl="4" indent="0">
+              <a:buNone/>
+            </a:pPr>
+            <a:endParaRPr lang="en-US" dirty="0">
+              <a:latin typeface="Courier New" panose="02070309020205020404" pitchFamily="49" charset="0"/>
+              <a:cs typeface="Courier New" panose="02070309020205020404" pitchFamily="49" charset="0"/>
             </a:endParaRPr>
           </a:p>
           <a:p>
-            <a:r>
-              <a:rPr lang="nl-NL" dirty="0" err="1"/>
-              <a:t>If</a:t>
-            </a:r>
-            <a:r>
-              <a:rPr lang="nl-NL" dirty="0"/>
-              <a:t> </a:t>
-            </a:r>
-            <a:r>
-              <a:rPr lang="nl-NL" dirty="0" err="1"/>
-              <a:t>you</a:t>
-            </a:r>
-            <a:r>
-              <a:rPr lang="nl-NL" dirty="0"/>
-              <a:t> </a:t>
-            </a:r>
-            <a:r>
-              <a:rPr lang="nl-NL" dirty="0" err="1"/>
-              <a:t>get</a:t>
-            </a:r>
-            <a:r>
-              <a:rPr lang="nl-NL" dirty="0"/>
-              <a:t> </a:t>
-            </a:r>
-            <a:r>
-              <a:rPr lang="nl-NL" dirty="0" err="1"/>
-              <a:t>no</a:t>
-            </a:r>
-            <a:r>
-              <a:rPr lang="nl-NL" dirty="0"/>
-              <a:t> </a:t>
-            </a:r>
-            <a:r>
-              <a:rPr lang="nl-NL" dirty="0" err="1"/>
-              <a:t>error</a:t>
-            </a:r>
-            <a:r>
-              <a:rPr lang="nl-NL" dirty="0"/>
-              <a:t> </a:t>
-            </a:r>
-            <a:r>
-              <a:rPr lang="nl-NL" dirty="0" err="1"/>
-              <a:t>messages</a:t>
-            </a:r>
-            <a:r>
-              <a:rPr lang="nl-NL" dirty="0"/>
-              <a:t> Python is </a:t>
-            </a:r>
-            <a:r>
-              <a:rPr lang="nl-NL" dirty="0" err="1"/>
-              <a:t>installed</a:t>
-            </a:r>
-            <a:r>
-              <a:rPr lang="nl-NL" dirty="0"/>
-              <a:t> </a:t>
-            </a:r>
-            <a:r>
-              <a:rPr lang="nl-NL" dirty="0" err="1"/>
-              <a:t>correctly</a:t>
-            </a:r>
+            <a:pPr lvl="2"/>
+            <a:r>
+              <a:rPr lang="en-US" dirty="0"/>
+              <a:t>If you get no error messages Python and </a:t>
+            </a:r>
+            <a:r>
+              <a:rPr lang="en-US" dirty="0" err="1"/>
+              <a:t>Naoqi</a:t>
+            </a:r>
+            <a:r>
+              <a:rPr lang="en-US" dirty="0"/>
+              <a:t> are installed correctly</a:t>
+            </a:r>
+          </a:p>
+          <a:p>
+            <a:pPr lvl="2"/>
+            <a:endParaRPr lang="en-US" dirty="0">
+              <a:latin typeface="Courier New" panose="02070309020205020404" pitchFamily="49" charset="0"/>
+              <a:cs typeface="Courier New" panose="02070309020205020404" pitchFamily="49" charset="0"/>
+            </a:endParaRPr>
+          </a:p>
+          <a:p>
+            <a:pPr lvl="2"/>
+            <a:r>
+              <a:rPr lang="en-US" dirty="0">
+                <a:cs typeface="Courier New" panose="02070309020205020404" pitchFamily="49" charset="0"/>
+              </a:rPr>
+              <a:t>You can use pip (Python Package Installer) to install packages</a:t>
+            </a:r>
+          </a:p>
+          <a:p>
+            <a:pPr lvl="3"/>
+            <a:r>
+              <a:rPr lang="en-US" dirty="0">
+                <a:cs typeface="Courier New" panose="02070309020205020404" pitchFamily="49" charset="0"/>
+              </a:rPr>
+              <a:t>In Windows: run </a:t>
+            </a:r>
+            <a:r>
+              <a:rPr lang="en-US" dirty="0" err="1">
+                <a:cs typeface="Courier New" panose="02070309020205020404" pitchFamily="49" charset="0"/>
+              </a:rPr>
+              <a:t>cmd</a:t>
+            </a:r>
+            <a:endParaRPr lang="en-US" dirty="0">
+              <a:cs typeface="Courier New" panose="02070309020205020404" pitchFamily="49" charset="0"/>
+            </a:endParaRPr>
+          </a:p>
+          <a:p>
+            <a:pPr lvl="3"/>
+            <a:r>
+              <a:rPr lang="en-US" dirty="0">
+                <a:cs typeface="Courier New" panose="02070309020205020404" pitchFamily="49" charset="0"/>
+              </a:rPr>
+              <a:t>Type python –m pip install</a:t>
+            </a:r>
+          </a:p>
+          <a:p>
+            <a:pPr marL="405000" lvl="4" indent="0">
+              <a:buNone/>
+            </a:pPr>
+            <a:endParaRPr lang="en-US" dirty="0">
+              <a:latin typeface="Courier New" panose="02070309020205020404" pitchFamily="49" charset="0"/>
+              <a:cs typeface="Courier New" panose="02070309020205020404" pitchFamily="49" charset="0"/>
+            </a:endParaRPr>
+          </a:p>
+        </p:txBody>
+      </p:sp>
+      <p:sp>
+        <p:nvSpPr>
+          <p:cNvPr id="4" name="Tijdelijke aanduiding voor voettekst 3"/>
+          <p:cNvSpPr>
+            <a:spLocks noGrp="1"/>
+          </p:cNvSpPr>
+          <p:nvPr>
+            <p:ph type="ftr" sz="quarter" idx="11"/>
+          </p:nvPr>
+        </p:nvSpPr>
+        <p:spPr/>
+        <p:txBody>
+          <a:bodyPr/>
+          <a:lstStyle/>
+          <a:p>
+            <a:r>
+              <a:rPr lang="en-US" dirty="0"/>
+              <a:t>NAO and Pepper Tutorial</a:t>
+            </a:r>
+          </a:p>
+        </p:txBody>
+      </p:sp>
+      <p:sp>
+        <p:nvSpPr>
+          <p:cNvPr id="5" name="Tijdelijke aanduiding voor dianummer 4"/>
+          <p:cNvSpPr>
+            <a:spLocks noGrp="1"/>
+          </p:cNvSpPr>
+          <p:nvPr>
+            <p:ph type="sldNum" sz="quarter" idx="12"/>
+          </p:nvPr>
+        </p:nvSpPr>
+        <p:spPr/>
+        <p:txBody>
+          <a:bodyPr/>
+          <a:lstStyle/>
+          <a:p>
+            <a:fld id="{B7CEC10D-CD46-426F-915E-6C78530279CB}" type="slidenum">
+              <a:rPr lang="en-US" smtClean="0"/>
+              <a:pPr/>
+              <a:t>28</a:t>
+            </a:fld>
             <a:endParaRPr lang="en-US" dirty="0"/>
           </a:p>
         </p:txBody>
@@ -14458,20 +14487,20 @@
     </p:spTree>
     <p:extLst>
       <p:ext uri="{BB962C8B-B14F-4D97-AF65-F5344CB8AC3E}">
-        <p14:creationId xmlns:p14="http://schemas.microsoft.com/office/powerpoint/2010/main" val="2441626830"/>
+        <p14:creationId xmlns:p14="http://schemas.microsoft.com/office/powerpoint/2010/main" val="418312456"/>
       </p:ext>
     </p:extLst>
   </p:cSld>
   <p:clrMapOvr>
     <a:masterClrMapping/>
   </p:clrMapOvr>
-  <mc:AlternateContent xmlns:mc="http://schemas.openxmlformats.org/markup-compatibility/2006" xmlns:p14="http://schemas.microsoft.com/office/powerpoint/2010/main">
-    <mc:Choice Requires="p14">
+  <mc:AlternateContent xmlns:mc="http://schemas.openxmlformats.org/markup-compatibility/2006">
+    <mc:Choice xmlns:p14="http://schemas.microsoft.com/office/powerpoint/2010/main" Requires="p14">
       <p:transition spd="med" p14:dur="700">
         <p:fade/>
       </p:transition>
     </mc:Choice>
-    <mc:Fallback xmlns="">
+    <mc:Fallback>
       <p:transition spd="med">
         <p:fade/>
       </p:transition>
@@ -14481,7 +14510,7 @@
 </file>
 
 <file path=ppt/slides/slide29.xml><?xml version="1.0" encoding="utf-8"?>
-<p:sld xmlns:a="http://schemas.openxmlformats.org/drawingml/2006/main" xmlns:r="http://schemas.openxmlformats.org/officeDocument/2006/relationships" xmlns:p="http://schemas.openxmlformats.org/presentationml/2006/main">
+<p:sld xmlns:a="http://schemas.openxmlformats.org/drawingml/2006/main" xmlns:r="http://schemas.openxmlformats.org/officeDocument/2006/relationships" xmlns:p="http://schemas.openxmlformats.org/presentationml/2006/main" show="0">
   <p:cSld>
     <p:spTree>
       <p:nvGrpSpPr>
@@ -14499,7 +14528,7 @@
       </p:grpSpPr>
       <p:sp>
         <p:nvSpPr>
-          <p:cNvPr id="2" name="Titel 1"/>
+          <p:cNvPr id="2" name="Title 1"/>
           <p:cNvSpPr>
             <a:spLocks noGrp="1"/>
           </p:cNvSpPr>
@@ -14513,15 +14542,28 @@
           <a:lstStyle/>
           <a:p>
             <a:r>
-              <a:rPr lang="en-US" dirty="0"/>
-              <a:t>Troubleshooting</a:t>
-            </a:r>
-          </a:p>
-        </p:txBody>
-      </p:sp>
-      <p:sp>
-        <p:nvSpPr>
-          <p:cNvPr id="3" name="Tijdelijke aanduiding voor inhoud 2"/>
+              <a:rPr lang="nl-NL" dirty="0" err="1"/>
+              <a:t>WinPython</a:t>
+            </a:r>
+            <a:r>
+              <a:rPr lang="nl-NL" dirty="0"/>
+              <a:t> Installation (</a:t>
+            </a:r>
+            <a:r>
+              <a:rPr lang="nl-NL" dirty="0" err="1"/>
+              <a:t>Easier</a:t>
+            </a:r>
+            <a:r>
+              <a:rPr lang="nl-NL" dirty="0"/>
+              <a:t>!)</a:t>
+            </a:r>
+            <a:endParaRPr lang="en-US" dirty="0"/>
+          </a:p>
+        </p:txBody>
+      </p:sp>
+      <p:sp>
+        <p:nvSpPr>
+          <p:cNvPr id="3" name="Content Placeholder 2"/>
           <p:cNvSpPr>
             <a:spLocks noGrp="1"/>
           </p:cNvSpPr>
@@ -14529,109 +14571,250 @@
             <p:ph idx="1"/>
           </p:nvPr>
         </p:nvSpPr>
-        <p:spPr>
-          <a:xfrm>
-            <a:off x="440504" y="1019361"/>
-            <a:ext cx="7825978" cy="3496469"/>
-          </a:xfrm>
-        </p:spPr>
-        <p:txBody>
-          <a:bodyPr/>
-          <a:lstStyle/>
-          <a:p>
-            <a:pPr lvl="2"/>
-            <a:r>
-              <a:rPr lang="en-US" dirty="0"/>
-              <a:t>Make sure Python and </a:t>
-            </a:r>
-            <a:r>
-              <a:rPr lang="en-US" dirty="0" err="1"/>
+        <p:spPr/>
+        <p:txBody>
+          <a:bodyPr/>
+          <a:lstStyle/>
+          <a:p>
+            <a:r>
+              <a:rPr lang="nl-NL" dirty="0" err="1"/>
+              <a:t>Install</a:t>
+            </a:r>
+            <a:r>
+              <a:rPr lang="nl-NL" dirty="0"/>
+              <a:t> </a:t>
+            </a:r>
+            <a:r>
+              <a:rPr lang="nl-NL" dirty="0" err="1"/>
+              <a:t>WinPython</a:t>
+            </a:r>
+            <a:r>
+              <a:rPr lang="nl-NL" dirty="0"/>
+              <a:t> (</a:t>
+            </a:r>
+            <a:r>
+              <a:rPr lang="nl-NL" dirty="0" err="1"/>
+              <a:t>see</a:t>
+            </a:r>
+            <a:r>
+              <a:rPr lang="nl-NL" dirty="0"/>
+              <a:t> </a:t>
+            </a:r>
+            <a:r>
+              <a:rPr lang="nl-NL" dirty="0" err="1"/>
+              <a:t>handouts</a:t>
+            </a:r>
+            <a:r>
+              <a:rPr lang="nl-NL" dirty="0"/>
+              <a:t>)</a:t>
+            </a:r>
+          </a:p>
+          <a:p>
+            <a:pPr lvl="1"/>
+            <a:r>
+              <a:rPr lang="nl-NL" dirty="0" err="1"/>
+              <a:t>Includes</a:t>
+            </a:r>
+            <a:r>
+              <a:rPr lang="nl-NL" dirty="0"/>
+              <a:t> most important </a:t>
+            </a:r>
+            <a:r>
+              <a:rPr lang="nl-NL" dirty="0" err="1"/>
+              <a:t>extensions</a:t>
+            </a:r>
+            <a:r>
+              <a:rPr lang="nl-NL" dirty="0"/>
+              <a:t>/</a:t>
+            </a:r>
+            <a:r>
+              <a:rPr lang="nl-NL" dirty="0" err="1"/>
+              <a:t>libraries</a:t>
+            </a:r>
+            <a:endParaRPr lang="nl-NL" dirty="0"/>
+          </a:p>
+          <a:p>
+            <a:r>
+              <a:rPr lang="nl-NL" dirty="0"/>
+              <a:t>Register </a:t>
+            </a:r>
+            <a:r>
+              <a:rPr lang="nl-NL" dirty="0" err="1"/>
+              <a:t>WinPython</a:t>
+            </a:r>
+            <a:r>
+              <a:rPr lang="nl-NL" dirty="0"/>
+              <a:t> </a:t>
+            </a:r>
+            <a:r>
+              <a:rPr lang="nl-NL" dirty="0" err="1"/>
+              <a:t>using</a:t>
+            </a:r>
+            <a:r>
+              <a:rPr lang="nl-NL" dirty="0"/>
+              <a:t> </a:t>
+            </a:r>
+            <a:r>
+              <a:rPr lang="nl-NL" dirty="0" err="1"/>
+              <a:t>the</a:t>
+            </a:r>
+            <a:r>
+              <a:rPr lang="nl-NL" dirty="0"/>
+              <a:t> </a:t>
+            </a:r>
+            <a:r>
+              <a:rPr lang="nl-NL" dirty="0" err="1"/>
+              <a:t>WinPython</a:t>
+            </a:r>
+            <a:r>
+              <a:rPr lang="nl-NL" dirty="0"/>
+              <a:t> Control panel</a:t>
+            </a:r>
+          </a:p>
+          <a:p>
+            <a:endParaRPr lang="nl-NL" dirty="0"/>
+          </a:p>
+          <a:p>
+            <a:r>
+              <a:rPr lang="nl-NL" dirty="0" err="1"/>
+              <a:t>Install</a:t>
+            </a:r>
+            <a:r>
+              <a:rPr lang="nl-NL" dirty="0"/>
+              <a:t> the </a:t>
+            </a:r>
+            <a:r>
+              <a:rPr lang="nl-NL" dirty="0" err="1"/>
               <a:t>Naoqi</a:t>
             </a:r>
             <a:r>
-              <a:rPr lang="en-US" dirty="0"/>
-              <a:t> are installed in the right location</a:t>
-            </a:r>
-          </a:p>
-          <a:p>
-            <a:pPr lvl="2"/>
-            <a:endParaRPr lang="en-US" dirty="0"/>
-          </a:p>
-          <a:p>
-            <a:pPr lvl="2"/>
-            <a:r>
-              <a:rPr lang="en-US" dirty="0"/>
-              <a:t>Check the Python Path, add the location of Python and </a:t>
-            </a:r>
-            <a:r>
-              <a:rPr lang="en-US" dirty="0" err="1"/>
-              <a:t>Naoqi</a:t>
-            </a:r>
-            <a:r>
-              <a:rPr lang="en-US" dirty="0"/>
-              <a:t> to the python path</a:t>
-            </a:r>
-          </a:p>
-          <a:p>
-            <a:pPr lvl="2"/>
-            <a:endParaRPr lang="en-US" dirty="0">
-              <a:latin typeface="Courier New" panose="02070309020205020404" pitchFamily="49" charset="0"/>
-              <a:cs typeface="Courier New" panose="02070309020205020404" pitchFamily="49" charset="0"/>
+              <a:rPr lang="nl-NL" dirty="0"/>
+              <a:t> SDK </a:t>
+            </a:r>
+            <a:r>
+              <a:rPr lang="nl-NL" dirty="0" err="1"/>
+              <a:t>for</a:t>
+            </a:r>
+            <a:r>
+              <a:rPr lang="nl-NL" dirty="0"/>
+              <a:t> Python</a:t>
+            </a:r>
+          </a:p>
+          <a:p>
+            <a:r>
+              <a:rPr lang="nl-NL" dirty="0"/>
+              <a:t>Open the Python editor “</a:t>
+            </a:r>
+            <a:r>
+              <a:rPr lang="nl-NL" dirty="0" err="1"/>
+              <a:t>Idle</a:t>
+            </a:r>
+            <a:r>
+              <a:rPr lang="nl-NL" dirty="0"/>
+              <a:t>”</a:t>
+            </a:r>
+          </a:p>
+          <a:p>
+            <a:r>
+              <a:rPr lang="nl-NL" dirty="0"/>
+              <a:t>open a Python shell </a:t>
+            </a:r>
+            <a:r>
+              <a:rPr lang="nl-NL" dirty="0" err="1"/>
+              <a:t>and</a:t>
+            </a:r>
+            <a:r>
+              <a:rPr lang="nl-NL" dirty="0"/>
+              <a:t> type</a:t>
+            </a:r>
+            <a:br>
+              <a:rPr lang="nl-NL" dirty="0"/>
+            </a:br>
+            <a:br>
+              <a:rPr lang="nl-NL" dirty="0"/>
+            </a:br>
+            <a:r>
+              <a:rPr lang="nl-NL" dirty="0">
+                <a:latin typeface="Courier" pitchFamily="49" charset="0"/>
+              </a:rPr>
+              <a:t>import </a:t>
+            </a:r>
+            <a:r>
+              <a:rPr lang="nl-NL" dirty="0" err="1">
+                <a:latin typeface="Courier" pitchFamily="49" charset="0"/>
+              </a:rPr>
+              <a:t>naoqi</a:t>
+            </a:r>
+            <a:endParaRPr lang="nl-NL" dirty="0">
+              <a:latin typeface="Courier" pitchFamily="49" charset="0"/>
             </a:endParaRPr>
           </a:p>
           <a:p>
-            <a:pPr lvl="2"/>
-            <a:r>
-              <a:rPr lang="en-US" dirty="0">
-                <a:cs typeface="Courier New" panose="02070309020205020404" pitchFamily="49" charset="0"/>
-              </a:rPr>
-              <a:t>Is Python 2.7 the only installation of Python?</a:t>
-            </a:r>
-          </a:p>
-        </p:txBody>
-      </p:sp>
-      <p:sp>
-        <p:nvSpPr>
-          <p:cNvPr id="4" name="Tijdelijke aanduiding voor voettekst 3"/>
-          <p:cNvSpPr>
-            <a:spLocks noGrp="1"/>
-          </p:cNvSpPr>
-          <p:nvPr>
-            <p:ph type="ftr" sz="quarter" idx="11"/>
-          </p:nvPr>
-        </p:nvSpPr>
-        <p:spPr/>
-        <p:txBody>
-          <a:bodyPr/>
-          <a:lstStyle/>
-          <a:p>
-            <a:r>
-              <a:rPr lang="en-US" dirty="0"/>
-              <a:t>NAO and Pepper Tutorial</a:t>
-            </a:r>
-          </a:p>
-        </p:txBody>
-      </p:sp>
-      <p:sp>
-        <p:nvSpPr>
-          <p:cNvPr id="5" name="Tijdelijke aanduiding voor dianummer 4"/>
-          <p:cNvSpPr>
-            <a:spLocks noGrp="1"/>
-          </p:cNvSpPr>
-          <p:nvPr>
-            <p:ph type="sldNum" sz="quarter" idx="12"/>
-          </p:nvPr>
-        </p:nvSpPr>
-        <p:spPr/>
-        <p:txBody>
-          <a:bodyPr/>
-          <a:lstStyle/>
-          <a:p>
-            <a:fld id="{B7CEC10D-CD46-426F-915E-6C78530279CB}" type="slidenum">
-              <a:rPr lang="en-US" smtClean="0"/>
-              <a:pPr/>
-              <a:t>29</a:t>
-            </a:fld>
+            <a:endParaRPr lang="nl-NL" dirty="0">
+              <a:latin typeface="Courier" pitchFamily="49" charset="0"/>
+            </a:endParaRPr>
+          </a:p>
+          <a:p>
+            <a:r>
+              <a:rPr lang="nl-NL" dirty="0" err="1"/>
+              <a:t>If</a:t>
+            </a:r>
+            <a:r>
+              <a:rPr lang="nl-NL" dirty="0"/>
+              <a:t> </a:t>
+            </a:r>
+            <a:r>
+              <a:rPr lang="nl-NL" dirty="0" err="1"/>
+              <a:t>you</a:t>
+            </a:r>
+            <a:r>
+              <a:rPr lang="nl-NL" dirty="0"/>
+              <a:t> </a:t>
+            </a:r>
+            <a:r>
+              <a:rPr lang="nl-NL" dirty="0" err="1"/>
+              <a:t>get</a:t>
+            </a:r>
+            <a:r>
+              <a:rPr lang="nl-NL" dirty="0"/>
+              <a:t> </a:t>
+            </a:r>
+            <a:r>
+              <a:rPr lang="nl-NL" dirty="0" err="1"/>
+              <a:t>no</a:t>
+            </a:r>
+            <a:r>
+              <a:rPr lang="nl-NL" dirty="0"/>
+              <a:t> </a:t>
+            </a:r>
+            <a:r>
+              <a:rPr lang="nl-NL" dirty="0" err="1"/>
+              <a:t>error</a:t>
+            </a:r>
+            <a:r>
+              <a:rPr lang="nl-NL" dirty="0"/>
+              <a:t> </a:t>
+            </a:r>
+            <a:r>
+              <a:rPr lang="nl-NL" dirty="0" err="1"/>
+              <a:t>messages</a:t>
+            </a:r>
+            <a:r>
+              <a:rPr lang="nl-NL" dirty="0"/>
+              <a:t> Python is </a:t>
+            </a:r>
+            <a:r>
+              <a:rPr lang="nl-NL" dirty="0" err="1"/>
+              <a:t>installed</a:t>
+            </a:r>
+            <a:r>
+              <a:rPr lang="nl-NL" dirty="0"/>
+              <a:t> </a:t>
+            </a:r>
+            <a:r>
+              <a:rPr lang="nl-NL" dirty="0" err="1"/>
+              <a:t>correctly</a:t>
+            </a:r>
             <a:endParaRPr lang="en-US" dirty="0"/>
           </a:p>
         </p:txBody>
@@ -14639,20 +14822,20 @@
     </p:spTree>
     <p:extLst>
       <p:ext uri="{BB962C8B-B14F-4D97-AF65-F5344CB8AC3E}">
-        <p14:creationId xmlns:p14="http://schemas.microsoft.com/office/powerpoint/2010/main" val="2520347196"/>
+        <p14:creationId xmlns:p14="http://schemas.microsoft.com/office/powerpoint/2010/main" val="2441626830"/>
       </p:ext>
     </p:extLst>
   </p:cSld>
   <p:clrMapOvr>
     <a:masterClrMapping/>
   </p:clrMapOvr>
-  <mc:AlternateContent xmlns:mc="http://schemas.openxmlformats.org/markup-compatibility/2006" xmlns:p14="http://schemas.microsoft.com/office/powerpoint/2010/main">
-    <mc:Choice Requires="p14">
+  <mc:AlternateContent xmlns:mc="http://schemas.openxmlformats.org/markup-compatibility/2006">
+    <mc:Choice xmlns:p14="http://schemas.microsoft.com/office/powerpoint/2010/main" Requires="p14">
       <p:transition spd="med" p14:dur="700">
         <p:fade/>
       </p:transition>
     </mc:Choice>
-    <mc:Fallback xmlns="">
+    <mc:Fallback>
       <p:transition spd="med">
         <p:fade/>
       </p:transition>
@@ -14913,7 +15096,7 @@
 </file>
 
 <file path=ppt/slides/slide30.xml><?xml version="1.0" encoding="utf-8"?>
-<p:sld xmlns:a="http://schemas.openxmlformats.org/drawingml/2006/main" xmlns:r="http://schemas.openxmlformats.org/officeDocument/2006/relationships" xmlns:p="http://schemas.openxmlformats.org/presentationml/2006/main">
+<p:sld xmlns:a="http://schemas.openxmlformats.org/drawingml/2006/main" xmlns:r="http://schemas.openxmlformats.org/officeDocument/2006/relationships" xmlns:p="http://schemas.openxmlformats.org/presentationml/2006/main" show="0">
   <p:cSld>
     <p:spTree>
       <p:nvGrpSpPr>
@@ -14946,7 +15129,7 @@
           <a:p>
             <a:r>
               <a:rPr lang="en-US" dirty="0"/>
-              <a:t>Installation</a:t>
+              <a:t>Troubleshooting</a:t>
             </a:r>
           </a:p>
         </p:txBody>
@@ -14974,106 +15157,51 @@
             <a:pPr lvl="2"/>
             <a:r>
               <a:rPr lang="en-US" dirty="0"/>
-              <a:t>Install </a:t>
+              <a:t>Make sure Python and </a:t>
             </a:r>
             <a:r>
               <a:rPr lang="en-US" dirty="0" err="1"/>
-              <a:t>numpy</a:t>
-            </a:r>
-            <a:endParaRPr lang="en-US" dirty="0"/>
+              <a:t>Naoqi</a:t>
+            </a:r>
+            <a:r>
+              <a:rPr lang="en-US" dirty="0"/>
+              <a:t> are installed in the right location</a:t>
+            </a:r>
           </a:p>
           <a:p>
             <a:pPr lvl="2"/>
-            <a:r>
-              <a:rPr lang="en-US" dirty="0">
-                <a:cs typeface="Courier New" panose="02070309020205020404" pitchFamily="49" charset="0"/>
-              </a:rPr>
-              <a:t>Install </a:t>
-            </a:r>
-            <a:r>
-              <a:rPr lang="en-US" dirty="0" err="1">
-                <a:cs typeface="Courier New" panose="02070309020205020404" pitchFamily="49" charset="0"/>
-              </a:rPr>
-              <a:t>scipy</a:t>
-            </a:r>
-            <a:endParaRPr lang="en-US" dirty="0">
-              <a:cs typeface="Courier New" panose="02070309020205020404" pitchFamily="49" charset="0"/>
-            </a:endParaRPr>
+            <a:endParaRPr lang="en-US" dirty="0"/>
           </a:p>
           <a:p>
             <a:pPr lvl="2"/>
             <a:r>
-              <a:rPr lang="en-US" dirty="0" err="1">
-                <a:cs typeface="Courier New" panose="02070309020205020404" pitchFamily="49" charset="0"/>
-              </a:rPr>
-              <a:t>OpenCV</a:t>
-            </a:r>
-            <a:r>
-              <a:rPr lang="en-US" dirty="0">
-                <a:cs typeface="Courier New" panose="02070309020205020404" pitchFamily="49" charset="0"/>
-              </a:rPr>
-              <a:t> (if you need computer vision)</a:t>
+              <a:rPr lang="en-US" dirty="0"/>
+              <a:t>Check the Python Path, add the location of Python and </a:t>
+            </a:r>
+            <a:r>
+              <a:rPr lang="en-US" dirty="0" err="1"/>
+              <a:t>Naoqi</a:t>
+            </a:r>
+            <a:r>
+              <a:rPr lang="en-US" dirty="0"/>
+              <a:t> to the python path</a:t>
             </a:r>
           </a:p>
           <a:p>
             <a:pPr lvl="2"/>
-            <a:endParaRPr lang="en-US" dirty="0">
-              <a:cs typeface="Courier New" panose="02070309020205020404" pitchFamily="49" charset="0"/>
-            </a:endParaRPr>
-          </a:p>
-          <a:p>
-            <a:pPr lvl="2"/>
-            <a:r>
-              <a:rPr lang="en-US" dirty="0">
-                <a:cs typeface="Courier New" panose="02070309020205020404" pitchFamily="49" charset="0"/>
-              </a:rPr>
-              <a:t>Other useful libraries </a:t>
-            </a:r>
-          </a:p>
-          <a:p>
-            <a:pPr lvl="3"/>
-            <a:r>
-              <a:rPr lang="en-US" dirty="0" err="1">
-                <a:cs typeface="Courier New" panose="02070309020205020404" pitchFamily="49" charset="0"/>
-              </a:rPr>
-              <a:t>Tk</a:t>
-            </a:r>
-            <a:r>
-              <a:rPr lang="en-US" dirty="0">
-                <a:cs typeface="Courier New" panose="02070309020205020404" pitchFamily="49" charset="0"/>
-              </a:rPr>
-              <a:t> (Universal window manager)</a:t>
-            </a:r>
-          </a:p>
-          <a:p>
-            <a:pPr lvl="3"/>
-            <a:r>
-              <a:rPr lang="en-US" dirty="0">
-                <a:cs typeface="Courier New" panose="02070309020205020404" pitchFamily="49" charset="0"/>
-              </a:rPr>
-              <a:t>PIL (Python Image Library)</a:t>
-            </a:r>
-          </a:p>
-          <a:p>
-            <a:pPr lvl="3"/>
-            <a:r>
-              <a:rPr lang="en-US" dirty="0" err="1">
-                <a:cs typeface="Courier New" panose="02070309020205020404" pitchFamily="49" charset="0"/>
-              </a:rPr>
-              <a:t>Matplotlib</a:t>
-            </a:r>
-            <a:endParaRPr lang="en-US" dirty="0">
-              <a:cs typeface="Courier New" panose="02070309020205020404" pitchFamily="49" charset="0"/>
-            </a:endParaRPr>
-          </a:p>
-          <a:p>
-            <a:pPr marL="405000" lvl="4" indent="0">
-              <a:buNone/>
-            </a:pPr>
             <a:endParaRPr lang="en-US" dirty="0">
               <a:latin typeface="Courier New" panose="02070309020205020404" pitchFamily="49" charset="0"/>
               <a:cs typeface="Courier New" panose="02070309020205020404" pitchFamily="49" charset="0"/>
             </a:endParaRPr>
+          </a:p>
+          <a:p>
+            <a:pPr lvl="2"/>
+            <a:r>
+              <a:rPr lang="en-US" dirty="0">
+                <a:cs typeface="Courier New" panose="02070309020205020404" pitchFamily="49" charset="0"/>
+              </a:rPr>
+              <a:t>Is Python 2.7 the only installation of Python?</a:t>
+            </a:r>
           </a:p>
         </p:txBody>
       </p:sp>
@@ -15126,20 +15254,20 @@
     </p:spTree>
     <p:extLst>
       <p:ext uri="{BB962C8B-B14F-4D97-AF65-F5344CB8AC3E}">
-        <p14:creationId xmlns:p14="http://schemas.microsoft.com/office/powerpoint/2010/main" val="2512396211"/>
+        <p14:creationId xmlns:p14="http://schemas.microsoft.com/office/powerpoint/2010/main" val="2520347196"/>
       </p:ext>
     </p:extLst>
   </p:cSld>
   <p:clrMapOvr>
     <a:masterClrMapping/>
   </p:clrMapOvr>
-  <mc:AlternateContent xmlns:mc="http://schemas.openxmlformats.org/markup-compatibility/2006" xmlns:p14="http://schemas.microsoft.com/office/powerpoint/2010/main">
-    <mc:Choice Requires="p14">
+  <mc:AlternateContent xmlns:mc="http://schemas.openxmlformats.org/markup-compatibility/2006">
+    <mc:Choice xmlns:p14="http://schemas.microsoft.com/office/powerpoint/2010/main" Requires="p14">
       <p:transition spd="med" p14:dur="700">
         <p:fade/>
       </p:transition>
     </mc:Choice>
-    <mc:Fallback xmlns="">
+    <mc:Fallback>
       <p:transition spd="med">
         <p:fade/>
       </p:transition>
@@ -15149,7 +15277,7 @@
 </file>
 
 <file path=ppt/slides/slide31.xml><?xml version="1.0" encoding="utf-8"?>
-<p:sld xmlns:a="http://schemas.openxmlformats.org/drawingml/2006/main" xmlns:r="http://schemas.openxmlformats.org/officeDocument/2006/relationships" xmlns:p="http://schemas.openxmlformats.org/presentationml/2006/main">
+<p:sld xmlns:a="http://schemas.openxmlformats.org/drawingml/2006/main" xmlns:r="http://schemas.openxmlformats.org/officeDocument/2006/relationships" xmlns:p="http://schemas.openxmlformats.org/presentationml/2006/main" show="0">
   <p:cSld>
     <p:spTree>
       <p:nvGrpSpPr>
@@ -15181,10 +15309,9 @@
           <a:lstStyle/>
           <a:p>
             <a:r>
-              <a:rPr lang="en-US" dirty="0" err="1"/>
-              <a:t>OpenCV</a:t>
-            </a:r>
-            <a:endParaRPr lang="en-US" dirty="0"/>
+              <a:rPr lang="en-US" dirty="0"/>
+              <a:t>Installation</a:t>
+            </a:r>
           </a:p>
         </p:txBody>
       </p:sp>
@@ -15208,318 +15335,100 @@
           <a:bodyPr/>
           <a:lstStyle/>
           <a:p>
-            <a:pPr marL="285750" indent="-285750">
-              <a:buFont typeface="Arial" panose="020B0604020202020204" pitchFamily="34" charset="0"/>
-              <a:buChar char="•"/>
-            </a:pPr>
-            <a:r>
-              <a:rPr lang="nl-NL" dirty="0" err="1"/>
+            <a:pPr lvl="2"/>
+            <a:r>
+              <a:rPr lang="en-US" dirty="0"/>
+              <a:t>Install </a:t>
+            </a:r>
+            <a:r>
+              <a:rPr lang="en-US" dirty="0" err="1"/>
+              <a:t>numpy</a:t>
+            </a:r>
+            <a:endParaRPr lang="en-US" dirty="0"/>
+          </a:p>
+          <a:p>
+            <a:pPr lvl="2"/>
+            <a:r>
+              <a:rPr lang="en-US" dirty="0">
+                <a:cs typeface="Courier New" panose="02070309020205020404" pitchFamily="49" charset="0"/>
+              </a:rPr>
+              <a:t>Install </a:t>
+            </a:r>
+            <a:r>
+              <a:rPr lang="en-US" dirty="0" err="1">
+                <a:cs typeface="Courier New" panose="02070309020205020404" pitchFamily="49" charset="0"/>
+              </a:rPr>
+              <a:t>scipy</a:t>
+            </a:r>
+            <a:endParaRPr lang="en-US" dirty="0">
+              <a:cs typeface="Courier New" panose="02070309020205020404" pitchFamily="49" charset="0"/>
+            </a:endParaRPr>
+          </a:p>
+          <a:p>
+            <a:pPr lvl="2"/>
+            <a:r>
+              <a:rPr lang="en-US" dirty="0" err="1">
+                <a:cs typeface="Courier New" panose="02070309020205020404" pitchFamily="49" charset="0"/>
+              </a:rPr>
               <a:t>OpenCV</a:t>
             </a:r>
             <a:r>
-              <a:rPr lang="nl-NL" dirty="0"/>
-              <a:t> is a </a:t>
-            </a:r>
-            <a:r>
-              <a:rPr lang="nl-NL" dirty="0" err="1"/>
-              <a:t>huge</a:t>
-            </a:r>
-            <a:r>
-              <a:rPr lang="nl-NL" dirty="0"/>
-              <a:t> </a:t>
-            </a:r>
-            <a:r>
-              <a:rPr lang="nl-NL" dirty="0" err="1"/>
-              <a:t>library</a:t>
-            </a:r>
-            <a:endParaRPr lang="nl-NL" dirty="0"/>
-          </a:p>
-          <a:p>
-            <a:pPr marL="285750" indent="-285750">
-              <a:buFont typeface="Arial" panose="020B0604020202020204" pitchFamily="34" charset="0"/>
-              <a:buChar char="•"/>
-            </a:pPr>
-            <a:r>
-              <a:rPr lang="nl-NL" dirty="0" err="1"/>
-              <a:t>You</a:t>
-            </a:r>
-            <a:r>
-              <a:rPr lang="nl-NL" dirty="0"/>
-              <a:t> </a:t>
-            </a:r>
-            <a:r>
-              <a:rPr lang="nl-NL" dirty="0" err="1"/>
-              <a:t>can</a:t>
-            </a:r>
-            <a:r>
-              <a:rPr lang="nl-NL" dirty="0"/>
-              <a:t> </a:t>
-            </a:r>
-            <a:r>
-              <a:rPr lang="nl-NL" dirty="0" err="1"/>
-              <a:t>try</a:t>
-            </a:r>
-            <a:r>
-              <a:rPr lang="nl-NL" dirty="0"/>
-              <a:t> </a:t>
-            </a:r>
-            <a:r>
-              <a:rPr lang="nl-NL" dirty="0" err="1"/>
-              <a:t>to</a:t>
-            </a:r>
-            <a:r>
-              <a:rPr lang="nl-NL" dirty="0"/>
-              <a:t> </a:t>
-            </a:r>
-            <a:r>
-              <a:rPr lang="nl-NL" dirty="0" err="1"/>
-              <a:t>find</a:t>
-            </a:r>
-            <a:r>
-              <a:rPr lang="nl-NL" dirty="0"/>
-              <a:t> </a:t>
-            </a:r>
-            <a:r>
-              <a:rPr lang="nl-NL" dirty="0" err="1"/>
-              <a:t>an</a:t>
-            </a:r>
-            <a:r>
-              <a:rPr lang="nl-NL" dirty="0"/>
-              <a:t> </a:t>
-            </a:r>
-            <a:r>
-              <a:rPr lang="nl-NL" dirty="0" err="1"/>
-              <a:t>installer</a:t>
-            </a:r>
-            <a:r>
-              <a:rPr lang="nl-NL" dirty="0"/>
-              <a:t> </a:t>
-            </a:r>
-            <a:r>
-              <a:rPr lang="nl-NL" dirty="0" err="1"/>
-              <a:t>for</a:t>
-            </a:r>
-            <a:r>
-              <a:rPr lang="nl-NL" dirty="0"/>
-              <a:t> </a:t>
-            </a:r>
-            <a:r>
-              <a:rPr lang="nl-NL" dirty="0" err="1"/>
-              <a:t>windows</a:t>
-            </a:r>
-            <a:r>
-              <a:rPr lang="nl-NL" dirty="0"/>
-              <a:t> (</a:t>
-            </a:r>
-            <a:r>
-              <a:rPr lang="nl-NL" dirty="0" err="1"/>
-              <a:t>previous</a:t>
-            </a:r>
-            <a:r>
-              <a:rPr lang="nl-NL" dirty="0"/>
-              <a:t> slides)</a:t>
-            </a:r>
-          </a:p>
-          <a:p>
-            <a:pPr marL="285750" indent="-285750">
-              <a:buFont typeface="Arial" panose="020B0604020202020204" pitchFamily="34" charset="0"/>
-              <a:buChar char="•"/>
-            </a:pPr>
-            <a:r>
-              <a:rPr lang="nl-NL" dirty="0"/>
-              <a:t>Or, </a:t>
-            </a:r>
-            <a:r>
-              <a:rPr lang="nl-NL" dirty="0" err="1"/>
-              <a:t>you</a:t>
-            </a:r>
-            <a:r>
-              <a:rPr lang="nl-NL" dirty="0"/>
-              <a:t> download </a:t>
-            </a:r>
-            <a:r>
-              <a:rPr lang="nl-NL" dirty="0" err="1"/>
-              <a:t>it</a:t>
-            </a:r>
-            <a:r>
-              <a:rPr lang="nl-NL" dirty="0"/>
-              <a:t> form opencv.org</a:t>
-            </a:r>
-          </a:p>
-          <a:p>
-            <a:pPr marL="342900" lvl="1" indent="-342900">
-              <a:buFont typeface="Arial" panose="020B0604020202020204" pitchFamily="34" charset="0"/>
-              <a:buChar char="•"/>
-            </a:pPr>
-            <a:r>
-              <a:rPr lang="nl-NL" dirty="0"/>
-              <a:t>Download </a:t>
-            </a:r>
-            <a:r>
-              <a:rPr lang="nl-NL" dirty="0" err="1"/>
-              <a:t>and</a:t>
-            </a:r>
-            <a:r>
-              <a:rPr lang="nl-NL" dirty="0"/>
-              <a:t> extract </a:t>
-            </a:r>
-            <a:r>
-              <a:rPr lang="nl-NL" dirty="0" err="1"/>
-              <a:t>the</a:t>
-            </a:r>
-            <a:r>
-              <a:rPr lang="nl-NL" dirty="0"/>
-              <a:t> files</a:t>
-            </a:r>
-          </a:p>
-          <a:p>
-            <a:pPr marL="342900" lvl="1" indent="-342900">
-              <a:buFont typeface="Arial" panose="020B0604020202020204" pitchFamily="34" charset="0"/>
-              <a:buChar char="•"/>
-            </a:pPr>
-            <a:r>
-              <a:rPr lang="nl-NL" dirty="0"/>
-              <a:t>Copy </a:t>
-            </a:r>
-            <a:r>
-              <a:rPr lang="nl-NL" dirty="0" err="1"/>
-              <a:t>the</a:t>
-            </a:r>
-            <a:r>
-              <a:rPr lang="nl-NL" dirty="0"/>
-              <a:t> cv2.pyd file </a:t>
-            </a:r>
-            <a:r>
-              <a:rPr lang="nl-NL" dirty="0" err="1"/>
-              <a:t>to</a:t>
-            </a:r>
-            <a:r>
-              <a:rPr lang="nl-NL" dirty="0"/>
-              <a:t> </a:t>
-            </a:r>
-            <a:r>
-              <a:rPr lang="nl-NL" dirty="0" err="1"/>
-              <a:t>your</a:t>
-            </a:r>
-            <a:r>
-              <a:rPr lang="nl-NL" dirty="0"/>
-              <a:t> Python </a:t>
-            </a:r>
-            <a:r>
-              <a:rPr lang="nl-NL" dirty="0" err="1"/>
-              <a:t>distribution</a:t>
-            </a:r>
-            <a:endParaRPr lang="nl-NL" dirty="0"/>
-          </a:p>
-          <a:p>
-            <a:pPr marL="488250" lvl="2" indent="-285750"/>
-            <a:r>
-              <a:rPr lang="nl-NL" dirty="0"/>
-              <a:t>	I </a:t>
-            </a:r>
-            <a:r>
-              <a:rPr lang="nl-NL" dirty="0" err="1"/>
-              <a:t>am</a:t>
-            </a:r>
-            <a:r>
-              <a:rPr lang="nl-NL" dirty="0"/>
-              <a:t> </a:t>
-            </a:r>
-            <a:r>
-              <a:rPr lang="nl-NL" dirty="0" err="1"/>
-              <a:t>using</a:t>
-            </a:r>
-            <a:r>
-              <a:rPr lang="nl-NL" dirty="0"/>
-              <a:t> a 32bit machine </a:t>
-            </a:r>
-            <a:r>
-              <a:rPr lang="nl-NL" dirty="0" err="1"/>
-              <a:t>with</a:t>
-            </a:r>
-            <a:r>
-              <a:rPr lang="nl-NL" dirty="0"/>
-              <a:t> python 2.7</a:t>
-            </a:r>
-          </a:p>
-          <a:p>
-            <a:pPr marL="488250" lvl="2" indent="-285750"/>
-            <a:r>
-              <a:rPr lang="nl-NL" dirty="0"/>
-              <a:t>Look </a:t>
-            </a:r>
-            <a:r>
-              <a:rPr lang="nl-NL" dirty="0" err="1"/>
-              <a:t>for</a:t>
-            </a:r>
-            <a:r>
-              <a:rPr lang="nl-NL" dirty="0"/>
-              <a:t> </a:t>
-            </a:r>
-            <a:r>
-              <a:rPr lang="nl-NL" dirty="0" err="1"/>
-              <a:t>the</a:t>
-            </a:r>
-            <a:r>
-              <a:rPr lang="nl-NL" dirty="0"/>
-              <a:t> file &lt;</a:t>
-            </a:r>
-            <a:r>
-              <a:rPr lang="nl-NL" dirty="0" err="1"/>
-              <a:t>path_to_opencv</a:t>
-            </a:r>
-            <a:r>
-              <a:rPr lang="nl-NL" dirty="0"/>
-              <a:t>&gt;\</a:t>
-            </a:r>
-            <a:r>
-              <a:rPr lang="nl-NL" dirty="0" err="1"/>
-              <a:t>build</a:t>
-            </a:r>
-            <a:r>
-              <a:rPr lang="nl-NL" dirty="0"/>
-              <a:t>\Python\x86\cv2.pyd</a:t>
-            </a:r>
-          </a:p>
-          <a:p>
-            <a:pPr marL="488250" lvl="2" indent="-285750"/>
-            <a:r>
-              <a:rPr lang="nl-NL" dirty="0"/>
-              <a:t>Copy </a:t>
-            </a:r>
-            <a:r>
-              <a:rPr lang="nl-NL" dirty="0" err="1"/>
-              <a:t>it</a:t>
-            </a:r>
-            <a:r>
-              <a:rPr lang="nl-NL" dirty="0"/>
-              <a:t> </a:t>
-            </a:r>
-            <a:r>
-              <a:rPr lang="nl-NL" dirty="0" err="1"/>
-              <a:t>to</a:t>
-            </a:r>
-            <a:r>
-              <a:rPr lang="nl-NL" dirty="0"/>
-              <a:t> &lt;</a:t>
-            </a:r>
-            <a:r>
-              <a:rPr lang="nl-NL" dirty="0" err="1"/>
-              <a:t>path_to_python</a:t>
-            </a:r>
-            <a:r>
-              <a:rPr lang="nl-NL" dirty="0"/>
-              <a:t>&gt;\</a:t>
-            </a:r>
-            <a:r>
-              <a:rPr lang="nl-NL" dirty="0" err="1"/>
-              <a:t>Lib</a:t>
-            </a:r>
-            <a:r>
-              <a:rPr lang="nl-NL" dirty="0"/>
-              <a:t>\site-packages\cv2.pyd</a:t>
-            </a:r>
-            <a:endParaRPr lang="en-US" dirty="0"/>
+              <a:rPr lang="en-US" dirty="0">
+                <a:cs typeface="Courier New" panose="02070309020205020404" pitchFamily="49" charset="0"/>
+              </a:rPr>
+              <a:t> (if you need computer vision)</a:t>
+            </a:r>
+          </a:p>
+          <a:p>
+            <a:pPr lvl="2"/>
+            <a:endParaRPr lang="en-US" dirty="0">
+              <a:cs typeface="Courier New" panose="02070309020205020404" pitchFamily="49" charset="0"/>
+            </a:endParaRPr>
+          </a:p>
+          <a:p>
+            <a:pPr lvl="2"/>
+            <a:r>
+              <a:rPr lang="en-US" dirty="0">
+                <a:cs typeface="Courier New" panose="02070309020205020404" pitchFamily="49" charset="0"/>
+              </a:rPr>
+              <a:t>Other useful libraries </a:t>
+            </a:r>
+          </a:p>
+          <a:p>
+            <a:pPr lvl="3"/>
+            <a:r>
+              <a:rPr lang="en-US" dirty="0" err="1">
+                <a:cs typeface="Courier New" panose="02070309020205020404" pitchFamily="49" charset="0"/>
+              </a:rPr>
+              <a:t>Tk</a:t>
+            </a:r>
+            <a:r>
+              <a:rPr lang="en-US" dirty="0">
+                <a:cs typeface="Courier New" panose="02070309020205020404" pitchFamily="49" charset="0"/>
+              </a:rPr>
+              <a:t> (Universal window manager)</a:t>
+            </a:r>
+          </a:p>
+          <a:p>
+            <a:pPr lvl="3"/>
+            <a:r>
+              <a:rPr lang="en-US" dirty="0">
+                <a:cs typeface="Courier New" panose="02070309020205020404" pitchFamily="49" charset="0"/>
+              </a:rPr>
+              <a:t>PIL (Python Image Library)</a:t>
+            </a:r>
+          </a:p>
+          <a:p>
+            <a:pPr lvl="3"/>
+            <a:r>
+              <a:rPr lang="en-US" dirty="0" err="1">
+                <a:cs typeface="Courier New" panose="02070309020205020404" pitchFamily="49" charset="0"/>
+              </a:rPr>
+              <a:t>Matplotlib</a:t>
+            </a:r>
+            <a:endParaRPr lang="en-US" dirty="0">
+              <a:cs typeface="Courier New" panose="02070309020205020404" pitchFamily="49" charset="0"/>
+            </a:endParaRPr>
           </a:p>
           <a:p>
             <a:pPr marL="405000" lvl="4" indent="0">
@@ -15581,20 +15490,20 @@
     </p:spTree>
     <p:extLst>
       <p:ext uri="{BB962C8B-B14F-4D97-AF65-F5344CB8AC3E}">
-        <p14:creationId xmlns:p14="http://schemas.microsoft.com/office/powerpoint/2010/main" val="2223392183"/>
+        <p14:creationId xmlns:p14="http://schemas.microsoft.com/office/powerpoint/2010/main" val="2512396211"/>
       </p:ext>
     </p:extLst>
   </p:cSld>
   <p:clrMapOvr>
     <a:masterClrMapping/>
   </p:clrMapOvr>
-  <mc:AlternateContent xmlns:mc="http://schemas.openxmlformats.org/markup-compatibility/2006" xmlns:p14="http://schemas.microsoft.com/office/powerpoint/2010/main">
-    <mc:Choice Requires="p14">
+  <mc:AlternateContent xmlns:mc="http://schemas.openxmlformats.org/markup-compatibility/2006">
+    <mc:Choice xmlns:p14="http://schemas.microsoft.com/office/powerpoint/2010/main" Requires="p14">
       <p:transition spd="med" p14:dur="700">
         <p:fade/>
       </p:transition>
     </mc:Choice>
-    <mc:Fallback xmlns="">
+    <mc:Fallback>
       <p:transition spd="med">
         <p:fade/>
       </p:transition>
@@ -15604,7 +15513,7 @@
 </file>
 
 <file path=ppt/slides/slide32.xml><?xml version="1.0" encoding="utf-8"?>
-<p:sld xmlns:a="http://schemas.openxmlformats.org/drawingml/2006/main" xmlns:r="http://schemas.openxmlformats.org/officeDocument/2006/relationships" xmlns:p="http://schemas.openxmlformats.org/presentationml/2006/main">
+<p:sld xmlns:a="http://schemas.openxmlformats.org/drawingml/2006/main" xmlns:r="http://schemas.openxmlformats.org/officeDocument/2006/relationships" xmlns:p="http://schemas.openxmlformats.org/presentationml/2006/main" show="0">
   <p:cSld>
     <p:spTree>
       <p:nvGrpSpPr>
@@ -15668,12 +15577,16 @@
               <a:buChar char="•"/>
             </a:pPr>
             <a:r>
-              <a:rPr lang="nl-NL" dirty="0"/>
-              <a:t>Test </a:t>
-            </a:r>
-            <a:r>
               <a:rPr lang="nl-NL" dirty="0" err="1"/>
-              <a:t>your</a:t>
+              <a:t>OpenCV</a:t>
+            </a:r>
+            <a:r>
+              <a:rPr lang="nl-NL" dirty="0"/>
+              <a:t> is a </a:t>
+            </a:r>
+            <a:r>
+              <a:rPr lang="nl-NL" dirty="0" err="1"/>
+              <a:t>huge</a:t>
             </a:r>
             <a:r>
               <a:rPr lang="nl-NL" dirty="0"/>
@@ -15681,7 +15594,18 @@
             </a:r>
             <a:r>
               <a:rPr lang="nl-NL" dirty="0" err="1"/>
-              <a:t>installation</a:t>
+              <a:t>library</a:t>
+            </a:r>
+            <a:endParaRPr lang="nl-NL" dirty="0"/>
+          </a:p>
+          <a:p>
+            <a:pPr marL="285750" indent="-285750">
+              <a:buFont typeface="Arial" panose="020B0604020202020204" pitchFamily="34" charset="0"/>
+              <a:buChar char="•"/>
+            </a:pPr>
+            <a:r>
+              <a:rPr lang="nl-NL" dirty="0" err="1"/>
+              <a:t>You</a:t>
             </a:r>
             <a:r>
               <a:rPr lang="nl-NL" dirty="0"/>
@@ -15689,9 +15613,102 @@
             </a:r>
             <a:r>
               <a:rPr lang="nl-NL" dirty="0" err="1"/>
-              <a:t>using</a:t>
-            </a:r>
-            <a:endParaRPr lang="nl-NL" dirty="0"/>
+              <a:t>can</a:t>
+            </a:r>
+            <a:r>
+              <a:rPr lang="nl-NL" dirty="0"/>
+              <a:t> </a:t>
+            </a:r>
+            <a:r>
+              <a:rPr lang="nl-NL" dirty="0" err="1"/>
+              <a:t>try</a:t>
+            </a:r>
+            <a:r>
+              <a:rPr lang="nl-NL" dirty="0"/>
+              <a:t> </a:t>
+            </a:r>
+            <a:r>
+              <a:rPr lang="nl-NL" dirty="0" err="1"/>
+              <a:t>to</a:t>
+            </a:r>
+            <a:r>
+              <a:rPr lang="nl-NL" dirty="0"/>
+              <a:t> </a:t>
+            </a:r>
+            <a:r>
+              <a:rPr lang="nl-NL" dirty="0" err="1"/>
+              <a:t>find</a:t>
+            </a:r>
+            <a:r>
+              <a:rPr lang="nl-NL" dirty="0"/>
+              <a:t> </a:t>
+            </a:r>
+            <a:r>
+              <a:rPr lang="nl-NL" dirty="0" err="1"/>
+              <a:t>an</a:t>
+            </a:r>
+            <a:r>
+              <a:rPr lang="nl-NL" dirty="0"/>
+              <a:t> </a:t>
+            </a:r>
+            <a:r>
+              <a:rPr lang="nl-NL" dirty="0" err="1"/>
+              <a:t>installer</a:t>
+            </a:r>
+            <a:r>
+              <a:rPr lang="nl-NL" dirty="0"/>
+              <a:t> </a:t>
+            </a:r>
+            <a:r>
+              <a:rPr lang="nl-NL" dirty="0" err="1"/>
+              <a:t>for</a:t>
+            </a:r>
+            <a:r>
+              <a:rPr lang="nl-NL" dirty="0"/>
+              <a:t> </a:t>
+            </a:r>
+            <a:r>
+              <a:rPr lang="nl-NL" dirty="0" err="1"/>
+              <a:t>windows</a:t>
+            </a:r>
+            <a:r>
+              <a:rPr lang="nl-NL" dirty="0"/>
+              <a:t> (</a:t>
+            </a:r>
+            <a:r>
+              <a:rPr lang="nl-NL" dirty="0" err="1"/>
+              <a:t>previous</a:t>
+            </a:r>
+            <a:r>
+              <a:rPr lang="nl-NL" dirty="0"/>
+              <a:t> slides)</a:t>
+            </a:r>
+          </a:p>
+          <a:p>
+            <a:pPr marL="285750" indent="-285750">
+              <a:buFont typeface="Arial" panose="020B0604020202020204" pitchFamily="34" charset="0"/>
+              <a:buChar char="•"/>
+            </a:pPr>
+            <a:r>
+              <a:rPr lang="nl-NL" dirty="0"/>
+              <a:t>Or, </a:t>
+            </a:r>
+            <a:r>
+              <a:rPr lang="nl-NL" dirty="0" err="1"/>
+              <a:t>you</a:t>
+            </a:r>
+            <a:r>
+              <a:rPr lang="nl-NL" dirty="0"/>
+              <a:t> download </a:t>
+            </a:r>
+            <a:r>
+              <a:rPr lang="nl-NL" dirty="0" err="1"/>
+              <a:t>it</a:t>
+            </a:r>
+            <a:r>
+              <a:rPr lang="nl-NL" dirty="0"/>
+              <a:t> form opencv.org</a:t>
+            </a:r>
           </a:p>
           <a:p>
             <a:pPr marL="342900" lvl="1" indent="-342900">
@@ -15699,50 +15716,24 @@
               <a:buChar char="•"/>
             </a:pPr>
             <a:r>
-              <a:rPr lang="nl-NL" sz="1600" dirty="0"/>
-              <a:t>import cv2</a:t>
-            </a:r>
-          </a:p>
-          <a:p>
-            <a:pPr marL="285750" indent="-285750">
-              <a:buFont typeface="Arial" panose="020B0604020202020204" pitchFamily="34" charset="0"/>
-              <a:buChar char="•"/>
-            </a:pPr>
-            <a:r>
-              <a:rPr lang="nl-NL" dirty="0"/>
-              <a:t>We </a:t>
+              <a:rPr lang="nl-NL" dirty="0"/>
+              <a:t>Download </a:t>
             </a:r>
             <a:r>
               <a:rPr lang="nl-NL" dirty="0" err="1"/>
-              <a:t>often</a:t>
-            </a:r>
-            <a:r>
-              <a:rPr lang="nl-NL" dirty="0"/>
-              <a:t> </a:t>
+              <a:t>and</a:t>
+            </a:r>
+            <a:r>
+              <a:rPr lang="nl-NL" dirty="0"/>
+              <a:t> extract </a:t>
             </a:r>
             <a:r>
               <a:rPr lang="nl-NL" dirty="0" err="1"/>
-              <a:t>use</a:t>
-            </a:r>
-            <a:r>
-              <a:rPr lang="nl-NL" dirty="0"/>
-              <a:t> cv </a:t>
-            </a:r>
-            <a:r>
-              <a:rPr lang="nl-NL" dirty="0" err="1"/>
-              <a:t>rather</a:t>
-            </a:r>
-            <a:r>
-              <a:rPr lang="nl-NL" dirty="0"/>
-              <a:t> </a:t>
-            </a:r>
-            <a:r>
-              <a:rPr lang="nl-NL" dirty="0" err="1"/>
-              <a:t>than</a:t>
-            </a:r>
-            <a:r>
-              <a:rPr lang="nl-NL" dirty="0"/>
-              <a:t> cv2:</a:t>
+              <a:t>the</a:t>
+            </a:r>
+            <a:r>
+              <a:rPr lang="nl-NL" dirty="0"/>
+              <a:t> files</a:t>
             </a:r>
           </a:p>
           <a:p>
@@ -15751,54 +15742,16 @@
               <a:buChar char="•"/>
             </a:pPr>
             <a:r>
-              <a:rPr lang="nl-NL" sz="1600" dirty="0"/>
-              <a:t>import cv2.cv as cv</a:t>
-            </a:r>
-            <a:endParaRPr lang="en-US" sz="1600" dirty="0"/>
-          </a:p>
-          <a:p>
-            <a:pPr marL="342900" lvl="1" indent="-342900">
-              <a:buFont typeface="Arial" panose="020B0604020202020204" pitchFamily="34" charset="0"/>
-              <a:buChar char="•"/>
-            </a:pPr>
-            <a:endParaRPr lang="nl-NL" dirty="0"/>
-          </a:p>
-          <a:p>
-            <a:pPr marL="285750" indent="-285750">
-              <a:buFont typeface="Arial" panose="020B0604020202020204" pitchFamily="34" charset="0"/>
-              <a:buChar char="•"/>
-            </a:pPr>
+              <a:rPr lang="nl-NL" dirty="0"/>
+              <a:t>Copy </a:t>
+            </a:r>
             <a:r>
               <a:rPr lang="nl-NL" dirty="0" err="1"/>
-              <a:t>To</a:t>
-            </a:r>
-            <a:r>
-              <a:rPr lang="nl-NL" dirty="0"/>
-              <a:t> </a:t>
-            </a:r>
-            <a:r>
-              <a:rPr lang="nl-NL" dirty="0" err="1"/>
-              <a:t>automatically</a:t>
-            </a:r>
-            <a:r>
-              <a:rPr lang="nl-NL" dirty="0"/>
-              <a:t> do </a:t>
-            </a:r>
-            <a:r>
-              <a:rPr lang="nl-NL" dirty="0" err="1"/>
-              <a:t>this</a:t>
-            </a:r>
-            <a:r>
-              <a:rPr lang="nl-NL" dirty="0"/>
-              <a:t>, </a:t>
-            </a:r>
-            <a:r>
-              <a:rPr lang="nl-NL" dirty="0" err="1"/>
-              <a:t>create</a:t>
-            </a:r>
-            <a:r>
-              <a:rPr lang="nl-NL" dirty="0"/>
-              <a:t> a file cv.py in </a:t>
+              <a:t>the</a:t>
+            </a:r>
+            <a:r>
+              <a:rPr lang="nl-NL" dirty="0"/>
+              <a:t> cv2.pyd file </a:t>
             </a:r>
             <a:r>
               <a:rPr lang="nl-NL" dirty="0" err="1"/>
@@ -15806,6 +15759,112 @@
             </a:r>
             <a:r>
               <a:rPr lang="nl-NL" dirty="0"/>
+              <a:t> </a:t>
+            </a:r>
+            <a:r>
+              <a:rPr lang="nl-NL" dirty="0" err="1"/>
+              <a:t>your</a:t>
+            </a:r>
+            <a:r>
+              <a:rPr lang="nl-NL" dirty="0"/>
+              <a:t> Python </a:t>
+            </a:r>
+            <a:r>
+              <a:rPr lang="nl-NL" dirty="0" err="1"/>
+              <a:t>distribution</a:t>
+            </a:r>
+            <a:endParaRPr lang="nl-NL" dirty="0"/>
+          </a:p>
+          <a:p>
+            <a:pPr marL="488250" lvl="2" indent="-285750"/>
+            <a:r>
+              <a:rPr lang="nl-NL" dirty="0"/>
+              <a:t>	I </a:t>
+            </a:r>
+            <a:r>
+              <a:rPr lang="nl-NL" dirty="0" err="1"/>
+              <a:t>am</a:t>
+            </a:r>
+            <a:r>
+              <a:rPr lang="nl-NL" dirty="0"/>
+              <a:t> </a:t>
+            </a:r>
+            <a:r>
+              <a:rPr lang="nl-NL" dirty="0" err="1"/>
+              <a:t>using</a:t>
+            </a:r>
+            <a:r>
+              <a:rPr lang="nl-NL" dirty="0"/>
+              <a:t> a 32bit machine </a:t>
+            </a:r>
+            <a:r>
+              <a:rPr lang="nl-NL" dirty="0" err="1"/>
+              <a:t>with</a:t>
+            </a:r>
+            <a:r>
+              <a:rPr lang="nl-NL" dirty="0"/>
+              <a:t> python 2.7</a:t>
+            </a:r>
+          </a:p>
+          <a:p>
+            <a:pPr marL="488250" lvl="2" indent="-285750"/>
+            <a:r>
+              <a:rPr lang="nl-NL" dirty="0"/>
+              <a:t>Look </a:t>
+            </a:r>
+            <a:r>
+              <a:rPr lang="nl-NL" dirty="0" err="1"/>
+              <a:t>for</a:t>
+            </a:r>
+            <a:r>
+              <a:rPr lang="nl-NL" dirty="0"/>
+              <a:t> </a:t>
+            </a:r>
+            <a:r>
+              <a:rPr lang="nl-NL" dirty="0" err="1"/>
+              <a:t>the</a:t>
+            </a:r>
+            <a:r>
+              <a:rPr lang="nl-NL" dirty="0"/>
+              <a:t> file &lt;</a:t>
+            </a:r>
+            <a:r>
+              <a:rPr lang="nl-NL" dirty="0" err="1"/>
+              <a:t>path_to_opencv</a:t>
+            </a:r>
+            <a:r>
+              <a:rPr lang="nl-NL" dirty="0"/>
+              <a:t>&gt;\</a:t>
+            </a:r>
+            <a:r>
+              <a:rPr lang="nl-NL" dirty="0" err="1"/>
+              <a:t>build</a:t>
+            </a:r>
+            <a:r>
+              <a:rPr lang="nl-NL" dirty="0"/>
+              <a:t>\Python\x86\cv2.pyd</a:t>
+            </a:r>
+          </a:p>
+          <a:p>
+            <a:pPr marL="488250" lvl="2" indent="-285750"/>
+            <a:r>
+              <a:rPr lang="nl-NL" dirty="0"/>
+              <a:t>Copy </a:t>
+            </a:r>
+            <a:r>
+              <a:rPr lang="nl-NL" dirty="0" err="1"/>
+              <a:t>it</a:t>
+            </a:r>
+            <a:r>
+              <a:rPr lang="nl-NL" dirty="0"/>
+              <a:t> </a:t>
+            </a:r>
+            <a:r>
+              <a:rPr lang="nl-NL" dirty="0" err="1"/>
+              <a:t>to</a:t>
+            </a:r>
+            <a:r>
+              <a:rPr lang="nl-NL" dirty="0"/>
               <a:t> &lt;</a:t>
             </a:r>
             <a:r>
@@ -15822,97 +15881,9 @@
             </a:r>
             <a:r>
               <a:rPr lang="nl-NL" dirty="0"/>
-              <a:t>\site-packages\ </a:t>
-            </a:r>
-            <a:r>
-              <a:rPr lang="nl-NL" dirty="0" err="1"/>
-              <a:t>with</a:t>
-            </a:r>
-            <a:r>
-              <a:rPr lang="nl-NL" dirty="0"/>
-              <a:t> </a:t>
-            </a:r>
-            <a:r>
-              <a:rPr lang="nl-NL" dirty="0" err="1"/>
-              <a:t>the</a:t>
-            </a:r>
-            <a:r>
-              <a:rPr lang="nl-NL" dirty="0"/>
-              <a:t> </a:t>
-            </a:r>
-            <a:r>
-              <a:rPr lang="nl-NL" dirty="0" err="1"/>
-              <a:t>following</a:t>
-            </a:r>
-            <a:r>
-              <a:rPr lang="nl-NL" dirty="0"/>
-              <a:t> content:</a:t>
-            </a:r>
-          </a:p>
-          <a:p>
-            <a:pPr marL="342900" lvl="1" indent="-342900">
-              <a:buFont typeface="Arial" panose="020B0604020202020204" pitchFamily="34" charset="0"/>
-              <a:buChar char="•"/>
-            </a:pPr>
-            <a:r>
-              <a:rPr lang="nl-NL" sz="1600" dirty="0" err="1"/>
-              <a:t>from</a:t>
-            </a:r>
-            <a:r>
-              <a:rPr lang="nl-NL" sz="1600" dirty="0"/>
-              <a:t> cv2.cv import *</a:t>
-            </a:r>
-          </a:p>
-          <a:p>
-            <a:pPr marL="285750" indent="-285750">
-              <a:buFont typeface="Arial" panose="020B0604020202020204" pitchFamily="34" charset="0"/>
-              <a:buChar char="•"/>
-            </a:pPr>
-            <a:r>
-              <a:rPr lang="nl-NL" dirty="0" err="1"/>
-              <a:t>This</a:t>
-            </a:r>
-            <a:r>
-              <a:rPr lang="nl-NL" dirty="0"/>
-              <a:t> </a:t>
-            </a:r>
-            <a:r>
-              <a:rPr lang="nl-NL" dirty="0" err="1"/>
-              <a:t>will</a:t>
-            </a:r>
-            <a:r>
-              <a:rPr lang="nl-NL" dirty="0"/>
-              <a:t> </a:t>
-            </a:r>
-            <a:r>
-              <a:rPr lang="nl-NL" dirty="0" err="1"/>
-              <a:t>enable</a:t>
-            </a:r>
-            <a:r>
-              <a:rPr lang="nl-NL" dirty="0"/>
-              <a:t> </a:t>
-            </a:r>
-            <a:r>
-              <a:rPr lang="nl-NL" dirty="0" err="1"/>
-              <a:t>the</a:t>
-            </a:r>
-            <a:r>
-              <a:rPr lang="nl-NL" dirty="0"/>
-              <a:t> </a:t>
-            </a:r>
-            <a:r>
-              <a:rPr lang="nl-NL" dirty="0" err="1"/>
-              <a:t>old</a:t>
-            </a:r>
-            <a:r>
-              <a:rPr lang="nl-NL" dirty="0"/>
-              <a:t> “import cv” </a:t>
-            </a:r>
-            <a:r>
-              <a:rPr lang="nl-NL" dirty="0" err="1"/>
-              <a:t>command</a:t>
-            </a:r>
-            <a:endParaRPr lang="nl-NL" dirty="0"/>
+              <a:t>\site-packages\cv2.pyd</a:t>
+            </a:r>
+            <a:endParaRPr lang="en-US" dirty="0"/>
           </a:p>
           <a:p>
             <a:pPr marL="405000" lvl="4" indent="0">
@@ -15974,20 +15945,20 @@
     </p:spTree>
     <p:extLst>
       <p:ext uri="{BB962C8B-B14F-4D97-AF65-F5344CB8AC3E}">
-        <p14:creationId xmlns:p14="http://schemas.microsoft.com/office/powerpoint/2010/main" val="3264818513"/>
+        <p14:creationId xmlns:p14="http://schemas.microsoft.com/office/powerpoint/2010/main" val="2223392183"/>
       </p:ext>
     </p:extLst>
   </p:cSld>
   <p:clrMapOvr>
     <a:masterClrMapping/>
   </p:clrMapOvr>
-  <mc:AlternateContent xmlns:mc="http://schemas.openxmlformats.org/markup-compatibility/2006" xmlns:p14="http://schemas.microsoft.com/office/powerpoint/2010/main">
-    <mc:Choice Requires="p14">
+  <mc:AlternateContent xmlns:mc="http://schemas.openxmlformats.org/markup-compatibility/2006">
+    <mc:Choice xmlns:p14="http://schemas.microsoft.com/office/powerpoint/2010/main" Requires="p14">
       <p:transition spd="med" p14:dur="700">
         <p:fade/>
       </p:transition>
     </mc:Choice>
-    <mc:Fallback xmlns="">
+    <mc:Fallback>
       <p:transition spd="med">
         <p:fade/>
       </p:transition>
@@ -15997,7 +15968,7 @@
 </file>
 
 <file path=ppt/slides/slide33.xml><?xml version="1.0" encoding="utf-8"?>
-<p:sld xmlns:a="http://schemas.openxmlformats.org/drawingml/2006/main" xmlns:r="http://schemas.openxmlformats.org/officeDocument/2006/relationships" xmlns:p="http://schemas.openxmlformats.org/presentationml/2006/main">
+<p:sld xmlns:a="http://schemas.openxmlformats.org/drawingml/2006/main" xmlns:r="http://schemas.openxmlformats.org/officeDocument/2006/relationships" xmlns:p="http://schemas.openxmlformats.org/presentationml/2006/main" show="0">
   <p:cSld>
     <p:spTree>
       <p:nvGrpSpPr>
@@ -16029,9 +16000,10 @@
           <a:lstStyle/>
           <a:p>
             <a:r>
-              <a:rPr lang="en-US" dirty="0"/>
-              <a:t>NAO-lib</a:t>
-            </a:r>
+              <a:rPr lang="en-US" dirty="0" err="1"/>
+              <a:t>OpenCV</a:t>
+            </a:r>
+            <a:endParaRPr lang="en-US" dirty="0"/>
           </a:p>
         </p:txBody>
       </p:sp>
@@ -16047,7 +16019,7 @@
         </p:nvSpPr>
         <p:spPr>
           <a:xfrm>
-            <a:off x="610099" y="1073150"/>
+            <a:off x="440504" y="1019361"/>
             <a:ext cx="7825978" cy="3496469"/>
           </a:xfrm>
         </p:spPr>
@@ -16055,148 +16027,265 @@
           <a:bodyPr/>
           <a:lstStyle/>
           <a:p>
-            <a:pPr lvl="2"/>
-            <a:r>
-              <a:rPr lang="en-US" dirty="0"/>
-              <a:t>A custom-built library simplifies many functions of </a:t>
-            </a:r>
-            <a:r>
-              <a:rPr lang="en-US" dirty="0" err="1"/>
-              <a:t>Naoqi</a:t>
-            </a:r>
-            <a:endParaRPr lang="en-US" dirty="0"/>
-          </a:p>
-          <a:p>
-            <a:pPr lvl="2"/>
-            <a:r>
-              <a:rPr lang="en-US" dirty="0"/>
-              <a:t>Meant for NAO, and the </a:t>
-            </a:r>
-            <a:r>
-              <a:rPr lang="en-US" dirty="0" err="1"/>
-              <a:t>naoqi</a:t>
-            </a:r>
-            <a:r>
-              <a:rPr lang="en-US" dirty="0"/>
-              <a:t>-version of NAO</a:t>
-            </a:r>
-          </a:p>
-          <a:p>
-            <a:pPr lvl="2"/>
-            <a:r>
-              <a:rPr lang="en-US" dirty="0"/>
-              <a:t>Latest version will be shared with you</a:t>
-            </a:r>
-          </a:p>
-          <a:p>
-            <a:pPr lvl="3"/>
-            <a:r>
-              <a:rPr lang="en-US" dirty="0"/>
-              <a:t>nao.py includes cv</a:t>
-            </a:r>
-          </a:p>
-          <a:p>
-            <a:pPr lvl="3"/>
-            <a:r>
-              <a:rPr lang="en-US" dirty="0"/>
-              <a:t>nao_nocv.py does not</a:t>
-            </a:r>
-          </a:p>
-          <a:p>
-            <a:pPr lvl="3"/>
-            <a:endParaRPr lang="en-US" dirty="0"/>
-          </a:p>
-          <a:p>
-            <a:pPr lvl="2"/>
-            <a:r>
-              <a:rPr lang="en-US" dirty="0"/>
-              <a:t>Installing </a:t>
-            </a:r>
-            <a:r>
-              <a:rPr lang="en-US" dirty="0" err="1"/>
-              <a:t>nao</a:t>
-            </a:r>
-            <a:r>
-              <a:rPr lang="en-US" dirty="0"/>
-              <a:t>-lib</a:t>
-            </a:r>
-          </a:p>
-          <a:p>
-            <a:pPr lvl="3"/>
-            <a:r>
-              <a:rPr lang="en-US" dirty="0"/>
-              <a:t>Create a directory with a python file with one line of code</a:t>
-            </a:r>
-          </a:p>
-          <a:p>
-            <a:pPr lvl="4"/>
-            <a:r>
-              <a:rPr lang="en-US" dirty="0"/>
-              <a:t>import </a:t>
-            </a:r>
-            <a:r>
-              <a:rPr lang="en-US" dirty="0" err="1"/>
-              <a:t>nao_nocv</a:t>
-            </a:r>
-            <a:r>
-              <a:rPr lang="en-US" dirty="0"/>
-              <a:t> as </a:t>
-            </a:r>
-            <a:r>
-              <a:rPr lang="en-US" dirty="0" err="1"/>
-              <a:t>nao</a:t>
-            </a:r>
-            <a:endParaRPr lang="en-US" dirty="0"/>
-          </a:p>
-          <a:p>
-            <a:pPr lvl="3"/>
-            <a:r>
-              <a:rPr lang="en-US" dirty="0"/>
-              <a:t>Copy nao.py or nao_nocv.py in the same directory</a:t>
-            </a:r>
-          </a:p>
-          <a:p>
-            <a:pPr lvl="3"/>
-            <a:r>
-              <a:rPr lang="en-US" dirty="0"/>
-              <a:t>Press F5 to run and test the program</a:t>
-            </a:r>
-          </a:p>
-          <a:p>
-            <a:pPr lvl="4"/>
-            <a:endParaRPr lang="en-US" dirty="0"/>
-          </a:p>
-          <a:p>
-            <a:pPr marL="0" lvl="2" indent="0">
+            <a:pPr marL="285750" indent="-285750">
+              <a:buFont typeface="Arial" panose="020B0604020202020204" pitchFamily="34" charset="0"/>
+              <a:buChar char="•"/>
+            </a:pPr>
+            <a:r>
+              <a:rPr lang="nl-NL" dirty="0"/>
+              <a:t>Test </a:t>
+            </a:r>
+            <a:r>
+              <a:rPr lang="nl-NL" dirty="0" err="1"/>
+              <a:t>your</a:t>
+            </a:r>
+            <a:r>
+              <a:rPr lang="nl-NL" dirty="0"/>
+              <a:t> </a:t>
+            </a:r>
+            <a:r>
+              <a:rPr lang="nl-NL" dirty="0" err="1"/>
+              <a:t>installation</a:t>
+            </a:r>
+            <a:r>
+              <a:rPr lang="nl-NL" dirty="0"/>
+              <a:t> </a:t>
+            </a:r>
+            <a:r>
+              <a:rPr lang="nl-NL" dirty="0" err="1"/>
+              <a:t>using</a:t>
+            </a:r>
+            <a:endParaRPr lang="nl-NL" dirty="0"/>
+          </a:p>
+          <a:p>
+            <a:pPr marL="342900" lvl="1" indent="-342900">
+              <a:buFont typeface="Arial" panose="020B0604020202020204" pitchFamily="34" charset="0"/>
+              <a:buChar char="•"/>
+            </a:pPr>
+            <a:r>
+              <a:rPr lang="nl-NL" sz="1600" dirty="0"/>
+              <a:t>import cv2</a:t>
+            </a:r>
+          </a:p>
+          <a:p>
+            <a:pPr marL="285750" indent="-285750">
+              <a:buFont typeface="Arial" panose="020B0604020202020204" pitchFamily="34" charset="0"/>
+              <a:buChar char="•"/>
+            </a:pPr>
+            <a:r>
+              <a:rPr lang="nl-NL" dirty="0"/>
+              <a:t>We </a:t>
+            </a:r>
+            <a:r>
+              <a:rPr lang="nl-NL" dirty="0" err="1"/>
+              <a:t>often</a:t>
+            </a:r>
+            <a:r>
+              <a:rPr lang="nl-NL" dirty="0"/>
+              <a:t> </a:t>
+            </a:r>
+            <a:r>
+              <a:rPr lang="nl-NL" dirty="0" err="1"/>
+              <a:t>use</a:t>
+            </a:r>
+            <a:r>
+              <a:rPr lang="nl-NL" dirty="0"/>
+              <a:t> cv </a:t>
+            </a:r>
+            <a:r>
+              <a:rPr lang="nl-NL" dirty="0" err="1"/>
+              <a:t>rather</a:t>
+            </a:r>
+            <a:r>
+              <a:rPr lang="nl-NL" dirty="0"/>
+              <a:t> </a:t>
+            </a:r>
+            <a:r>
+              <a:rPr lang="nl-NL" dirty="0" err="1"/>
+              <a:t>than</a:t>
+            </a:r>
+            <a:r>
+              <a:rPr lang="nl-NL" dirty="0"/>
+              <a:t> cv2:</a:t>
+            </a:r>
+          </a:p>
+          <a:p>
+            <a:pPr marL="342900" lvl="1" indent="-342900">
+              <a:buFont typeface="Arial" panose="020B0604020202020204" pitchFamily="34" charset="0"/>
+              <a:buChar char="•"/>
+            </a:pPr>
+            <a:r>
+              <a:rPr lang="nl-NL" sz="1600" dirty="0"/>
+              <a:t>import cv2.cv as cv</a:t>
+            </a:r>
+            <a:endParaRPr lang="en-US" sz="1600" dirty="0"/>
+          </a:p>
+          <a:p>
+            <a:pPr marL="342900" lvl="1" indent="-342900">
+              <a:buFont typeface="Arial" panose="020B0604020202020204" pitchFamily="34" charset="0"/>
+              <a:buChar char="•"/>
+            </a:pPr>
+            <a:endParaRPr lang="nl-NL" dirty="0"/>
+          </a:p>
+          <a:p>
+            <a:pPr marL="285750" indent="-285750">
+              <a:buFont typeface="Arial" panose="020B0604020202020204" pitchFamily="34" charset="0"/>
+              <a:buChar char="•"/>
+            </a:pPr>
+            <a:r>
+              <a:rPr lang="nl-NL" dirty="0" err="1"/>
+              <a:t>To</a:t>
+            </a:r>
+            <a:r>
+              <a:rPr lang="nl-NL" dirty="0"/>
+              <a:t> </a:t>
+            </a:r>
+            <a:r>
+              <a:rPr lang="nl-NL" dirty="0" err="1"/>
+              <a:t>automatically</a:t>
+            </a:r>
+            <a:r>
+              <a:rPr lang="nl-NL" dirty="0"/>
+              <a:t> do </a:t>
+            </a:r>
+            <a:r>
+              <a:rPr lang="nl-NL" dirty="0" err="1"/>
+              <a:t>this</a:t>
+            </a:r>
+            <a:r>
+              <a:rPr lang="nl-NL" dirty="0"/>
+              <a:t>, </a:t>
+            </a:r>
+            <a:r>
+              <a:rPr lang="nl-NL" dirty="0" err="1"/>
+              <a:t>create</a:t>
+            </a:r>
+            <a:r>
+              <a:rPr lang="nl-NL" dirty="0"/>
+              <a:t> a file cv.py in </a:t>
+            </a:r>
+            <a:r>
+              <a:rPr lang="nl-NL" dirty="0" err="1"/>
+              <a:t>to</a:t>
+            </a:r>
+            <a:r>
+              <a:rPr lang="nl-NL" dirty="0"/>
+              <a:t> &lt;</a:t>
+            </a:r>
+            <a:r>
+              <a:rPr lang="nl-NL" dirty="0" err="1"/>
+              <a:t>path_to_python</a:t>
+            </a:r>
+            <a:r>
+              <a:rPr lang="nl-NL" dirty="0"/>
+              <a:t>&gt;\</a:t>
+            </a:r>
+            <a:r>
+              <a:rPr lang="nl-NL" dirty="0" err="1"/>
+              <a:t>Lib</a:t>
+            </a:r>
+            <a:r>
+              <a:rPr lang="nl-NL" dirty="0"/>
+              <a:t>\site-packages\ </a:t>
+            </a:r>
+            <a:r>
+              <a:rPr lang="nl-NL" dirty="0" err="1"/>
+              <a:t>with</a:t>
+            </a:r>
+            <a:r>
+              <a:rPr lang="nl-NL" dirty="0"/>
+              <a:t> </a:t>
+            </a:r>
+            <a:r>
+              <a:rPr lang="nl-NL" dirty="0" err="1"/>
+              <a:t>the</a:t>
+            </a:r>
+            <a:r>
+              <a:rPr lang="nl-NL" dirty="0"/>
+              <a:t> </a:t>
+            </a:r>
+            <a:r>
+              <a:rPr lang="nl-NL" dirty="0" err="1"/>
+              <a:t>following</a:t>
+            </a:r>
+            <a:r>
+              <a:rPr lang="nl-NL" dirty="0"/>
+              <a:t> content:</a:t>
+            </a:r>
+          </a:p>
+          <a:p>
+            <a:pPr marL="342900" lvl="1" indent="-342900">
+              <a:buFont typeface="Arial" panose="020B0604020202020204" pitchFamily="34" charset="0"/>
+              <a:buChar char="•"/>
+            </a:pPr>
+            <a:r>
+              <a:rPr lang="nl-NL" sz="1600" dirty="0" err="1"/>
+              <a:t>from</a:t>
+            </a:r>
+            <a:r>
+              <a:rPr lang="nl-NL" sz="1600" dirty="0"/>
+              <a:t> cv2.cv import *</a:t>
+            </a:r>
+          </a:p>
+          <a:p>
+            <a:pPr marL="285750" indent="-285750">
+              <a:buFont typeface="Arial" panose="020B0604020202020204" pitchFamily="34" charset="0"/>
+              <a:buChar char="•"/>
+            </a:pPr>
+            <a:r>
+              <a:rPr lang="nl-NL" dirty="0" err="1"/>
+              <a:t>This</a:t>
+            </a:r>
+            <a:r>
+              <a:rPr lang="nl-NL" dirty="0"/>
+              <a:t> </a:t>
+            </a:r>
+            <a:r>
+              <a:rPr lang="nl-NL" dirty="0" err="1"/>
+              <a:t>will</a:t>
+            </a:r>
+            <a:r>
+              <a:rPr lang="nl-NL" dirty="0"/>
+              <a:t> </a:t>
+            </a:r>
+            <a:r>
+              <a:rPr lang="nl-NL" dirty="0" err="1"/>
+              <a:t>enable</a:t>
+            </a:r>
+            <a:r>
+              <a:rPr lang="nl-NL" dirty="0"/>
+              <a:t> </a:t>
+            </a:r>
+            <a:r>
+              <a:rPr lang="nl-NL" dirty="0" err="1"/>
+              <a:t>the</a:t>
+            </a:r>
+            <a:r>
+              <a:rPr lang="nl-NL" dirty="0"/>
+              <a:t> </a:t>
+            </a:r>
+            <a:r>
+              <a:rPr lang="nl-NL" dirty="0" err="1"/>
+              <a:t>old</a:t>
+            </a:r>
+            <a:r>
+              <a:rPr lang="nl-NL" dirty="0"/>
+              <a:t> “import cv” </a:t>
+            </a:r>
+            <a:r>
+              <a:rPr lang="nl-NL" dirty="0" err="1"/>
+              <a:t>command</a:t>
+            </a:r>
+            <a:endParaRPr lang="nl-NL" dirty="0"/>
+          </a:p>
+          <a:p>
+            <a:pPr marL="405000" lvl="4" indent="0">
               <a:buNone/>
             </a:pPr>
-            <a:endParaRPr lang="en-US" dirty="0"/>
-          </a:p>
-          <a:p>
-            <a:pPr marL="0" lvl="2" indent="0">
-              <a:buNone/>
-            </a:pPr>
-            <a:endParaRPr lang="en-US" dirty="0"/>
-          </a:p>
-          <a:p>
-            <a:pPr marL="0" lvl="2" indent="0">
-              <a:buNone/>
-            </a:pPr>
-            <a:endParaRPr lang="en-US" dirty="0"/>
-          </a:p>
-          <a:p>
-            <a:pPr lvl="2"/>
-            <a:endParaRPr lang="en-US" dirty="0"/>
-          </a:p>
-          <a:p>
-            <a:pPr lvl="2"/>
-            <a:endParaRPr lang="en-US" dirty="0"/>
-          </a:p>
-          <a:p>
-            <a:pPr marL="0" lvl="2" indent="0">
-              <a:buNone/>
-            </a:pPr>
-            <a:endParaRPr lang="en-US" dirty="0"/>
+            <a:endParaRPr lang="en-US" dirty="0">
+              <a:latin typeface="Courier New" panose="02070309020205020404" pitchFamily="49" charset="0"/>
+              <a:cs typeface="Courier New" panose="02070309020205020404" pitchFamily="49" charset="0"/>
+            </a:endParaRPr>
           </a:p>
         </p:txBody>
       </p:sp>
@@ -16249,20 +16338,20 @@
     </p:spTree>
     <p:extLst>
       <p:ext uri="{BB962C8B-B14F-4D97-AF65-F5344CB8AC3E}">
-        <p14:creationId xmlns:p14="http://schemas.microsoft.com/office/powerpoint/2010/main" val="3376888254"/>
+        <p14:creationId xmlns:p14="http://schemas.microsoft.com/office/powerpoint/2010/main" val="3264818513"/>
       </p:ext>
     </p:extLst>
   </p:cSld>
   <p:clrMapOvr>
     <a:masterClrMapping/>
   </p:clrMapOvr>
-  <mc:AlternateContent xmlns:mc="http://schemas.openxmlformats.org/markup-compatibility/2006" xmlns:p14="http://schemas.microsoft.com/office/powerpoint/2010/main">
-    <mc:Choice Requires="p14">
+  <mc:AlternateContent xmlns:mc="http://schemas.openxmlformats.org/markup-compatibility/2006">
+    <mc:Choice xmlns:p14="http://schemas.microsoft.com/office/powerpoint/2010/main" Requires="p14">
       <p:transition spd="med" p14:dur="700">
         <p:fade/>
       </p:transition>
     </mc:Choice>
-    <mc:Fallback xmlns="">
+    <mc:Fallback>
       <p:transition spd="med">
         <p:fade/>
       </p:transition>
@@ -16272,7 +16361,7 @@
 </file>
 
 <file path=ppt/slides/slide34.xml><?xml version="1.0" encoding="utf-8"?>
-<p:sld xmlns:a="http://schemas.openxmlformats.org/drawingml/2006/main" xmlns:r="http://schemas.openxmlformats.org/officeDocument/2006/relationships" xmlns:p="http://schemas.openxmlformats.org/presentationml/2006/main">
+<p:sld xmlns:a="http://schemas.openxmlformats.org/drawingml/2006/main" xmlns:r="http://schemas.openxmlformats.org/officeDocument/2006/relationships" xmlns:p="http://schemas.openxmlformats.org/presentationml/2006/main" show="0">
   <p:cSld>
     <p:spTree>
       <p:nvGrpSpPr>
@@ -16305,7 +16394,7 @@
           <a:p>
             <a:r>
               <a:rPr lang="en-US" dirty="0"/>
-              <a:t>Simulated robot</a:t>
+              <a:t>NAO-lib</a:t>
             </a:r>
           </a:p>
         </p:txBody>
@@ -16333,76 +16422,109 @@
             <a:pPr lvl="2"/>
             <a:r>
               <a:rPr lang="en-US" dirty="0"/>
-              <a:t>Installing the simulated robot</a:t>
+              <a:t>A custom-built library simplifies many functions of </a:t>
+            </a:r>
+            <a:r>
+              <a:rPr lang="en-US" dirty="0" err="1"/>
+              <a:t>Naoqi</a:t>
+            </a:r>
+            <a:endParaRPr lang="en-US" dirty="0"/>
+          </a:p>
+          <a:p>
+            <a:pPr lvl="2"/>
+            <a:r>
+              <a:rPr lang="en-US" dirty="0"/>
+              <a:t>Meant for NAO, and the </a:t>
+            </a:r>
+            <a:r>
+              <a:rPr lang="en-US" dirty="0" err="1"/>
+              <a:t>naoqi</a:t>
+            </a:r>
+            <a:r>
+              <a:rPr lang="en-US" dirty="0"/>
+              <a:t>-version of NAO</a:t>
+            </a:r>
+          </a:p>
+          <a:p>
+            <a:pPr lvl="2"/>
+            <a:r>
+              <a:rPr lang="en-US" dirty="0"/>
+              <a:t>Latest version will be shared with you</a:t>
             </a:r>
           </a:p>
           <a:p>
             <a:pPr lvl="3"/>
             <a:r>
               <a:rPr lang="en-US" dirty="0"/>
-              <a:t>Run the program naoqi-bin.exe that is installed along with </a:t>
+              <a:t>nao.py includes cv</a:t>
+            </a:r>
+          </a:p>
+          <a:p>
+            <a:pPr lvl="3"/>
+            <a:r>
+              <a:rPr lang="en-US" dirty="0"/>
+              <a:t>nao_nocv.py does not</a:t>
+            </a:r>
+          </a:p>
+          <a:p>
+            <a:pPr lvl="3"/>
+            <a:endParaRPr lang="en-US" dirty="0"/>
+          </a:p>
+          <a:p>
+            <a:pPr lvl="2"/>
+            <a:r>
+              <a:rPr lang="en-US" dirty="0"/>
+              <a:t>Installing </a:t>
             </a:r>
             <a:r>
               <a:rPr lang="en-US" dirty="0" err="1"/>
-              <a:t>Choregraphe</a:t>
-            </a:r>
-            <a:endParaRPr lang="en-US" dirty="0"/>
+              <a:t>nao</a:t>
+            </a:r>
+            <a:r>
+              <a:rPr lang="en-US" dirty="0"/>
+              <a:t>-lib</a:t>
+            </a:r>
           </a:p>
           <a:p>
             <a:pPr lvl="3"/>
             <a:r>
               <a:rPr lang="en-US" dirty="0"/>
-              <a:t>Note your local IP address or use “127.0.0.1”</a:t>
-            </a:r>
+              <a:t>Create a directory with a python file with one line of code</a:t>
+            </a:r>
+          </a:p>
+          <a:p>
+            <a:pPr lvl="4"/>
+            <a:r>
+              <a:rPr lang="en-US" dirty="0"/>
+              <a:t>import </a:t>
+            </a:r>
+            <a:r>
+              <a:rPr lang="en-US" dirty="0" err="1"/>
+              <a:t>nao_nocv</a:t>
+            </a:r>
+            <a:r>
+              <a:rPr lang="en-US" dirty="0"/>
+              <a:t> as </a:t>
+            </a:r>
+            <a:r>
+              <a:rPr lang="en-US" dirty="0" err="1"/>
+              <a:t>nao</a:t>
+            </a:r>
+            <a:endParaRPr lang="en-US" dirty="0"/>
           </a:p>
           <a:p>
             <a:pPr lvl="3"/>
-            <a:endParaRPr lang="en-US" dirty="0"/>
-          </a:p>
-          <a:p>
-            <a:pPr lvl="2"/>
-            <a:r>
-              <a:rPr lang="en-US" dirty="0"/>
-              <a:t>Add the line</a:t>
+            <a:r>
+              <a:rPr lang="en-US" dirty="0"/>
+              <a:t>Copy nao.py or nao_nocv.py in the same directory</a:t>
             </a:r>
           </a:p>
           <a:p>
             <a:pPr lvl="3"/>
             <a:r>
-              <a:rPr lang="en-US" dirty="0" err="1"/>
-              <a:t>Nao.InitProxy</a:t>
-            </a:r>
-            <a:r>
-              <a:rPr lang="en-US" dirty="0"/>
-              <a:t>(“127.0.0.1”, [0])</a:t>
-            </a:r>
-          </a:p>
-          <a:p>
-            <a:pPr lvl="2"/>
-            <a:r>
-              <a:rPr lang="en-US" dirty="0"/>
-              <a:t>If all goes well you are connected to the simulated robot</a:t>
-            </a:r>
-          </a:p>
-          <a:p>
-            <a:pPr lvl="3"/>
-            <a:r>
-              <a:rPr lang="en-US" dirty="0"/>
-              <a:t>You can use Python to move the virtual robot in </a:t>
-            </a:r>
-            <a:r>
-              <a:rPr lang="en-US" dirty="0" err="1"/>
-              <a:t>Choregraphe</a:t>
-            </a:r>
-            <a:endParaRPr lang="en-US" dirty="0"/>
-          </a:p>
-          <a:p>
-            <a:pPr lvl="3"/>
-            <a:endParaRPr lang="en-US" dirty="0"/>
-          </a:p>
-          <a:p>
-            <a:pPr lvl="2"/>
-            <a:endParaRPr lang="en-US" dirty="0"/>
+              <a:rPr lang="en-US" dirty="0"/>
+              <a:t>Press F5 to run and test the program</a:t>
+            </a:r>
           </a:p>
           <a:p>
             <a:pPr lvl="4"/>
@@ -16491,20 +16613,20 @@
     </p:spTree>
     <p:extLst>
       <p:ext uri="{BB962C8B-B14F-4D97-AF65-F5344CB8AC3E}">
-        <p14:creationId xmlns:p14="http://schemas.microsoft.com/office/powerpoint/2010/main" val="1286838151"/>
+        <p14:creationId xmlns:p14="http://schemas.microsoft.com/office/powerpoint/2010/main" val="3376888254"/>
       </p:ext>
     </p:extLst>
   </p:cSld>
   <p:clrMapOvr>
     <a:masterClrMapping/>
   </p:clrMapOvr>
-  <mc:AlternateContent xmlns:mc="http://schemas.openxmlformats.org/markup-compatibility/2006" xmlns:p14="http://schemas.microsoft.com/office/powerpoint/2010/main">
-    <mc:Choice Requires="p14">
+  <mc:AlternateContent xmlns:mc="http://schemas.openxmlformats.org/markup-compatibility/2006">
+    <mc:Choice xmlns:p14="http://schemas.microsoft.com/office/powerpoint/2010/main" Requires="p14">
       <p:transition spd="med" p14:dur="700">
         <p:fade/>
       </p:transition>
     </mc:Choice>
-    <mc:Fallback xmlns="">
+    <mc:Fallback>
       <p:transition spd="med">
         <p:fade/>
       </p:transition>
@@ -16572,15 +16694,11 @@
           <a:bodyPr/>
           <a:lstStyle/>
           <a:p>
-            <a:pPr marL="342900" indent="-342900">
-              <a:buFont typeface="+mj-lt"/>
-              <a:buAutoNum type="arabicPeriod"/>
-            </a:pPr>
-            <a:r>
-              <a:rPr lang="nl-NL" dirty="0" err="1"/>
+            <a:r>
+              <a:rPr lang="nl-NL" b="1" dirty="0" err="1"/>
               <a:t>Choregraphe</a:t>
             </a:r>
-            <a:endParaRPr lang="nl-NL" dirty="0"/>
+            <a:endParaRPr lang="nl-NL" b="1" dirty="0"/>
           </a:p>
           <a:p>
             <a:r>
@@ -16683,63 +16801,107 @@
             </a:r>
             <a:r>
               <a:rPr lang="nl-NL" dirty="0"/>
-              <a:t> “127.0.0.1”</a:t>
-            </a:r>
-          </a:p>
-          <a:p>
-            <a:r>
-              <a:rPr lang="nl-NL" dirty="0"/>
-              <a:t>in </a:t>
+              <a:t> “127.0.0.1”, </a:t>
             </a:r>
             <a:r>
               <a:rPr lang="nl-NL" dirty="0" err="1"/>
-              <a:t>your</a:t>
-            </a:r>
-            <a:r>
-              <a:rPr lang="nl-NL" dirty="0"/>
-              <a:t> program </a:t>
+              <a:t>for</a:t>
+            </a:r>
+            <a:r>
+              <a:rPr lang="nl-NL" dirty="0"/>
+              <a:t> </a:t>
             </a:r>
             <a:r>
               <a:rPr lang="nl-NL" dirty="0" err="1"/>
-              <a:t>add</a:t>
-            </a:r>
-            <a:r>
-              <a:rPr lang="nl-NL" dirty="0"/>
-              <a:t> </a:t>
-            </a:r>
-            <a:r>
-              <a:rPr lang="nl-NL" dirty="0" err="1"/>
-              <a:t>the</a:t>
-            </a:r>
-            <a:r>
-              <a:rPr lang="nl-NL" dirty="0"/>
-              <a:t> line:</a:t>
-            </a:r>
-          </a:p>
-          <a:p>
-            <a:endParaRPr lang="nl-NL" dirty="0"/>
-          </a:p>
-          <a:p>
-            <a:r>
-              <a:rPr lang="nl-NL" dirty="0">
+              <a:t>example</a:t>
+            </a:r>
+            <a:r>
+              <a:rPr lang="nl-NL" dirty="0"/>
+              <a:t>:</a:t>
+            </a:r>
+          </a:p>
+          <a:p>
+            <a:pPr marL="202500" lvl="3" indent="0">
+              <a:buNone/>
+            </a:pPr>
+            <a:r>
+              <a:rPr lang="en-NL" sz="900" dirty="0">
                 <a:latin typeface="Courier New" panose="02070309020205020404" pitchFamily="49" charset="0"/>
                 <a:cs typeface="Courier New" panose="02070309020205020404" pitchFamily="49" charset="0"/>
               </a:rPr>
-              <a:t>	</a:t>
-            </a:r>
-            <a:r>
-              <a:rPr lang="nl-NL" dirty="0" err="1">
+              <a:t>import qi</a:t>
+            </a:r>
+          </a:p>
+          <a:p>
+            <a:pPr marL="202500" lvl="3" indent="0">
+              <a:buNone/>
+            </a:pPr>
+            <a:r>
+              <a:rPr lang="en-NL" sz="900" dirty="0">
                 <a:latin typeface="Courier New" panose="02070309020205020404" pitchFamily="49" charset="0"/>
                 <a:cs typeface="Courier New" panose="02070309020205020404" pitchFamily="49" charset="0"/>
               </a:rPr>
-              <a:t>nao.InitProxy</a:t>
-            </a:r>
-            <a:r>
-              <a:rPr lang="nl-NL" dirty="0">
+              <a:t>print(qi.__version__)  # 3.1.5</a:t>
+            </a:r>
+          </a:p>
+          <a:p>
+            <a:pPr marL="202500" lvl="3" indent="0">
+              <a:buNone/>
+            </a:pPr>
+            <a:r>
+              <a:rPr lang="en-NL" sz="900" dirty="0">
                 <a:latin typeface="Courier New" panose="02070309020205020404" pitchFamily="49" charset="0"/>
                 <a:cs typeface="Courier New" panose="02070309020205020404" pitchFamily="49" charset="0"/>
               </a:rPr>
-              <a:t>(“127.0.0.1”, [0])</a:t>
+              <a:t> </a:t>
+            </a:r>
+          </a:p>
+          <a:p>
+            <a:pPr marL="202500" lvl="3" indent="0">
+              <a:buNone/>
+            </a:pPr>
+            <a:r>
+              <a:rPr lang="en-NL" sz="900" dirty="0">
+                <a:latin typeface="Courier New" panose="02070309020205020404" pitchFamily="49" charset="0"/>
+                <a:cs typeface="Courier New" panose="02070309020205020404" pitchFamily="49" charset="0"/>
+              </a:rPr>
+              <a:t>session = qi.Session()</a:t>
+            </a:r>
+          </a:p>
+          <a:p>
+            <a:pPr marL="202500" lvl="3" indent="0">
+              <a:buNone/>
+            </a:pPr>
+            <a:r>
+              <a:rPr lang="en-NL" sz="900" dirty="0">
+                <a:latin typeface="Courier New" panose="02070309020205020404" pitchFamily="49" charset="0"/>
+                <a:cs typeface="Courier New" panose="02070309020205020404" pitchFamily="49" charset="0"/>
+              </a:rPr>
+              <a:t>session.connect("tcp://nao.local:9559")</a:t>
+            </a:r>
+          </a:p>
+          <a:p>
+            <a:pPr marL="202500" lvl="3" indent="0">
+              <a:buNone/>
+            </a:pPr>
+            <a:r>
+              <a:rPr lang="en-NL" sz="900" dirty="0">
+                <a:latin typeface="Courier New" panose="02070309020205020404" pitchFamily="49" charset="0"/>
+                <a:cs typeface="Courier New" panose="02070309020205020404" pitchFamily="49" charset="0"/>
+              </a:rPr>
+              <a:t>tts = session.service("ALTextToSpeech")</a:t>
+            </a:r>
+          </a:p>
+          <a:p>
+            <a:pPr marL="202500" lvl="3" indent="0">
+              <a:buNone/>
+            </a:pPr>
+            <a:r>
+              <a:rPr lang="en-NL" sz="900" dirty="0">
+                <a:latin typeface="Courier New" panose="02070309020205020404" pitchFamily="49" charset="0"/>
+                <a:cs typeface="Courier New" panose="02070309020205020404" pitchFamily="49" charset="0"/>
+              </a:rPr>
+              <a:t>tts.say("Hello from Windows!")</a:t>
             </a:r>
           </a:p>
           <a:p>
@@ -16834,7 +16996,7 @@
       </p:grpSpPr>
       <p:sp>
         <p:nvSpPr>
-          <p:cNvPr id="2" name="Title 1"/>
+          <p:cNvPr id="2" name="Titel 1"/>
           <p:cNvSpPr>
             <a:spLocks noGrp="1"/>
           </p:cNvSpPr>
@@ -16848,20 +17010,15 @@
           <a:lstStyle/>
           <a:p>
             <a:r>
-              <a:rPr lang="nl-NL" dirty="0" err="1"/>
-              <a:t>Simulated</a:t>
-            </a:r>
-            <a:r>
-              <a:rPr lang="nl-NL" dirty="0"/>
-              <a:t> robot</a:t>
-            </a:r>
-            <a:endParaRPr lang="en-US" dirty="0"/>
-          </a:p>
-        </p:txBody>
-      </p:sp>
-      <p:sp>
-        <p:nvSpPr>
-          <p:cNvPr id="3" name="Content Placeholder 2"/>
+              <a:rPr lang="en-US" dirty="0"/>
+              <a:t>Simulated robot</a:t>
+            </a:r>
+          </a:p>
+        </p:txBody>
+      </p:sp>
+      <p:sp>
+        <p:nvSpPr>
+          <p:cNvPr id="3" name="Tijdelijke aanduiding voor inhoud 2"/>
           <p:cNvSpPr>
             <a:spLocks noGrp="1"/>
           </p:cNvSpPr>
@@ -16869,291 +17026,125 @@
             <p:ph idx="1"/>
           </p:nvPr>
         </p:nvSpPr>
+        <p:spPr>
+          <a:xfrm>
+            <a:off x="610099" y="1073150"/>
+            <a:ext cx="7825978" cy="3496469"/>
+          </a:xfrm>
+        </p:spPr>
+        <p:txBody>
+          <a:bodyPr/>
+          <a:lstStyle/>
+          <a:p>
+            <a:pPr lvl="2"/>
+            <a:r>
+              <a:rPr lang="en-US" dirty="0"/>
+              <a:t>It is also possible to use a dedicated program for the simulated robot:</a:t>
+            </a:r>
+          </a:p>
+          <a:p>
+            <a:pPr lvl="3"/>
+            <a:r>
+              <a:rPr lang="en-US" dirty="0"/>
+              <a:t>Run the program naoqi-bin.exe that is installed along with </a:t>
+            </a:r>
+            <a:r>
+              <a:rPr lang="en-US" dirty="0" err="1"/>
+              <a:t>Choregraphe</a:t>
+            </a:r>
+            <a:endParaRPr lang="en-US" dirty="0"/>
+          </a:p>
+          <a:p>
+            <a:pPr lvl="3"/>
+            <a:r>
+              <a:rPr lang="en-US" dirty="0"/>
+              <a:t>Note your local IP address or use “127.0.0.1”</a:t>
+            </a:r>
+          </a:p>
+          <a:p>
+            <a:pPr lvl="2"/>
+            <a:endParaRPr lang="en-US" dirty="0"/>
+          </a:p>
+          <a:p>
+            <a:pPr lvl="4"/>
+            <a:endParaRPr lang="en-US" dirty="0"/>
+          </a:p>
+          <a:p>
+            <a:pPr marL="0" lvl="2" indent="0">
+              <a:buNone/>
+            </a:pPr>
+            <a:endParaRPr lang="en-US" dirty="0"/>
+          </a:p>
+          <a:p>
+            <a:pPr marL="0" lvl="2" indent="0">
+              <a:buNone/>
+            </a:pPr>
+            <a:endParaRPr lang="en-US" dirty="0"/>
+          </a:p>
+          <a:p>
+            <a:pPr marL="0" lvl="2" indent="0">
+              <a:buNone/>
+            </a:pPr>
+            <a:endParaRPr lang="en-US" dirty="0"/>
+          </a:p>
+          <a:p>
+            <a:pPr lvl="2"/>
+            <a:endParaRPr lang="en-US" dirty="0"/>
+          </a:p>
+          <a:p>
+            <a:pPr lvl="2"/>
+            <a:endParaRPr lang="en-US" dirty="0"/>
+          </a:p>
+          <a:p>
+            <a:pPr marL="0" lvl="2" indent="0">
+              <a:buNone/>
+            </a:pPr>
+            <a:endParaRPr lang="en-US" dirty="0"/>
+          </a:p>
+        </p:txBody>
+      </p:sp>
+      <p:sp>
+        <p:nvSpPr>
+          <p:cNvPr id="4" name="Tijdelijke aanduiding voor voettekst 3"/>
+          <p:cNvSpPr>
+            <a:spLocks noGrp="1"/>
+          </p:cNvSpPr>
+          <p:nvPr>
+            <p:ph type="ftr" sz="quarter" idx="11"/>
+          </p:nvPr>
+        </p:nvSpPr>
         <p:spPr/>
         <p:txBody>
           <a:bodyPr/>
           <a:lstStyle/>
           <a:p>
-            <a:pPr marL="342900" indent="-342900">
-              <a:buFont typeface="+mj-lt"/>
-              <a:buAutoNum type="arabicPeriod" startAt="2"/>
-            </a:pPr>
-            <a:r>
-              <a:rPr lang="nl-NL" dirty="0" err="1"/>
-              <a:t>Webots</a:t>
-            </a:r>
-            <a:endParaRPr lang="nl-NL" dirty="0"/>
-          </a:p>
-          <a:p>
-            <a:r>
-              <a:rPr lang="nl-NL" dirty="0"/>
-              <a:t>Run </a:t>
-            </a:r>
-            <a:r>
-              <a:rPr lang="nl-NL" dirty="0" err="1"/>
-              <a:t>the</a:t>
-            </a:r>
-            <a:r>
-              <a:rPr lang="nl-NL" dirty="0"/>
-              <a:t> </a:t>
-            </a:r>
-            <a:r>
-              <a:rPr lang="nl-NL" dirty="0" err="1"/>
-              <a:t>webots</a:t>
-            </a:r>
-            <a:r>
-              <a:rPr lang="nl-NL" dirty="0"/>
-              <a:t> program</a:t>
-            </a:r>
-          </a:p>
-          <a:p>
-            <a:r>
-              <a:rPr lang="nl-NL" dirty="0"/>
-              <a:t>Download </a:t>
-            </a:r>
-            <a:r>
-              <a:rPr lang="nl-NL" dirty="0" err="1"/>
-              <a:t>the</a:t>
-            </a:r>
-            <a:r>
-              <a:rPr lang="nl-NL" dirty="0"/>
-              <a:t> </a:t>
-            </a:r>
-            <a:r>
-              <a:rPr lang="nl-NL" dirty="0" err="1"/>
-              <a:t>naoqisim</a:t>
-            </a:r>
-            <a:r>
-              <a:rPr lang="nl-NL" dirty="0"/>
-              <a:t> project </a:t>
-            </a:r>
-            <a:r>
-              <a:rPr lang="nl-NL" dirty="0" err="1"/>
-              <a:t>from</a:t>
-            </a:r>
-            <a:r>
-              <a:rPr lang="nl-NL" dirty="0"/>
-              <a:t> canvas/…</a:t>
-            </a:r>
-          </a:p>
-          <a:p>
-            <a:r>
-              <a:rPr lang="nl-NL" dirty="0"/>
-              <a:t>Accept acces </a:t>
-            </a:r>
-            <a:r>
-              <a:rPr lang="nl-NL" dirty="0" err="1"/>
-              <a:t>to</a:t>
-            </a:r>
-            <a:r>
-              <a:rPr lang="nl-NL" dirty="0"/>
-              <a:t> private </a:t>
-            </a:r>
-            <a:r>
-              <a:rPr lang="nl-NL" dirty="0" err="1"/>
-              <a:t>and</a:t>
-            </a:r>
-            <a:r>
-              <a:rPr lang="nl-NL" dirty="0"/>
-              <a:t> domain </a:t>
-            </a:r>
-            <a:r>
-              <a:rPr lang="nl-NL" dirty="0" err="1"/>
-              <a:t>networks</a:t>
-            </a:r>
-            <a:endParaRPr lang="nl-NL" dirty="0"/>
-          </a:p>
-          <a:p>
-            <a:r>
-              <a:rPr lang="nl-NL" dirty="0"/>
-              <a:t>Open sample </a:t>
-            </a:r>
-            <a:r>
-              <a:rPr lang="nl-NL" dirty="0" err="1"/>
-              <a:t>world</a:t>
-            </a:r>
-            <a:r>
-              <a:rPr lang="nl-NL" dirty="0"/>
-              <a:t> “</a:t>
-            </a:r>
-            <a:r>
-              <a:rPr lang="nl-NL" dirty="0" err="1"/>
-              <a:t>nao_indoors.wbt</a:t>
-            </a:r>
-            <a:r>
-              <a:rPr lang="nl-NL" dirty="0"/>
-              <a:t>” </a:t>
-            </a:r>
-            <a:r>
-              <a:rPr lang="nl-NL" dirty="0" err="1"/>
-              <a:t>from</a:t>
-            </a:r>
-            <a:r>
-              <a:rPr lang="nl-NL" dirty="0"/>
-              <a:t> </a:t>
-            </a:r>
-            <a:r>
-              <a:rPr lang="nl-NL" dirty="0" err="1"/>
-              <a:t>downloaded</a:t>
-            </a:r>
-            <a:r>
-              <a:rPr lang="nl-NL" dirty="0"/>
-              <a:t> project </a:t>
-            </a:r>
-            <a:r>
-              <a:rPr lang="nl-NL" dirty="0" err="1"/>
-              <a:t>location</a:t>
-            </a:r>
-            <a:endParaRPr lang="nl-NL" dirty="0"/>
-          </a:p>
-          <a:p>
-            <a:endParaRPr lang="nl-NL" dirty="0"/>
-          </a:p>
-          <a:p>
-            <a:r>
-              <a:rPr lang="nl-NL" dirty="0" err="1"/>
-              <a:t>Note</a:t>
-            </a:r>
-            <a:r>
-              <a:rPr lang="nl-NL" dirty="0"/>
-              <a:t> </a:t>
-            </a:r>
-            <a:r>
-              <a:rPr lang="nl-NL" dirty="0" err="1"/>
-              <a:t>your</a:t>
-            </a:r>
-            <a:r>
-              <a:rPr lang="nl-NL" dirty="0"/>
-              <a:t> </a:t>
-            </a:r>
-            <a:r>
-              <a:rPr lang="nl-NL" dirty="0" err="1"/>
-              <a:t>local</a:t>
-            </a:r>
-            <a:r>
-              <a:rPr lang="nl-NL" dirty="0"/>
-              <a:t> IP </a:t>
-            </a:r>
-            <a:r>
-              <a:rPr lang="nl-NL" dirty="0" err="1"/>
-              <a:t>address</a:t>
-            </a:r>
-            <a:r>
-              <a:rPr lang="nl-NL" dirty="0"/>
-              <a:t> or </a:t>
-            </a:r>
-            <a:r>
-              <a:rPr lang="nl-NL" dirty="0" err="1"/>
-              <a:t>use</a:t>
-            </a:r>
-            <a:r>
-              <a:rPr lang="nl-NL" dirty="0"/>
-              <a:t> “127.0.0.1”</a:t>
-            </a:r>
-          </a:p>
-          <a:p>
-            <a:r>
-              <a:rPr lang="nl-NL" dirty="0"/>
-              <a:t>in </a:t>
-            </a:r>
-            <a:r>
-              <a:rPr lang="nl-NL" dirty="0" err="1"/>
-              <a:t>your</a:t>
-            </a:r>
-            <a:r>
-              <a:rPr lang="nl-NL" dirty="0"/>
-              <a:t> program </a:t>
-            </a:r>
-            <a:r>
-              <a:rPr lang="nl-NL" dirty="0" err="1"/>
-              <a:t>add</a:t>
-            </a:r>
-            <a:r>
-              <a:rPr lang="nl-NL" dirty="0"/>
-              <a:t> </a:t>
-            </a:r>
-            <a:r>
-              <a:rPr lang="nl-NL" dirty="0" err="1"/>
-              <a:t>the</a:t>
-            </a:r>
-            <a:r>
-              <a:rPr lang="nl-NL" dirty="0"/>
-              <a:t> line:</a:t>
-            </a:r>
-          </a:p>
-          <a:p>
-            <a:endParaRPr lang="nl-NL" dirty="0">
-              <a:latin typeface="Courier New" panose="02070309020205020404" pitchFamily="49" charset="0"/>
-              <a:cs typeface="Courier New" panose="02070309020205020404" pitchFamily="49" charset="0"/>
-            </a:endParaRPr>
-          </a:p>
-          <a:p>
-            <a:r>
-              <a:rPr lang="nl-NL" dirty="0">
-                <a:latin typeface="Courier New" panose="02070309020205020404" pitchFamily="49" charset="0"/>
-                <a:cs typeface="Courier New" panose="02070309020205020404" pitchFamily="49" charset="0"/>
-              </a:rPr>
-              <a:t>	</a:t>
-            </a:r>
-            <a:r>
-              <a:rPr lang="nl-NL" dirty="0" err="1">
-                <a:latin typeface="Courier New" panose="02070309020205020404" pitchFamily="49" charset="0"/>
-                <a:cs typeface="Courier New" panose="02070309020205020404" pitchFamily="49" charset="0"/>
-              </a:rPr>
-              <a:t>nao.InitProxy</a:t>
-            </a:r>
-            <a:r>
-              <a:rPr lang="nl-NL" dirty="0">
-                <a:latin typeface="Courier New" panose="02070309020205020404" pitchFamily="49" charset="0"/>
-                <a:cs typeface="Courier New" panose="02070309020205020404" pitchFamily="49" charset="0"/>
-              </a:rPr>
-              <a:t>(“127.0.0.1”, [0])</a:t>
-            </a:r>
-          </a:p>
-          <a:p>
-            <a:endParaRPr lang="nl-NL" dirty="0"/>
-          </a:p>
-          <a:p>
-            <a:r>
-              <a:rPr lang="nl-NL" dirty="0" err="1"/>
-              <a:t>If</a:t>
-            </a:r>
-            <a:r>
-              <a:rPr lang="nl-NL" dirty="0"/>
-              <a:t> all </a:t>
-            </a:r>
-            <a:r>
-              <a:rPr lang="nl-NL" dirty="0" err="1"/>
-              <a:t>goes</a:t>
-            </a:r>
-            <a:r>
-              <a:rPr lang="nl-NL" dirty="0"/>
-              <a:t> well </a:t>
-            </a:r>
-            <a:r>
-              <a:rPr lang="nl-NL" dirty="0" err="1"/>
-              <a:t>you</a:t>
-            </a:r>
-            <a:r>
-              <a:rPr lang="nl-NL" dirty="0"/>
-              <a:t> are </a:t>
-            </a:r>
-            <a:r>
-              <a:rPr lang="nl-NL" dirty="0" err="1"/>
-              <a:t>connected</a:t>
-            </a:r>
-            <a:r>
-              <a:rPr lang="nl-NL" dirty="0"/>
-              <a:t> to the </a:t>
-            </a:r>
-            <a:r>
-              <a:rPr lang="nl-NL" dirty="0" err="1"/>
-              <a:t>simulated</a:t>
-            </a:r>
-            <a:r>
-              <a:rPr lang="nl-NL" dirty="0"/>
-              <a:t> robot</a:t>
-            </a:r>
+            <a:r>
+              <a:rPr lang="en-US" dirty="0"/>
+              <a:t>NAO and Pepper Tutorial</a:t>
+            </a:r>
+          </a:p>
+        </p:txBody>
+      </p:sp>
+      <p:sp>
+        <p:nvSpPr>
+          <p:cNvPr id="5" name="Tijdelijke aanduiding voor dianummer 4"/>
+          <p:cNvSpPr>
+            <a:spLocks noGrp="1"/>
+          </p:cNvSpPr>
+          <p:nvPr>
+            <p:ph type="sldNum" sz="quarter" idx="12"/>
+          </p:nvPr>
+        </p:nvSpPr>
+        <p:spPr/>
+        <p:txBody>
+          <a:bodyPr/>
+          <a:lstStyle/>
+          <a:p>
+            <a:fld id="{B7CEC10D-CD46-426F-915E-6C78530279CB}" type="slidenum">
+              <a:rPr lang="en-US" smtClean="0"/>
+              <a:pPr/>
+              <a:t>36</a:t>
+            </a:fld>
             <a:endParaRPr lang="en-US" dirty="0"/>
           </a:p>
         </p:txBody>
@@ -17161,7 +17152,7 @@
     </p:spTree>
     <p:extLst>
       <p:ext uri="{BB962C8B-B14F-4D97-AF65-F5344CB8AC3E}">
-        <p14:creationId xmlns:p14="http://schemas.microsoft.com/office/powerpoint/2010/main" val="3201636391"/>
+        <p14:creationId xmlns:p14="http://schemas.microsoft.com/office/powerpoint/2010/main" val="1286838151"/>
       </p:ext>
     </p:extLst>
   </p:cSld>
@@ -17184,7 +17175,7 @@
 </file>
 
 <file path=ppt/slides/slide37.xml><?xml version="1.0" encoding="utf-8"?>
-<p:sld xmlns:a="http://schemas.openxmlformats.org/drawingml/2006/main" xmlns:r="http://schemas.openxmlformats.org/officeDocument/2006/relationships" xmlns:p="http://schemas.openxmlformats.org/presentationml/2006/main">
+<p:sld xmlns:a="http://schemas.openxmlformats.org/drawingml/2006/main" xmlns:r="http://schemas.openxmlformats.org/officeDocument/2006/relationships" xmlns:p="http://schemas.openxmlformats.org/presentationml/2006/main" show="0">
   <p:cSld>
     <p:spTree>
       <p:nvGrpSpPr>
@@ -17216,8 +17207,12 @@
           <a:lstStyle/>
           <a:p>
             <a:r>
-              <a:rPr lang="nl-NL" dirty="0"/>
-              <a:t>Real robot</a:t>
+              <a:rPr lang="nl-NL" dirty="0" err="1"/>
+              <a:t>Simulated</a:t>
+            </a:r>
+            <a:r>
+              <a:rPr lang="nl-NL" dirty="0"/>
+              <a:t> robot</a:t>
             </a:r>
             <a:endParaRPr lang="en-US" dirty="0"/>
           </a:p>
@@ -17238,9 +17233,20 @@
           <a:bodyPr/>
           <a:lstStyle/>
           <a:p>
-            <a:r>
-              <a:rPr lang="nl-NL" dirty="0"/>
-              <a:t>Connect </a:t>
+            <a:pPr marL="342900" indent="-342900">
+              <a:buFont typeface="+mj-lt"/>
+              <a:buAutoNum type="arabicPeriod" startAt="2"/>
+            </a:pPr>
+            <a:r>
+              <a:rPr lang="nl-NL" dirty="0" err="1"/>
+              <a:t>Webots</a:t>
+            </a:r>
+            <a:endParaRPr lang="nl-NL" dirty="0"/>
+          </a:p>
+          <a:p>
+            <a:r>
+              <a:rPr lang="nl-NL" dirty="0"/>
+              <a:t>Run </a:t>
             </a:r>
             <a:r>
               <a:rPr lang="nl-NL" dirty="0" err="1"/>
@@ -17248,13 +17254,21 @@
             </a:r>
             <a:r>
               <a:rPr lang="nl-NL" dirty="0"/>
-              <a:t> router</a:t>
-            </a:r>
-          </a:p>
-          <a:p>
-            <a:r>
-              <a:rPr lang="nl-NL" dirty="0"/>
-              <a:t>Start </a:t>
+              <a:t> </a:t>
+            </a:r>
+            <a:r>
+              <a:rPr lang="nl-NL" dirty="0" err="1"/>
+              <a:t>webots</a:t>
+            </a:r>
+            <a:r>
+              <a:rPr lang="nl-NL" dirty="0"/>
+              <a:t> program</a:t>
+            </a:r>
+          </a:p>
+          <a:p>
+            <a:r>
+              <a:rPr lang="nl-NL" dirty="0"/>
+              <a:t>Download </a:t>
             </a:r>
             <a:r>
               <a:rPr lang="nl-NL" dirty="0" err="1"/>
@@ -17262,15 +17276,160 @@
             </a:r>
             <a:r>
               <a:rPr lang="nl-NL" dirty="0"/>
-              <a:t> robot </a:t>
+              <a:t> </a:t>
             </a:r>
             <a:r>
               <a:rPr lang="nl-NL" dirty="0" err="1"/>
-              <a:t>by</a:t>
-            </a:r>
-            <a:r>
-              <a:rPr lang="nl-NL" dirty="0"/>
-              <a:t> pressing </a:t>
+              <a:t>naoqisim</a:t>
+            </a:r>
+            <a:r>
+              <a:rPr lang="nl-NL" dirty="0"/>
+              <a:t> project </a:t>
+            </a:r>
+            <a:r>
+              <a:rPr lang="nl-NL" dirty="0" err="1"/>
+              <a:t>from</a:t>
+            </a:r>
+            <a:r>
+              <a:rPr lang="nl-NL" dirty="0"/>
+              <a:t> canvas/…</a:t>
+            </a:r>
+          </a:p>
+          <a:p>
+            <a:r>
+              <a:rPr lang="nl-NL" dirty="0"/>
+              <a:t>Accept acces </a:t>
+            </a:r>
+            <a:r>
+              <a:rPr lang="nl-NL" dirty="0" err="1"/>
+              <a:t>to</a:t>
+            </a:r>
+            <a:r>
+              <a:rPr lang="nl-NL" dirty="0"/>
+              <a:t> private </a:t>
+            </a:r>
+            <a:r>
+              <a:rPr lang="nl-NL" dirty="0" err="1"/>
+              <a:t>and</a:t>
+            </a:r>
+            <a:r>
+              <a:rPr lang="nl-NL" dirty="0"/>
+              <a:t> domain </a:t>
+            </a:r>
+            <a:r>
+              <a:rPr lang="nl-NL" dirty="0" err="1"/>
+              <a:t>networks</a:t>
+            </a:r>
+            <a:endParaRPr lang="nl-NL" dirty="0"/>
+          </a:p>
+          <a:p>
+            <a:r>
+              <a:rPr lang="nl-NL" dirty="0"/>
+              <a:t>Open sample </a:t>
+            </a:r>
+            <a:r>
+              <a:rPr lang="nl-NL" dirty="0" err="1"/>
+              <a:t>world</a:t>
+            </a:r>
+            <a:r>
+              <a:rPr lang="nl-NL" dirty="0"/>
+              <a:t> “</a:t>
+            </a:r>
+            <a:r>
+              <a:rPr lang="nl-NL" dirty="0" err="1"/>
+              <a:t>nao_indoors.wbt</a:t>
+            </a:r>
+            <a:r>
+              <a:rPr lang="nl-NL" dirty="0"/>
+              <a:t>” </a:t>
+            </a:r>
+            <a:r>
+              <a:rPr lang="nl-NL" dirty="0" err="1"/>
+              <a:t>from</a:t>
+            </a:r>
+            <a:r>
+              <a:rPr lang="nl-NL" dirty="0"/>
+              <a:t> </a:t>
+            </a:r>
+            <a:r>
+              <a:rPr lang="nl-NL" dirty="0" err="1"/>
+              <a:t>downloaded</a:t>
+            </a:r>
+            <a:r>
+              <a:rPr lang="nl-NL" dirty="0"/>
+              <a:t> project </a:t>
+            </a:r>
+            <a:r>
+              <a:rPr lang="nl-NL" dirty="0" err="1"/>
+              <a:t>location</a:t>
+            </a:r>
+            <a:endParaRPr lang="nl-NL" dirty="0"/>
+          </a:p>
+          <a:p>
+            <a:endParaRPr lang="nl-NL" dirty="0"/>
+          </a:p>
+          <a:p>
+            <a:r>
+              <a:rPr lang="nl-NL" dirty="0" err="1"/>
+              <a:t>Note</a:t>
+            </a:r>
+            <a:r>
+              <a:rPr lang="nl-NL" dirty="0"/>
+              <a:t> </a:t>
+            </a:r>
+            <a:r>
+              <a:rPr lang="nl-NL" dirty="0" err="1"/>
+              <a:t>your</a:t>
+            </a:r>
+            <a:r>
+              <a:rPr lang="nl-NL" dirty="0"/>
+              <a:t> </a:t>
+            </a:r>
+            <a:r>
+              <a:rPr lang="nl-NL" dirty="0" err="1"/>
+              <a:t>local</a:t>
+            </a:r>
+            <a:r>
+              <a:rPr lang="nl-NL" dirty="0"/>
+              <a:t> IP </a:t>
+            </a:r>
+            <a:r>
+              <a:rPr lang="nl-NL" dirty="0" err="1"/>
+              <a:t>address</a:t>
+            </a:r>
+            <a:r>
+              <a:rPr lang="nl-NL" dirty="0"/>
+              <a:t> or </a:t>
+            </a:r>
+            <a:r>
+              <a:rPr lang="nl-NL" dirty="0" err="1"/>
+              <a:t>use</a:t>
+            </a:r>
+            <a:r>
+              <a:rPr lang="nl-NL" dirty="0"/>
+              <a:t> “127.0.0.1”</a:t>
+            </a:r>
+          </a:p>
+          <a:p>
+            <a:r>
+              <a:rPr lang="nl-NL" dirty="0"/>
+              <a:t>in </a:t>
+            </a:r>
+            <a:r>
+              <a:rPr lang="nl-NL" dirty="0" err="1"/>
+              <a:t>your</a:t>
+            </a:r>
+            <a:r>
+              <a:rPr lang="nl-NL" dirty="0"/>
+              <a:t> program </a:t>
+            </a:r>
+            <a:r>
+              <a:rPr lang="nl-NL" dirty="0" err="1"/>
+              <a:t>add</a:t>
+            </a:r>
+            <a:r>
+              <a:rPr lang="nl-NL" dirty="0"/>
+              <a:t> </a:t>
             </a:r>
             <a:r>
               <a:rPr lang="nl-NL" dirty="0" err="1"/>
@@ -17278,269 +17437,48 @@
             </a:r>
             <a:r>
               <a:rPr lang="nl-NL" dirty="0"/>
-              <a:t> </a:t>
-            </a:r>
-            <a:r>
-              <a:rPr lang="nl-NL" dirty="0" err="1"/>
-              <a:t>chest</a:t>
-            </a:r>
-            <a:r>
-              <a:rPr lang="nl-NL" dirty="0"/>
-              <a:t> button</a:t>
-            </a:r>
-          </a:p>
-          <a:p>
-            <a:r>
-              <a:rPr lang="nl-NL" dirty="0"/>
-              <a:t>Press </a:t>
-            </a:r>
-            <a:r>
-              <a:rPr lang="nl-NL" dirty="0" err="1"/>
-              <a:t>once</a:t>
-            </a:r>
-            <a:r>
-              <a:rPr lang="nl-NL" dirty="0"/>
-              <a:t> on </a:t>
-            </a:r>
-            <a:r>
-              <a:rPr lang="nl-NL" dirty="0" err="1"/>
-              <a:t>the</a:t>
-            </a:r>
-            <a:r>
-              <a:rPr lang="nl-NL" dirty="0"/>
-              <a:t> </a:t>
-            </a:r>
-            <a:r>
-              <a:rPr lang="nl-NL" dirty="0" err="1"/>
-              <a:t>chest</a:t>
-            </a:r>
-            <a:r>
-              <a:rPr lang="nl-NL" dirty="0"/>
-              <a:t> button </a:t>
-            </a:r>
-            <a:r>
-              <a:rPr lang="nl-NL" dirty="0" err="1"/>
-              <a:t>to</a:t>
-            </a:r>
-            <a:r>
-              <a:rPr lang="nl-NL" dirty="0"/>
-              <a:t> </a:t>
-            </a:r>
-            <a:r>
-              <a:rPr lang="nl-NL" dirty="0" err="1"/>
-              <a:t>hear</a:t>
-            </a:r>
-            <a:r>
-              <a:rPr lang="nl-NL" dirty="0"/>
-              <a:t> </a:t>
-            </a:r>
-            <a:r>
-              <a:rPr lang="nl-NL" dirty="0" err="1"/>
-              <a:t>Nao</a:t>
-            </a:r>
-            <a:r>
-              <a:rPr lang="nl-NL" dirty="0"/>
-              <a:t> say </a:t>
-            </a:r>
-            <a:r>
-              <a:rPr lang="nl-NL" dirty="0" err="1"/>
-              <a:t>its</a:t>
-            </a:r>
-            <a:r>
-              <a:rPr lang="nl-NL" dirty="0"/>
-              <a:t> </a:t>
-            </a:r>
-            <a:r>
-              <a:rPr lang="nl-NL" dirty="0" err="1"/>
-              <a:t>own</a:t>
-            </a:r>
-            <a:r>
-              <a:rPr lang="nl-NL" dirty="0"/>
-              <a:t> </a:t>
-            </a:r>
-            <a:r>
-              <a:rPr lang="nl-NL" dirty="0" err="1"/>
-              <a:t>ip</a:t>
-            </a:r>
-            <a:r>
-              <a:rPr lang="nl-NL" dirty="0"/>
-              <a:t> </a:t>
-            </a:r>
-            <a:r>
-              <a:rPr lang="nl-NL" dirty="0" err="1"/>
-              <a:t>address</a:t>
-            </a:r>
-            <a:r>
-              <a:rPr lang="nl-NL" dirty="0"/>
-              <a:t>. </a:t>
-            </a:r>
+              <a:t> line:</a:t>
+            </a:r>
+          </a:p>
+          <a:p>
+            <a:endParaRPr lang="nl-NL" dirty="0">
+              <a:latin typeface="Courier New" panose="02070309020205020404" pitchFamily="49" charset="0"/>
+              <a:cs typeface="Courier New" panose="02070309020205020404" pitchFamily="49" charset="0"/>
+            </a:endParaRPr>
+          </a:p>
+          <a:p>
+            <a:r>
+              <a:rPr lang="nl-NL" dirty="0">
+                <a:latin typeface="Courier New" panose="02070309020205020404" pitchFamily="49" charset="0"/>
+                <a:cs typeface="Courier New" panose="02070309020205020404" pitchFamily="49" charset="0"/>
+              </a:rPr>
+              <a:t>	</a:t>
+            </a:r>
+            <a:r>
+              <a:rPr lang="nl-NL" dirty="0" err="1">
+                <a:latin typeface="Courier New" panose="02070309020205020404" pitchFamily="49" charset="0"/>
+                <a:cs typeface="Courier New" panose="02070309020205020404" pitchFamily="49" charset="0"/>
+              </a:rPr>
+              <a:t>nao.InitProxy</a:t>
+            </a:r>
+            <a:r>
+              <a:rPr lang="nl-NL" dirty="0">
+                <a:latin typeface="Courier New" panose="02070309020205020404" pitchFamily="49" charset="0"/>
+                <a:cs typeface="Courier New" panose="02070309020205020404" pitchFamily="49" charset="0"/>
+              </a:rPr>
+              <a:t>(“127.0.0.1”, [0])</a:t>
+            </a:r>
+          </a:p>
+          <a:p>
+            <a:endParaRPr lang="nl-NL" dirty="0"/>
+          </a:p>
+          <a:p>
             <a:r>
               <a:rPr lang="nl-NL" dirty="0" err="1"/>
               <a:t>If</a:t>
             </a:r>
             <a:r>
               <a:rPr lang="nl-NL" dirty="0"/>
-              <a:t> </a:t>
-            </a:r>
-            <a:r>
-              <a:rPr lang="nl-NL" dirty="0" err="1"/>
-              <a:t>it</a:t>
-            </a:r>
-            <a:r>
-              <a:rPr lang="nl-NL" dirty="0"/>
-              <a:t> </a:t>
-            </a:r>
-            <a:r>
-              <a:rPr lang="nl-NL" dirty="0" err="1"/>
-              <a:t>cannot</a:t>
-            </a:r>
-            <a:r>
-              <a:rPr lang="nl-NL" dirty="0"/>
-              <a:t> </a:t>
-            </a:r>
-            <a:r>
-              <a:rPr lang="nl-NL" dirty="0" err="1"/>
-              <a:t>connect</a:t>
-            </a:r>
-            <a:r>
-              <a:rPr lang="nl-NL" dirty="0"/>
-              <a:t> make </a:t>
-            </a:r>
-            <a:r>
-              <a:rPr lang="nl-NL" dirty="0" err="1"/>
-              <a:t>sure</a:t>
-            </a:r>
-            <a:r>
-              <a:rPr lang="nl-NL" dirty="0"/>
-              <a:t> </a:t>
-            </a:r>
-            <a:r>
-              <a:rPr lang="nl-NL" dirty="0" err="1"/>
-              <a:t>the</a:t>
-            </a:r>
-            <a:r>
-              <a:rPr lang="nl-NL" dirty="0"/>
-              <a:t> </a:t>
-            </a:r>
-            <a:r>
-              <a:rPr lang="nl-NL" dirty="0" err="1"/>
-              <a:t>wireless</a:t>
-            </a:r>
-            <a:r>
-              <a:rPr lang="nl-NL" dirty="0"/>
-              <a:t> </a:t>
-            </a:r>
-            <a:r>
-              <a:rPr lang="nl-NL" dirty="0" err="1"/>
-              <a:t>configuration</a:t>
-            </a:r>
-            <a:r>
-              <a:rPr lang="nl-NL" dirty="0"/>
-              <a:t> is ok (</a:t>
-            </a:r>
-            <a:r>
-              <a:rPr lang="nl-NL" dirty="0" err="1"/>
-              <a:t>ask</a:t>
-            </a:r>
-            <a:r>
-              <a:rPr lang="nl-NL" dirty="0"/>
-              <a:t> help)</a:t>
-            </a:r>
-          </a:p>
-          <a:p>
-            <a:endParaRPr lang="nl-NL" dirty="0"/>
-          </a:p>
-          <a:p>
-            <a:r>
-              <a:rPr lang="nl-NL" dirty="0" err="1"/>
-              <a:t>Note</a:t>
-            </a:r>
-            <a:r>
-              <a:rPr lang="nl-NL" dirty="0"/>
-              <a:t> </a:t>
-            </a:r>
-            <a:r>
-              <a:rPr lang="nl-NL" dirty="0" err="1"/>
-              <a:t>the</a:t>
-            </a:r>
-            <a:r>
-              <a:rPr lang="nl-NL" dirty="0"/>
-              <a:t> </a:t>
-            </a:r>
-            <a:r>
-              <a:rPr lang="nl-NL" dirty="0" err="1"/>
-              <a:t>robot’s</a:t>
-            </a:r>
-            <a:r>
-              <a:rPr lang="nl-NL" dirty="0"/>
-              <a:t> IP </a:t>
-            </a:r>
-            <a:r>
-              <a:rPr lang="nl-NL" dirty="0" err="1"/>
-              <a:t>address</a:t>
-            </a:r>
-            <a:r>
-              <a:rPr lang="nl-NL" dirty="0"/>
-              <a:t> e.g. “192.168.0.115”</a:t>
-            </a:r>
-          </a:p>
-          <a:p>
-            <a:endParaRPr lang="nl-NL" dirty="0"/>
-          </a:p>
-          <a:p>
-            <a:r>
-              <a:rPr lang="nl-NL" dirty="0"/>
-              <a:t>in </a:t>
-            </a:r>
-            <a:r>
-              <a:rPr lang="nl-NL" dirty="0" err="1"/>
-              <a:t>your</a:t>
-            </a:r>
-            <a:r>
-              <a:rPr lang="nl-NL" dirty="0"/>
-              <a:t> program </a:t>
-            </a:r>
-            <a:r>
-              <a:rPr lang="nl-NL" dirty="0" err="1"/>
-              <a:t>add</a:t>
-            </a:r>
-            <a:r>
-              <a:rPr lang="nl-NL" dirty="0"/>
-              <a:t> the </a:t>
-            </a:r>
-            <a:r>
-              <a:rPr lang="nl-NL" dirty="0" err="1"/>
-              <a:t>line</a:t>
-            </a:r>
-            <a:endParaRPr lang="nl-NL" dirty="0"/>
-          </a:p>
-          <a:p>
-            <a:pPr marL="409575" lvl="2" indent="0">
-              <a:buNone/>
-            </a:pPr>
-            <a:r>
-              <a:rPr lang="nl-NL" dirty="0" err="1">
-                <a:latin typeface="Courier"/>
-              </a:rPr>
-              <a:t>nao.InitProxy</a:t>
-            </a:r>
-            <a:r>
-              <a:rPr lang="nl-NL" dirty="0">
-                <a:latin typeface="Courier"/>
-              </a:rPr>
-              <a:t>(“192.168.0.115”, [0])</a:t>
-            </a:r>
-          </a:p>
-          <a:p>
-            <a:endParaRPr lang="nl-NL" dirty="0"/>
-          </a:p>
-          <a:p>
-            <a:r>
-              <a:rPr lang="nl-NL" dirty="0" err="1"/>
-              <a:t>If</a:t>
-            </a:r>
-            <a:r>
-              <a:rPr lang="nl-NL" dirty="0"/>
               <a:t> all </a:t>
             </a:r>
             <a:r>
@@ -17565,32 +17503,37 @@
             </a:r>
             <a:r>
               <a:rPr lang="nl-NL" dirty="0"/>
-              <a:t> to </a:t>
+              <a:t> to the </a:t>
             </a:r>
             <a:r>
               <a:rPr lang="nl-NL" dirty="0" err="1"/>
-              <a:t>the</a:t>
-            </a:r>
-            <a:r>
-              <a:rPr lang="nl-NL" dirty="0"/>
-              <a:t> real robot</a:t>
+              <a:t>simulated</a:t>
+            </a:r>
+            <a:r>
+              <a:rPr lang="nl-NL" dirty="0"/>
+              <a:t> robot</a:t>
             </a:r>
             <a:endParaRPr lang="en-US" dirty="0"/>
           </a:p>
         </p:txBody>
       </p:sp>
     </p:spTree>
+    <p:extLst>
+      <p:ext uri="{BB962C8B-B14F-4D97-AF65-F5344CB8AC3E}">
+        <p14:creationId xmlns:p14="http://schemas.microsoft.com/office/powerpoint/2010/main" val="3201636391"/>
+      </p:ext>
+    </p:extLst>
   </p:cSld>
   <p:clrMapOvr>
     <a:masterClrMapping/>
   </p:clrMapOvr>
-  <mc:AlternateContent xmlns:mc="http://schemas.openxmlformats.org/markup-compatibility/2006" xmlns:p14="http://schemas.microsoft.com/office/powerpoint/2010/main">
-    <mc:Choice Requires="p14">
+  <mc:AlternateContent xmlns:mc="http://schemas.openxmlformats.org/markup-compatibility/2006">
+    <mc:Choice xmlns:p14="http://schemas.microsoft.com/office/powerpoint/2010/main" Requires="p14">
       <p:transition spd="med" p14:dur="700">
         <p:fade/>
       </p:transition>
     </mc:Choice>
-    <mc:Fallback xmlns="">
+    <mc:Fallback>
       <p:transition spd="med">
         <p:fade/>
       </p:transition>
@@ -17656,25 +17599,7 @@
           <a:p>
             <a:r>
               <a:rPr lang="nl-NL" dirty="0"/>
-              <a:t>General tips</a:t>
-            </a:r>
-          </a:p>
-          <a:p>
-            <a:r>
-              <a:rPr lang="nl-NL" dirty="0" err="1"/>
-              <a:t>To</a:t>
-            </a:r>
-            <a:r>
-              <a:rPr lang="nl-NL" dirty="0"/>
-              <a:t> </a:t>
-            </a:r>
-            <a:r>
-              <a:rPr lang="nl-NL" dirty="0" err="1"/>
-              <a:t>shut</a:t>
-            </a:r>
-            <a:r>
-              <a:rPr lang="nl-NL" dirty="0"/>
-              <a:t> down </a:t>
+              <a:t>Connect </a:t>
             </a:r>
             <a:r>
               <a:rPr lang="nl-NL" dirty="0" err="1"/>
@@ -17682,15 +17607,13 @@
             </a:r>
             <a:r>
               <a:rPr lang="nl-NL" dirty="0"/>
-              <a:t> robot, </a:t>
-            </a:r>
-            <a:r>
-              <a:rPr lang="nl-NL" dirty="0" err="1"/>
-              <a:t>press</a:t>
-            </a:r>
-            <a:r>
-              <a:rPr lang="nl-NL" dirty="0"/>
-              <a:t> </a:t>
+              <a:t> router</a:t>
+            </a:r>
+          </a:p>
+          <a:p>
+            <a:r>
+              <a:rPr lang="nl-NL" dirty="0"/>
+              <a:t>Start </a:t>
             </a:r>
             <a:r>
               <a:rPr lang="nl-NL" dirty="0" err="1"/>
@@ -17698,6 +17621,22 @@
             </a:r>
             <a:r>
               <a:rPr lang="nl-NL" dirty="0"/>
+              <a:t> robot </a:t>
+            </a:r>
+            <a:r>
+              <a:rPr lang="nl-NL" dirty="0" err="1"/>
+              <a:t>by</a:t>
+            </a:r>
+            <a:r>
+              <a:rPr lang="nl-NL" dirty="0"/>
+              <a:t> pressing </a:t>
+            </a:r>
+            <a:r>
+              <a:rPr lang="nl-NL" dirty="0" err="1"/>
+              <a:t>the</a:t>
+            </a:r>
+            <a:r>
+              <a:rPr lang="nl-NL" dirty="0"/>
               <a:t> </a:t>
             </a:r>
             <a:r>
@@ -17706,44 +17645,21 @@
             </a:r>
             <a:r>
               <a:rPr lang="nl-NL" dirty="0"/>
-              <a:t> button </a:t>
+              <a:t> button</a:t>
+            </a:r>
+          </a:p>
+          <a:p>
+            <a:r>
+              <a:rPr lang="nl-NL" dirty="0"/>
+              <a:t>Press </a:t>
             </a:r>
             <a:r>
               <a:rPr lang="nl-NL" dirty="0" err="1"/>
-              <a:t>for</a:t>
-            </a:r>
-            <a:r>
-              <a:rPr lang="nl-NL" dirty="0"/>
-              <a:t> 5 </a:t>
-            </a:r>
-            <a:r>
-              <a:rPr lang="nl-NL" dirty="0" err="1"/>
-              <a:t>seconds</a:t>
-            </a:r>
-            <a:endParaRPr lang="nl-NL" dirty="0"/>
-          </a:p>
-          <a:p>
-            <a:endParaRPr lang="nl-NL" dirty="0"/>
-          </a:p>
-          <a:p>
-            <a:r>
-              <a:rPr lang="nl-NL" dirty="0" err="1"/>
-              <a:t>Testing</a:t>
-            </a:r>
-            <a:endParaRPr lang="nl-NL" dirty="0"/>
-          </a:p>
-          <a:p>
-            <a:r>
-              <a:rPr lang="nl-NL" dirty="0"/>
-              <a:t>Test </a:t>
-            </a:r>
-            <a:r>
-              <a:rPr lang="nl-NL" dirty="0" err="1"/>
-              <a:t>using</a:t>
-            </a:r>
-            <a:r>
-              <a:rPr lang="nl-NL" dirty="0"/>
-              <a:t> </a:t>
+              <a:t>once</a:t>
+            </a:r>
+            <a:r>
+              <a:rPr lang="nl-NL" dirty="0"/>
+              <a:t> on </a:t>
             </a:r>
             <a:r>
               <a:rPr lang="nl-NL" dirty="0" err="1"/>
@@ -17751,7 +17667,111 @@
             </a:r>
             <a:r>
               <a:rPr lang="nl-NL" dirty="0"/>
-              <a:t> simulator! Just change </a:t>
+              <a:t> </a:t>
+            </a:r>
+            <a:r>
+              <a:rPr lang="nl-NL" dirty="0" err="1"/>
+              <a:t>chest</a:t>
+            </a:r>
+            <a:r>
+              <a:rPr lang="nl-NL" dirty="0"/>
+              <a:t> button </a:t>
+            </a:r>
+            <a:r>
+              <a:rPr lang="nl-NL" dirty="0" err="1"/>
+              <a:t>to</a:t>
+            </a:r>
+            <a:r>
+              <a:rPr lang="nl-NL" dirty="0"/>
+              <a:t> </a:t>
+            </a:r>
+            <a:r>
+              <a:rPr lang="nl-NL" dirty="0" err="1"/>
+              <a:t>hear</a:t>
+            </a:r>
+            <a:r>
+              <a:rPr lang="nl-NL" dirty="0"/>
+              <a:t> </a:t>
+            </a:r>
+            <a:r>
+              <a:rPr lang="nl-NL" dirty="0" err="1"/>
+              <a:t>Nao</a:t>
+            </a:r>
+            <a:r>
+              <a:rPr lang="nl-NL" dirty="0"/>
+              <a:t> say </a:t>
+            </a:r>
+            <a:r>
+              <a:rPr lang="nl-NL" dirty="0" err="1"/>
+              <a:t>its</a:t>
+            </a:r>
+            <a:r>
+              <a:rPr lang="nl-NL" dirty="0"/>
+              <a:t> </a:t>
+            </a:r>
+            <a:r>
+              <a:rPr lang="nl-NL" dirty="0" err="1"/>
+              <a:t>own</a:t>
+            </a:r>
+            <a:r>
+              <a:rPr lang="nl-NL" dirty="0"/>
+              <a:t> </a:t>
+            </a:r>
+            <a:r>
+              <a:rPr lang="nl-NL" dirty="0" err="1"/>
+              <a:t>ip</a:t>
+            </a:r>
+            <a:r>
+              <a:rPr lang="nl-NL" dirty="0"/>
+              <a:t> </a:t>
+            </a:r>
+            <a:r>
+              <a:rPr lang="nl-NL" dirty="0" err="1"/>
+              <a:t>address</a:t>
+            </a:r>
+            <a:r>
+              <a:rPr lang="nl-NL" dirty="0"/>
+              <a:t>. </a:t>
+            </a:r>
+            <a:r>
+              <a:rPr lang="nl-NL" dirty="0" err="1"/>
+              <a:t>If</a:t>
+            </a:r>
+            <a:r>
+              <a:rPr lang="nl-NL" dirty="0"/>
+              <a:t> </a:t>
+            </a:r>
+            <a:r>
+              <a:rPr lang="nl-NL" dirty="0" err="1"/>
+              <a:t>it</a:t>
+            </a:r>
+            <a:r>
+              <a:rPr lang="nl-NL" dirty="0"/>
+              <a:t> </a:t>
+            </a:r>
+            <a:r>
+              <a:rPr lang="nl-NL" dirty="0" err="1"/>
+              <a:t>cannot</a:t>
+            </a:r>
+            <a:r>
+              <a:rPr lang="nl-NL" dirty="0"/>
+              <a:t> </a:t>
+            </a:r>
+            <a:r>
+              <a:rPr lang="nl-NL" dirty="0" err="1"/>
+              <a:t>connect</a:t>
+            </a:r>
+            <a:r>
+              <a:rPr lang="nl-NL" dirty="0"/>
+              <a:t> make </a:t>
+            </a:r>
+            <a:r>
+              <a:rPr lang="nl-NL" dirty="0" err="1"/>
+              <a:t>sure</a:t>
+            </a:r>
+            <a:r>
+              <a:rPr lang="nl-NL" dirty="0"/>
+              <a:t> </a:t>
             </a:r>
             <a:r>
               <a:rPr lang="nl-NL" dirty="0" err="1"/>
@@ -17759,8 +17779,167 @@
             </a:r>
             <a:r>
               <a:rPr lang="nl-NL" dirty="0"/>
-              <a:t> IP</a:t>
-            </a:r>
+              <a:t> </a:t>
+            </a:r>
+            <a:r>
+              <a:rPr lang="nl-NL" dirty="0" err="1"/>
+              <a:t>wireless</a:t>
+            </a:r>
+            <a:r>
+              <a:rPr lang="nl-NL" dirty="0"/>
+              <a:t> </a:t>
+            </a:r>
+            <a:r>
+              <a:rPr lang="nl-NL" dirty="0" err="1"/>
+              <a:t>configuration</a:t>
+            </a:r>
+            <a:r>
+              <a:rPr lang="nl-NL" dirty="0"/>
+              <a:t> is ok (</a:t>
+            </a:r>
+            <a:r>
+              <a:rPr lang="nl-NL" dirty="0" err="1"/>
+              <a:t>ask</a:t>
+            </a:r>
+            <a:r>
+              <a:rPr lang="nl-NL" dirty="0"/>
+              <a:t> help)</a:t>
+            </a:r>
+          </a:p>
+          <a:p>
+            <a:endParaRPr lang="nl-NL" dirty="0"/>
+          </a:p>
+          <a:p>
+            <a:r>
+              <a:rPr lang="nl-NL" dirty="0" err="1"/>
+              <a:t>Note</a:t>
+            </a:r>
+            <a:r>
+              <a:rPr lang="nl-NL" dirty="0"/>
+              <a:t> </a:t>
+            </a:r>
+            <a:r>
+              <a:rPr lang="nl-NL" dirty="0" err="1"/>
+              <a:t>the</a:t>
+            </a:r>
+            <a:r>
+              <a:rPr lang="nl-NL" dirty="0"/>
+              <a:t> </a:t>
+            </a:r>
+            <a:r>
+              <a:rPr lang="nl-NL" dirty="0" err="1"/>
+              <a:t>robot’s</a:t>
+            </a:r>
+            <a:r>
+              <a:rPr lang="nl-NL" dirty="0"/>
+              <a:t> IP </a:t>
+            </a:r>
+            <a:r>
+              <a:rPr lang="nl-NL" dirty="0" err="1"/>
+              <a:t>address</a:t>
+            </a:r>
+            <a:r>
+              <a:rPr lang="nl-NL" dirty="0"/>
+              <a:t> e.g. “192.168.0.115”</a:t>
+            </a:r>
+          </a:p>
+          <a:p>
+            <a:pPr marL="202500" lvl="3" indent="0">
+              <a:buNone/>
+            </a:pPr>
+            <a:r>
+              <a:rPr lang="en-NL" sz="900" dirty="0">
+                <a:latin typeface="Courier New" panose="02070309020205020404" pitchFamily="49" charset="0"/>
+                <a:cs typeface="Courier New" panose="02070309020205020404" pitchFamily="49" charset="0"/>
+              </a:rPr>
+              <a:t>import qi</a:t>
+            </a:r>
+          </a:p>
+          <a:p>
+            <a:pPr marL="202500" lvl="3" indent="0">
+              <a:buNone/>
+            </a:pPr>
+            <a:r>
+              <a:rPr lang="en-NL" sz="900" dirty="0">
+                <a:latin typeface="Courier New" panose="02070309020205020404" pitchFamily="49" charset="0"/>
+                <a:cs typeface="Courier New" panose="02070309020205020404" pitchFamily="49" charset="0"/>
+              </a:rPr>
+              <a:t>print(qi.__version__)  # 3.1.5</a:t>
+            </a:r>
+          </a:p>
+          <a:p>
+            <a:pPr marL="202500" lvl="3" indent="0">
+              <a:buNone/>
+            </a:pPr>
+            <a:r>
+              <a:rPr lang="en-NL" sz="900" dirty="0">
+                <a:latin typeface="Courier New" panose="02070309020205020404" pitchFamily="49" charset="0"/>
+                <a:cs typeface="Courier New" panose="02070309020205020404" pitchFamily="49" charset="0"/>
+              </a:rPr>
+              <a:t> </a:t>
+            </a:r>
+          </a:p>
+          <a:p>
+            <a:pPr marL="202500" lvl="3" indent="0">
+              <a:buNone/>
+            </a:pPr>
+            <a:r>
+              <a:rPr lang="en-NL" sz="900" dirty="0">
+                <a:latin typeface="Courier New" panose="02070309020205020404" pitchFamily="49" charset="0"/>
+                <a:cs typeface="Courier New" panose="02070309020205020404" pitchFamily="49" charset="0"/>
+              </a:rPr>
+              <a:t>session = qi.Session()</a:t>
+            </a:r>
+          </a:p>
+          <a:p>
+            <a:pPr marL="202500" lvl="3" indent="0">
+              <a:buNone/>
+            </a:pPr>
+            <a:r>
+              <a:rPr lang="en-NL" sz="900" dirty="0">
+                <a:latin typeface="Courier New" panose="02070309020205020404" pitchFamily="49" charset="0"/>
+                <a:cs typeface="Courier New" panose="02070309020205020404" pitchFamily="49" charset="0"/>
+              </a:rPr>
+              <a:t>session.connect("tcp://</a:t>
+            </a:r>
+            <a:r>
+              <a:rPr lang="nl-NL" sz="900" dirty="0"/>
+              <a:t> 192.168.0.115 </a:t>
+            </a:r>
+            <a:r>
+              <a:rPr lang="en-NL" sz="900" dirty="0">
+                <a:latin typeface="Courier New" panose="02070309020205020404" pitchFamily="49" charset="0"/>
+                <a:cs typeface="Courier New" panose="02070309020205020404" pitchFamily="49" charset="0"/>
+              </a:rPr>
+              <a:t>:9559")</a:t>
+            </a:r>
+          </a:p>
+          <a:p>
+            <a:pPr marL="202500" lvl="3" indent="0">
+              <a:buNone/>
+            </a:pPr>
+            <a:r>
+              <a:rPr lang="en-NL" sz="900" dirty="0">
+                <a:latin typeface="Courier New" panose="02070309020205020404" pitchFamily="49" charset="0"/>
+                <a:cs typeface="Courier New" panose="02070309020205020404" pitchFamily="49" charset="0"/>
+              </a:rPr>
+              <a:t>tts = session.service("ALTextToSpeech")</a:t>
+            </a:r>
+          </a:p>
+          <a:p>
+            <a:pPr marL="202500" lvl="3" indent="0">
+              <a:buNone/>
+            </a:pPr>
+            <a:r>
+              <a:rPr lang="en-NL" sz="900" dirty="0">
+                <a:latin typeface="Courier New" panose="02070309020205020404" pitchFamily="49" charset="0"/>
+                <a:cs typeface="Courier New" panose="02070309020205020404" pitchFamily="49" charset="0"/>
+              </a:rPr>
+              <a:t>tts.say("Hello from Windows!")</a:t>
+            </a:r>
+          </a:p>
+          <a:p>
+            <a:endParaRPr lang="nl-NL" dirty="0"/>
           </a:p>
           <a:p>
             <a:r>
@@ -17769,15 +17948,7 @@
             </a:r>
             <a:r>
               <a:rPr lang="nl-NL" dirty="0"/>
-              <a:t> </a:t>
-            </a:r>
-            <a:r>
-              <a:rPr lang="nl-NL" dirty="0" err="1"/>
-              <a:t>something</a:t>
-            </a:r>
-            <a:r>
-              <a:rPr lang="nl-NL" dirty="0"/>
-              <a:t> </a:t>
+              <a:t> all </a:t>
             </a:r>
             <a:r>
               <a:rPr lang="nl-NL" dirty="0" err="1"/>
@@ -17785,15 +17956,23 @@
             </a:r>
             <a:r>
               <a:rPr lang="nl-NL" dirty="0"/>
-              <a:t> wrong, </a:t>
+              <a:t> well </a:t>
             </a:r>
             <a:r>
               <a:rPr lang="nl-NL" dirty="0" err="1"/>
-              <a:t>press</a:t>
-            </a:r>
-            <a:r>
-              <a:rPr lang="nl-NL" dirty="0"/>
-              <a:t> </a:t>
+              <a:t>you</a:t>
+            </a:r>
+            <a:r>
+              <a:rPr lang="nl-NL" dirty="0"/>
+              <a:t> are </a:t>
+            </a:r>
+            <a:r>
+              <a:rPr lang="nl-NL" dirty="0" err="1"/>
+              <a:t>connected</a:t>
+            </a:r>
+            <a:r>
+              <a:rPr lang="nl-NL" dirty="0"/>
+              <a:t> to </a:t>
             </a:r>
             <a:r>
               <a:rPr lang="nl-NL" dirty="0" err="1"/>
@@ -17801,190 +17980,13 @@
             </a:r>
             <a:r>
               <a:rPr lang="nl-NL" dirty="0"/>
-              <a:t> </a:t>
-            </a:r>
-            <a:r>
-              <a:rPr lang="nl-NL" dirty="0" err="1"/>
-              <a:t>chest</a:t>
-            </a:r>
-            <a:r>
-              <a:rPr lang="nl-NL" dirty="0"/>
-              <a:t> button </a:t>
-            </a:r>
-            <a:r>
-              <a:rPr lang="nl-NL" dirty="0" err="1"/>
-              <a:t>twice</a:t>
-            </a:r>
-            <a:r>
-              <a:rPr lang="nl-NL" dirty="0"/>
-              <a:t> </a:t>
-            </a:r>
-            <a:r>
-              <a:rPr lang="nl-NL" dirty="0" err="1"/>
-              <a:t>to</a:t>
-            </a:r>
-            <a:r>
-              <a:rPr lang="nl-NL" dirty="0"/>
-              <a:t> release </a:t>
-            </a:r>
-            <a:r>
-              <a:rPr lang="nl-NL" dirty="0" err="1"/>
-              <a:t>the</a:t>
-            </a:r>
-            <a:r>
-              <a:rPr lang="nl-NL" dirty="0"/>
-              <a:t> joint </a:t>
-            </a:r>
-            <a:r>
-              <a:rPr lang="nl-NL" dirty="0" err="1"/>
-              <a:t>stiffness</a:t>
-            </a:r>
-            <a:r>
-              <a:rPr lang="nl-NL" dirty="0"/>
-              <a:t> (do </a:t>
-            </a:r>
-            <a:r>
-              <a:rPr lang="nl-NL" dirty="0" err="1"/>
-              <a:t>this</a:t>
-            </a:r>
-            <a:r>
-              <a:rPr lang="nl-NL" dirty="0"/>
-              <a:t> </a:t>
-            </a:r>
-            <a:r>
-              <a:rPr lang="nl-NL" dirty="0" err="1"/>
-              <a:t>quickly</a:t>
-            </a:r>
-            <a:r>
-              <a:rPr lang="nl-NL" dirty="0"/>
-              <a:t> like a double click) </a:t>
-            </a:r>
-          </a:p>
-          <a:p>
-            <a:r>
-              <a:rPr lang="nl-NL" dirty="0"/>
-              <a:t>Always </a:t>
-            </a:r>
-            <a:r>
-              <a:rPr lang="nl-NL" dirty="0" err="1"/>
-              <a:t>pick</a:t>
-            </a:r>
-            <a:r>
-              <a:rPr lang="nl-NL" dirty="0"/>
-              <a:t> </a:t>
-            </a:r>
-            <a:r>
-              <a:rPr lang="nl-NL" dirty="0" err="1"/>
-              <a:t>it</a:t>
-            </a:r>
-            <a:r>
-              <a:rPr lang="nl-NL" dirty="0"/>
-              <a:t> up </a:t>
-            </a:r>
-            <a:r>
-              <a:rPr lang="nl-NL" dirty="0" err="1"/>
-              <a:t>by</a:t>
-            </a:r>
-            <a:r>
-              <a:rPr lang="nl-NL" dirty="0"/>
-              <a:t> </a:t>
-            </a:r>
-            <a:r>
-              <a:rPr lang="nl-NL" dirty="0" err="1"/>
-              <a:t>the</a:t>
-            </a:r>
-            <a:r>
-              <a:rPr lang="nl-NL" dirty="0"/>
-              <a:t> </a:t>
-            </a:r>
-            <a:r>
-              <a:rPr lang="nl-NL" dirty="0" err="1"/>
-              <a:t>waist</a:t>
-            </a:r>
-            <a:endParaRPr lang="nl-NL" dirty="0"/>
-          </a:p>
-          <a:p>
-            <a:r>
-              <a:rPr lang="nl-NL" dirty="0"/>
-              <a:t>Always </a:t>
-            </a:r>
-            <a:r>
-              <a:rPr lang="nl-NL" dirty="0" err="1"/>
-              <a:t>place</a:t>
-            </a:r>
-            <a:r>
-              <a:rPr lang="nl-NL" dirty="0"/>
-              <a:t> </a:t>
-            </a:r>
-            <a:r>
-              <a:rPr lang="nl-NL" dirty="0" err="1"/>
-              <a:t>the</a:t>
-            </a:r>
-            <a:r>
-              <a:rPr lang="nl-NL" dirty="0"/>
-              <a:t> robot on </a:t>
-            </a:r>
-            <a:r>
-              <a:rPr lang="nl-NL" dirty="0" err="1"/>
-              <a:t>the</a:t>
-            </a:r>
-            <a:r>
-              <a:rPr lang="nl-NL" dirty="0"/>
-              <a:t> floor </a:t>
-            </a:r>
-            <a:r>
-              <a:rPr lang="nl-NL" dirty="0" err="1"/>
-              <a:t>during</a:t>
-            </a:r>
-            <a:r>
-              <a:rPr lang="nl-NL" dirty="0"/>
-              <a:t> </a:t>
-            </a:r>
-            <a:r>
-              <a:rPr lang="nl-NL" dirty="0" err="1"/>
-              <a:t>testing</a:t>
-            </a:r>
-            <a:endParaRPr lang="nl-NL" dirty="0"/>
-          </a:p>
-          <a:p>
-            <a:r>
-              <a:rPr lang="nl-NL" dirty="0"/>
-              <a:t>Put soft </a:t>
-            </a:r>
-            <a:r>
-              <a:rPr lang="nl-NL" dirty="0" err="1"/>
-              <a:t>foam</a:t>
-            </a:r>
-            <a:r>
-              <a:rPr lang="nl-NL" dirty="0"/>
-              <a:t> </a:t>
-            </a:r>
-            <a:r>
-              <a:rPr lang="nl-NL" dirty="0" err="1"/>
-              <a:t>behind</a:t>
-            </a:r>
-            <a:r>
-              <a:rPr lang="nl-NL" dirty="0"/>
-              <a:t> </a:t>
-            </a:r>
-            <a:r>
-              <a:rPr lang="nl-NL" dirty="0" err="1"/>
-              <a:t>the</a:t>
-            </a:r>
-            <a:r>
-              <a:rPr lang="nl-NL" dirty="0"/>
-              <a:t> robot</a:t>
+              <a:t> real robot</a:t>
             </a:r>
             <a:endParaRPr lang="en-US" dirty="0"/>
           </a:p>
         </p:txBody>
       </p:sp>
     </p:spTree>
-    <p:extLst>
-      <p:ext uri="{BB962C8B-B14F-4D97-AF65-F5344CB8AC3E}">
-        <p14:creationId xmlns:p14="http://schemas.microsoft.com/office/powerpoint/2010/main" val="1036905762"/>
-      </p:ext>
-    </p:extLst>
   </p:cSld>
   <p:clrMapOvr>
     <a:masterClrMapping/>
@@ -18023,7 +18025,7 @@
       </p:grpSpPr>
       <p:sp>
         <p:nvSpPr>
-          <p:cNvPr id="2" name="Titel 1"/>
+          <p:cNvPr id="2" name="Title 1"/>
           <p:cNvSpPr>
             <a:spLocks noGrp="1"/>
           </p:cNvSpPr>
@@ -18037,15 +18039,16 @@
           <a:lstStyle/>
           <a:p>
             <a:r>
-              <a:rPr lang="en-US" dirty="0"/>
-              <a:t>Simple commands</a:t>
-            </a:r>
-          </a:p>
-        </p:txBody>
-      </p:sp>
-      <p:sp>
-        <p:nvSpPr>
-          <p:cNvPr id="3" name="Tijdelijke aanduiding voor inhoud 2"/>
+              <a:rPr lang="nl-NL" dirty="0"/>
+              <a:t>Real robot</a:t>
+            </a:r>
+            <a:endParaRPr lang="en-US" dirty="0"/>
+          </a:p>
+        </p:txBody>
+      </p:sp>
+      <p:sp>
+        <p:nvSpPr>
+          <p:cNvPr id="3" name="Content Placeholder 2"/>
           <p:cNvSpPr>
             <a:spLocks noGrp="1"/>
           </p:cNvSpPr>
@@ -18053,202 +18056,356 @@
             <p:ph idx="1"/>
           </p:nvPr>
         </p:nvSpPr>
-        <p:spPr>
-          <a:xfrm>
-            <a:off x="610099" y="1073150"/>
-            <a:ext cx="7825978" cy="3496469"/>
-          </a:xfrm>
-        </p:spPr>
-        <p:txBody>
-          <a:bodyPr/>
-          <a:lstStyle/>
-          <a:p>
-            <a:pPr marL="0" lvl="2" indent="0">
-              <a:buNone/>
+        <p:spPr/>
+        <p:txBody>
+          <a:bodyPr/>
+          <a:lstStyle/>
+          <a:p>
+            <a:r>
+              <a:rPr lang="nl-NL" dirty="0"/>
+              <a:t>General tips</a:t>
+            </a:r>
+          </a:p>
+          <a:p>
+            <a:pPr marL="285750" indent="-285750">
+              <a:buFont typeface="Arial" panose="020B0604020202020204" pitchFamily="34" charset="0"/>
+              <a:buChar char="•"/>
             </a:pPr>
             <a:r>
-              <a:rPr lang="en-US" dirty="0" err="1"/>
-              <a:t>nao.Say</a:t>
-            </a:r>
-            <a:r>
-              <a:rPr lang="en-US" dirty="0"/>
-              <a:t>(“Hello”)</a:t>
-            </a:r>
-          </a:p>
-          <a:p>
-            <a:pPr marL="0" lvl="2" indent="0">
-              <a:buNone/>
+              <a:rPr lang="nl-NL" dirty="0" err="1"/>
+              <a:t>To</a:t>
+            </a:r>
+            <a:r>
+              <a:rPr lang="nl-NL" dirty="0"/>
+              <a:t> </a:t>
+            </a:r>
+            <a:r>
+              <a:rPr lang="nl-NL" dirty="0" err="1"/>
+              <a:t>shut</a:t>
+            </a:r>
+            <a:r>
+              <a:rPr lang="nl-NL" dirty="0"/>
+              <a:t> down </a:t>
+            </a:r>
+            <a:r>
+              <a:rPr lang="nl-NL" dirty="0" err="1"/>
+              <a:t>the</a:t>
+            </a:r>
+            <a:r>
+              <a:rPr lang="nl-NL" dirty="0"/>
+              <a:t> robot, </a:t>
+            </a:r>
+            <a:r>
+              <a:rPr lang="nl-NL" dirty="0" err="1"/>
+              <a:t>press</a:t>
+            </a:r>
+            <a:r>
+              <a:rPr lang="nl-NL" dirty="0"/>
+              <a:t> </a:t>
+            </a:r>
+            <a:r>
+              <a:rPr lang="nl-NL" dirty="0" err="1"/>
+              <a:t>the</a:t>
+            </a:r>
+            <a:r>
+              <a:rPr lang="nl-NL" dirty="0"/>
+              <a:t> </a:t>
+            </a:r>
+            <a:r>
+              <a:rPr lang="nl-NL" dirty="0" err="1"/>
+              <a:t>chest</a:t>
+            </a:r>
+            <a:r>
+              <a:rPr lang="nl-NL" dirty="0"/>
+              <a:t> button </a:t>
+            </a:r>
+            <a:r>
+              <a:rPr lang="nl-NL" dirty="0" err="1"/>
+              <a:t>for</a:t>
+            </a:r>
+            <a:r>
+              <a:rPr lang="nl-NL" dirty="0"/>
+              <a:t> 5 </a:t>
+            </a:r>
+            <a:r>
+              <a:rPr lang="nl-NL" dirty="0" err="1"/>
+              <a:t>seconds</a:t>
+            </a:r>
+            <a:endParaRPr lang="nl-NL" dirty="0"/>
+          </a:p>
+          <a:p>
+            <a:endParaRPr lang="nl-NL" dirty="0"/>
+          </a:p>
+          <a:p>
+            <a:r>
+              <a:rPr lang="nl-NL" dirty="0" err="1"/>
+              <a:t>Testing</a:t>
+            </a:r>
+            <a:endParaRPr lang="nl-NL" dirty="0"/>
+          </a:p>
+          <a:p>
+            <a:pPr marL="285750" indent="-285750">
+              <a:buFont typeface="Arial" panose="020B0604020202020204" pitchFamily="34" charset="0"/>
+              <a:buChar char="•"/>
             </a:pPr>
             <a:r>
-              <a:rPr lang="en-US" dirty="0" err="1"/>
-              <a:t>nao.InitPose</a:t>
-            </a:r>
-            <a:r>
-              <a:rPr lang="en-US" dirty="0"/>
-              <a:t>() 	#the robot stands up and its joints stiffen</a:t>
-            </a:r>
-          </a:p>
-          <a:p>
-            <a:pPr marL="0" lvl="2" indent="0">
-              <a:buNone/>
+              <a:rPr lang="nl-NL" dirty="0"/>
+              <a:t>Test </a:t>
+            </a:r>
+            <a:r>
+              <a:rPr lang="nl-NL" dirty="0" err="1"/>
+              <a:t>using</a:t>
+            </a:r>
+            <a:r>
+              <a:rPr lang="nl-NL" dirty="0"/>
+              <a:t> </a:t>
+            </a:r>
+            <a:r>
+              <a:rPr lang="nl-NL" dirty="0" err="1"/>
+              <a:t>the</a:t>
+            </a:r>
+            <a:r>
+              <a:rPr lang="nl-NL" dirty="0"/>
+              <a:t> simulator! Just change </a:t>
+            </a:r>
+            <a:r>
+              <a:rPr lang="nl-NL" dirty="0" err="1"/>
+              <a:t>the</a:t>
+            </a:r>
+            <a:r>
+              <a:rPr lang="nl-NL" dirty="0"/>
+              <a:t> IP</a:t>
+            </a:r>
+          </a:p>
+          <a:p>
+            <a:pPr marL="285750" indent="-285750">
+              <a:buFont typeface="Arial" panose="020B0604020202020204" pitchFamily="34" charset="0"/>
+              <a:buChar char="•"/>
             </a:pPr>
             <a:r>
-              <a:rPr lang="en-US" dirty="0" err="1"/>
-              <a:t>nao.Crouch</a:t>
-            </a:r>
-            <a:r>
-              <a:rPr lang="en-US" dirty="0"/>
-              <a:t>()	#the robot sits down and releases its joint stiffness</a:t>
-            </a:r>
-          </a:p>
-          <a:p>
-            <a:pPr marL="0" lvl="2" indent="0">
-              <a:buNone/>
+              <a:rPr lang="nl-NL" dirty="0" err="1"/>
+              <a:t>If</a:t>
+            </a:r>
+            <a:r>
+              <a:rPr lang="nl-NL" dirty="0"/>
+              <a:t> </a:t>
+            </a:r>
+            <a:r>
+              <a:rPr lang="nl-NL" dirty="0" err="1"/>
+              <a:t>something</a:t>
+            </a:r>
+            <a:r>
+              <a:rPr lang="nl-NL" dirty="0"/>
+              <a:t> </a:t>
+            </a:r>
+            <a:r>
+              <a:rPr lang="nl-NL" dirty="0" err="1"/>
+              <a:t>goes</a:t>
+            </a:r>
+            <a:r>
+              <a:rPr lang="nl-NL" dirty="0"/>
+              <a:t> wrong, </a:t>
+            </a:r>
+            <a:r>
+              <a:rPr lang="nl-NL" dirty="0" err="1"/>
+              <a:t>press</a:t>
+            </a:r>
+            <a:r>
+              <a:rPr lang="nl-NL" dirty="0"/>
+              <a:t> </a:t>
+            </a:r>
+            <a:r>
+              <a:rPr lang="nl-NL" dirty="0" err="1"/>
+              <a:t>the</a:t>
+            </a:r>
+            <a:r>
+              <a:rPr lang="nl-NL" dirty="0"/>
+              <a:t> </a:t>
+            </a:r>
+            <a:r>
+              <a:rPr lang="nl-NL" dirty="0" err="1"/>
+              <a:t>chest</a:t>
+            </a:r>
+            <a:r>
+              <a:rPr lang="nl-NL" dirty="0"/>
+              <a:t> button </a:t>
+            </a:r>
+            <a:r>
+              <a:rPr lang="nl-NL" dirty="0" err="1"/>
+              <a:t>twice</a:t>
+            </a:r>
+            <a:r>
+              <a:rPr lang="nl-NL" dirty="0"/>
+              <a:t> </a:t>
+            </a:r>
+            <a:r>
+              <a:rPr lang="nl-NL" dirty="0" err="1"/>
+              <a:t>to</a:t>
+            </a:r>
+            <a:r>
+              <a:rPr lang="nl-NL" dirty="0"/>
+              <a:t> release </a:t>
+            </a:r>
+            <a:r>
+              <a:rPr lang="nl-NL" dirty="0" err="1"/>
+              <a:t>the</a:t>
+            </a:r>
+            <a:r>
+              <a:rPr lang="nl-NL" dirty="0"/>
+              <a:t> joint </a:t>
+            </a:r>
+            <a:r>
+              <a:rPr lang="nl-NL" dirty="0" err="1"/>
+              <a:t>stiffness</a:t>
+            </a:r>
+            <a:r>
+              <a:rPr lang="nl-NL" dirty="0"/>
+              <a:t> (do </a:t>
+            </a:r>
+            <a:r>
+              <a:rPr lang="nl-NL" dirty="0" err="1"/>
+              <a:t>this</a:t>
+            </a:r>
+            <a:r>
+              <a:rPr lang="nl-NL" dirty="0"/>
+              <a:t> </a:t>
+            </a:r>
+            <a:r>
+              <a:rPr lang="nl-NL" dirty="0" err="1"/>
+              <a:t>quickly</a:t>
+            </a:r>
+            <a:r>
+              <a:rPr lang="nl-NL" dirty="0"/>
+              <a:t> like a double click) </a:t>
+            </a:r>
+          </a:p>
+          <a:p>
+            <a:pPr marL="285750" indent="-285750">
+              <a:buFont typeface="Arial" panose="020B0604020202020204" pitchFamily="34" charset="0"/>
+              <a:buChar char="•"/>
             </a:pPr>
-            <a:endParaRPr lang="en-US" dirty="0"/>
-          </a:p>
-          <a:p>
-            <a:pPr marL="0" lvl="2" indent="0">
-              <a:buNone/>
+            <a:r>
+              <a:rPr lang="nl-NL" dirty="0"/>
+              <a:t>Always </a:t>
+            </a:r>
+            <a:r>
+              <a:rPr lang="nl-NL" dirty="0" err="1"/>
+              <a:t>pick</a:t>
+            </a:r>
+            <a:r>
+              <a:rPr lang="nl-NL" dirty="0"/>
+              <a:t> </a:t>
+            </a:r>
+            <a:r>
+              <a:rPr lang="nl-NL" dirty="0" err="1"/>
+              <a:t>it</a:t>
+            </a:r>
+            <a:r>
+              <a:rPr lang="nl-NL" dirty="0"/>
+              <a:t> up </a:t>
+            </a:r>
+            <a:r>
+              <a:rPr lang="nl-NL" dirty="0" err="1"/>
+              <a:t>by</a:t>
+            </a:r>
+            <a:r>
+              <a:rPr lang="nl-NL" dirty="0"/>
+              <a:t> </a:t>
+            </a:r>
+            <a:r>
+              <a:rPr lang="nl-NL" dirty="0" err="1"/>
+              <a:t>the</a:t>
+            </a:r>
+            <a:r>
+              <a:rPr lang="nl-NL" dirty="0"/>
+              <a:t> </a:t>
+            </a:r>
+            <a:r>
+              <a:rPr lang="nl-NL" dirty="0" err="1"/>
+              <a:t>waist</a:t>
+            </a:r>
+            <a:endParaRPr lang="nl-NL" dirty="0"/>
+          </a:p>
+          <a:p>
+            <a:pPr marL="285750" indent="-285750">
+              <a:buFont typeface="Arial" panose="020B0604020202020204" pitchFamily="34" charset="0"/>
+              <a:buChar char="•"/>
             </a:pPr>
-            <a:endParaRPr lang="en-US" dirty="0"/>
-          </a:p>
-          <a:p>
-            <a:pPr marL="0" lvl="2" indent="0">
-              <a:buNone/>
+            <a:r>
+              <a:rPr lang="nl-NL" dirty="0"/>
+              <a:t>Always </a:t>
+            </a:r>
+            <a:r>
+              <a:rPr lang="nl-NL" dirty="0" err="1"/>
+              <a:t>place</a:t>
+            </a:r>
+            <a:r>
+              <a:rPr lang="nl-NL" dirty="0"/>
+              <a:t> </a:t>
+            </a:r>
+            <a:r>
+              <a:rPr lang="nl-NL" dirty="0" err="1"/>
+              <a:t>the</a:t>
+            </a:r>
+            <a:r>
+              <a:rPr lang="nl-NL" dirty="0"/>
+              <a:t> robot on </a:t>
+            </a:r>
+            <a:r>
+              <a:rPr lang="nl-NL" dirty="0" err="1"/>
+              <a:t>the</a:t>
+            </a:r>
+            <a:r>
+              <a:rPr lang="nl-NL" dirty="0"/>
+              <a:t> floor </a:t>
+            </a:r>
+            <a:r>
+              <a:rPr lang="nl-NL" dirty="0" err="1"/>
+              <a:t>during</a:t>
+            </a:r>
+            <a:r>
+              <a:rPr lang="nl-NL" dirty="0"/>
+              <a:t> </a:t>
+            </a:r>
+            <a:r>
+              <a:rPr lang="nl-NL" dirty="0" err="1"/>
+              <a:t>testing</a:t>
+            </a:r>
+            <a:endParaRPr lang="nl-NL" dirty="0"/>
+          </a:p>
+          <a:p>
+            <a:pPr marL="285750" indent="-285750">
+              <a:buFont typeface="Arial" panose="020B0604020202020204" pitchFamily="34" charset="0"/>
+              <a:buChar char="•"/>
             </a:pPr>
-            <a:endParaRPr lang="en-US" dirty="0"/>
-          </a:p>
-          <a:p>
-            <a:pPr lvl="2"/>
-            <a:r>
-              <a:rPr lang="en-US" dirty="0"/>
-              <a:t>Always start with </a:t>
-            </a:r>
-            <a:r>
-              <a:rPr lang="en-US" dirty="0" err="1"/>
-              <a:t>InitPose</a:t>
-            </a:r>
-            <a:r>
-              <a:rPr lang="en-US" dirty="0"/>
-              <a:t> and end with Crouch </a:t>
-            </a:r>
-          </a:p>
-          <a:p>
-            <a:pPr lvl="3"/>
-            <a:r>
-              <a:rPr lang="en-US" dirty="0"/>
-              <a:t>It will stiffen and release the joints</a:t>
-            </a:r>
-          </a:p>
-          <a:p>
-            <a:pPr lvl="3"/>
-            <a:r>
-              <a:rPr lang="en-US" dirty="0"/>
-              <a:t>It provides a standard posture</a:t>
-            </a:r>
-          </a:p>
-          <a:p>
-            <a:pPr lvl="3"/>
-            <a:r>
-              <a:rPr lang="en-US" dirty="0"/>
-              <a:t>It prevents “overheating” if the crouches when doing nothing</a:t>
-            </a:r>
-          </a:p>
-          <a:p>
-            <a:pPr marL="202500" lvl="3" indent="0">
-              <a:buNone/>
-            </a:pPr>
-            <a:endParaRPr lang="en-US" dirty="0"/>
-          </a:p>
-          <a:p>
-            <a:pPr lvl="3"/>
-            <a:endParaRPr lang="en-US" dirty="0"/>
-          </a:p>
-          <a:p>
-            <a:pPr lvl="2"/>
-            <a:endParaRPr lang="en-US" dirty="0"/>
-          </a:p>
-          <a:p>
-            <a:pPr lvl="4"/>
-            <a:endParaRPr lang="en-US" dirty="0"/>
-          </a:p>
-          <a:p>
-            <a:pPr marL="0" lvl="2" indent="0">
-              <a:buNone/>
-            </a:pPr>
-            <a:endParaRPr lang="en-US" dirty="0"/>
-          </a:p>
-          <a:p>
-            <a:pPr marL="0" lvl="2" indent="0">
-              <a:buNone/>
-            </a:pPr>
-            <a:endParaRPr lang="en-US" dirty="0"/>
-          </a:p>
-          <a:p>
-            <a:pPr marL="0" lvl="2" indent="0">
-              <a:buNone/>
-            </a:pPr>
-            <a:endParaRPr lang="en-US" dirty="0"/>
-          </a:p>
-          <a:p>
-            <a:pPr lvl="2"/>
-            <a:endParaRPr lang="en-US" dirty="0"/>
-          </a:p>
-          <a:p>
-            <a:pPr lvl="2"/>
-            <a:endParaRPr lang="en-US" dirty="0"/>
-          </a:p>
-          <a:p>
-            <a:pPr marL="0" lvl="2" indent="0">
-              <a:buNone/>
-            </a:pPr>
-            <a:endParaRPr lang="en-US" dirty="0"/>
-          </a:p>
-        </p:txBody>
-      </p:sp>
-      <p:sp>
-        <p:nvSpPr>
-          <p:cNvPr id="4" name="Tijdelijke aanduiding voor voettekst 3"/>
-          <p:cNvSpPr>
-            <a:spLocks noGrp="1"/>
-          </p:cNvSpPr>
-          <p:nvPr>
-            <p:ph type="ftr" sz="quarter" idx="11"/>
-          </p:nvPr>
-        </p:nvSpPr>
-        <p:spPr/>
-        <p:txBody>
-          <a:bodyPr/>
-          <a:lstStyle/>
-          <a:p>
-            <a:r>
-              <a:rPr lang="en-US" dirty="0"/>
-              <a:t>NAO and Pepper Tutorial</a:t>
-            </a:r>
-          </a:p>
-        </p:txBody>
-      </p:sp>
-      <p:sp>
-        <p:nvSpPr>
-          <p:cNvPr id="5" name="Tijdelijke aanduiding voor dianummer 4"/>
-          <p:cNvSpPr>
-            <a:spLocks noGrp="1"/>
-          </p:cNvSpPr>
-          <p:nvPr>
-            <p:ph type="sldNum" sz="quarter" idx="12"/>
-          </p:nvPr>
-        </p:nvSpPr>
-        <p:spPr/>
-        <p:txBody>
-          <a:bodyPr/>
-          <a:lstStyle/>
-          <a:p>
-            <a:fld id="{B7CEC10D-CD46-426F-915E-6C78530279CB}" type="slidenum">
-              <a:rPr lang="en-US" smtClean="0"/>
-              <a:pPr/>
-              <a:t>39</a:t>
-            </a:fld>
+            <a:r>
+              <a:rPr lang="nl-NL" dirty="0"/>
+              <a:t>Put soft </a:t>
+            </a:r>
+            <a:r>
+              <a:rPr lang="nl-NL" dirty="0" err="1"/>
+              <a:t>foam</a:t>
+            </a:r>
+            <a:r>
+              <a:rPr lang="nl-NL" dirty="0"/>
+              <a:t> </a:t>
+            </a:r>
+            <a:r>
+              <a:rPr lang="nl-NL" dirty="0" err="1"/>
+              <a:t>behind</a:t>
+            </a:r>
+            <a:r>
+              <a:rPr lang="nl-NL" dirty="0"/>
+              <a:t> </a:t>
+            </a:r>
+            <a:r>
+              <a:rPr lang="nl-NL" dirty="0" err="1"/>
+              <a:t>the</a:t>
+            </a:r>
+            <a:r>
+              <a:rPr lang="nl-NL" dirty="0"/>
+              <a:t> robot</a:t>
+            </a:r>
             <a:endParaRPr lang="en-US" dirty="0"/>
           </a:p>
         </p:txBody>
@@ -18256,7 +18413,7 @@
     </p:spTree>
     <p:extLst>
       <p:ext uri="{BB962C8B-B14F-4D97-AF65-F5344CB8AC3E}">
-        <p14:creationId xmlns:p14="http://schemas.microsoft.com/office/powerpoint/2010/main" val="2700842431"/>
+        <p14:creationId xmlns:p14="http://schemas.microsoft.com/office/powerpoint/2010/main" val="1036905762"/>
       </p:ext>
     </p:extLst>
   </p:cSld>
@@ -18486,6 +18643,229 @@
     <p:extLst>
       <p:ext uri="{BB962C8B-B14F-4D97-AF65-F5344CB8AC3E}">
         <p14:creationId xmlns:p14="http://schemas.microsoft.com/office/powerpoint/2010/main" val="2928640352"/>
+      </p:ext>
+    </p:extLst>
+  </p:cSld>
+  <p:clrMapOvr>
+    <a:masterClrMapping/>
+  </p:clrMapOvr>
+  <mc:AlternateContent xmlns:mc="http://schemas.openxmlformats.org/markup-compatibility/2006" xmlns:p14="http://schemas.microsoft.com/office/powerpoint/2010/main">
+    <mc:Choice Requires="p14">
+      <p:transition spd="med" p14:dur="700">
+        <p:fade/>
+      </p:transition>
+    </mc:Choice>
+    <mc:Fallback xmlns="">
+      <p:transition spd="med">
+        <p:fade/>
+      </p:transition>
+    </mc:Fallback>
+  </mc:AlternateContent>
+</p:sld>
+</file>
+
+<file path=ppt/slides/slide40.xml><?xml version="1.0" encoding="utf-8"?>
+<p:sld xmlns:a="http://schemas.openxmlformats.org/drawingml/2006/main" xmlns:r="http://schemas.openxmlformats.org/officeDocument/2006/relationships" xmlns:p="http://schemas.openxmlformats.org/presentationml/2006/main">
+  <p:cSld>
+    <p:spTree>
+      <p:nvGrpSpPr>
+        <p:cNvPr id="1" name=""/>
+        <p:cNvGrpSpPr/>
+        <p:nvPr/>
+      </p:nvGrpSpPr>
+      <p:grpSpPr>
+        <a:xfrm>
+          <a:off x="0" y="0"/>
+          <a:ext cx="0" cy="0"/>
+          <a:chOff x="0" y="0"/>
+          <a:chExt cx="0" cy="0"/>
+        </a:xfrm>
+      </p:grpSpPr>
+      <p:sp>
+        <p:nvSpPr>
+          <p:cNvPr id="2" name="Titel 1"/>
+          <p:cNvSpPr>
+            <a:spLocks noGrp="1"/>
+          </p:cNvSpPr>
+          <p:nvPr>
+            <p:ph type="title"/>
+          </p:nvPr>
+        </p:nvSpPr>
+        <p:spPr/>
+        <p:txBody>
+          <a:bodyPr/>
+          <a:lstStyle/>
+          <a:p>
+            <a:r>
+              <a:rPr lang="en-US" dirty="0"/>
+              <a:t>Real Robot</a:t>
+            </a:r>
+          </a:p>
+        </p:txBody>
+      </p:sp>
+      <p:sp>
+        <p:nvSpPr>
+          <p:cNvPr id="3" name="Tijdelijke aanduiding voor inhoud 2"/>
+          <p:cNvSpPr>
+            <a:spLocks noGrp="1"/>
+          </p:cNvSpPr>
+          <p:nvPr>
+            <p:ph idx="1"/>
+          </p:nvPr>
+        </p:nvSpPr>
+        <p:spPr>
+          <a:xfrm>
+            <a:off x="610099" y="1073150"/>
+            <a:ext cx="7825978" cy="3496469"/>
+          </a:xfrm>
+        </p:spPr>
+        <p:txBody>
+          <a:bodyPr/>
+          <a:lstStyle/>
+          <a:p>
+            <a:pPr marL="0" lvl="2" indent="0">
+              <a:buNone/>
+            </a:pPr>
+            <a:endParaRPr lang="en-US" dirty="0"/>
+          </a:p>
+          <a:p>
+            <a:pPr lvl="2"/>
+            <a:r>
+              <a:rPr lang="en-US" dirty="0"/>
+              <a:t>Always start with </a:t>
+            </a:r>
+            <a:r>
+              <a:rPr lang="en-US" dirty="0" err="1"/>
+              <a:t>InitPose</a:t>
+            </a:r>
+            <a:r>
+              <a:rPr lang="en-US" dirty="0"/>
+              <a:t> and end with Crouch </a:t>
+            </a:r>
+          </a:p>
+          <a:p>
+            <a:pPr lvl="3"/>
+            <a:r>
+              <a:rPr lang="en-US" dirty="0"/>
+              <a:t>It will stiffen and release the joints</a:t>
+            </a:r>
+          </a:p>
+          <a:p>
+            <a:pPr lvl="3"/>
+            <a:r>
+              <a:rPr lang="en-US" dirty="0"/>
+              <a:t>It provides a standard posture</a:t>
+            </a:r>
+          </a:p>
+          <a:p>
+            <a:pPr lvl="3"/>
+            <a:r>
+              <a:rPr lang="en-US" dirty="0"/>
+              <a:t>It prevents “overheating” if the crouches when doing nothing</a:t>
+            </a:r>
+          </a:p>
+          <a:p>
+            <a:pPr marL="202500" lvl="3" indent="0">
+              <a:buNone/>
+            </a:pPr>
+            <a:endParaRPr lang="en-US" dirty="0"/>
+          </a:p>
+          <a:p>
+            <a:pPr lvl="3"/>
+            <a:endParaRPr lang="en-US" dirty="0"/>
+          </a:p>
+          <a:p>
+            <a:pPr lvl="2"/>
+            <a:endParaRPr lang="en-US" dirty="0"/>
+          </a:p>
+          <a:p>
+            <a:pPr lvl="4"/>
+            <a:endParaRPr lang="en-US" dirty="0"/>
+          </a:p>
+          <a:p>
+            <a:pPr marL="0" lvl="2" indent="0">
+              <a:buNone/>
+            </a:pPr>
+            <a:endParaRPr lang="en-US" dirty="0"/>
+          </a:p>
+          <a:p>
+            <a:pPr marL="0" lvl="2" indent="0">
+              <a:buNone/>
+            </a:pPr>
+            <a:endParaRPr lang="en-US" dirty="0"/>
+          </a:p>
+          <a:p>
+            <a:pPr marL="0" lvl="2" indent="0">
+              <a:buNone/>
+            </a:pPr>
+            <a:endParaRPr lang="en-US" dirty="0"/>
+          </a:p>
+          <a:p>
+            <a:pPr lvl="2"/>
+            <a:endParaRPr lang="en-US" dirty="0"/>
+          </a:p>
+          <a:p>
+            <a:pPr lvl="2"/>
+            <a:endParaRPr lang="en-US" dirty="0"/>
+          </a:p>
+          <a:p>
+            <a:pPr marL="0" lvl="2" indent="0">
+              <a:buNone/>
+            </a:pPr>
+            <a:endParaRPr lang="en-US" dirty="0"/>
+          </a:p>
+        </p:txBody>
+      </p:sp>
+      <p:sp>
+        <p:nvSpPr>
+          <p:cNvPr id="4" name="Tijdelijke aanduiding voor voettekst 3"/>
+          <p:cNvSpPr>
+            <a:spLocks noGrp="1"/>
+          </p:cNvSpPr>
+          <p:nvPr>
+            <p:ph type="ftr" sz="quarter" idx="11"/>
+          </p:nvPr>
+        </p:nvSpPr>
+        <p:spPr/>
+        <p:txBody>
+          <a:bodyPr/>
+          <a:lstStyle/>
+          <a:p>
+            <a:r>
+              <a:rPr lang="en-US" dirty="0"/>
+              <a:t>NAO and Pepper Tutorial</a:t>
+            </a:r>
+          </a:p>
+        </p:txBody>
+      </p:sp>
+      <p:sp>
+        <p:nvSpPr>
+          <p:cNvPr id="5" name="Tijdelijke aanduiding voor dianummer 4"/>
+          <p:cNvSpPr>
+            <a:spLocks noGrp="1"/>
+          </p:cNvSpPr>
+          <p:nvPr>
+            <p:ph type="sldNum" sz="quarter" idx="12"/>
+          </p:nvPr>
+        </p:nvSpPr>
+        <p:spPr/>
+        <p:txBody>
+          <a:bodyPr/>
+          <a:lstStyle/>
+          <a:p>
+            <a:fld id="{B7CEC10D-CD46-426F-915E-6C78530279CB}" type="slidenum">
+              <a:rPr lang="en-US" smtClean="0"/>
+              <a:pPr/>
+              <a:t>40</a:t>
+            </a:fld>
+            <a:endParaRPr lang="en-US" dirty="0"/>
+          </a:p>
+        </p:txBody>
+      </p:sp>
+    </p:spTree>
+    <p:extLst>
+      <p:ext uri="{BB962C8B-B14F-4D97-AF65-F5344CB8AC3E}">
+        <p14:creationId xmlns:p14="http://schemas.microsoft.com/office/powerpoint/2010/main" val="2700842431"/>
       </p:ext>
     </p:extLst>
   </p:cSld>
